--- a/Science_Teesside/Teaching_Packs/BUILD/lessons/W7A/BUILD_Science_Autumn1_W7A_Food_Sources.pptx
+++ b/Science_Teesside/Teaching_Packs/BUILD/lessons/W7A/BUILD_Science_Autumn1_W7A_Food_Sources.pptx
@@ -2,23 +2,23 @@
 <file path=ppt/presentation.xml><?xml version="1.0" encoding="utf-8"?>
 <p:presentation xmlns:p="http://schemas.openxmlformats.org/presentationml/2006/main">
   <p:sldMasterIdLst>
-    <p:sldMasterId xmlns:r="http://schemas.openxmlformats.org/officeDocument/2006/relationships" id="2147483648" r:id="R873a577632544703"/>
+    <p:sldMasterId xmlns:r="http://schemas.openxmlformats.org/officeDocument/2006/relationships" id="2147483648" r:id="R44a991a563304872"/>
   </p:sldMasterIdLst>
   <p:notesMasterIdLst>
-    <p:notesMasterId xmlns:r="http://schemas.openxmlformats.org/officeDocument/2006/relationships" r:id="Rad6c917646534964"/>
+    <p:notesMasterId xmlns:r="http://schemas.openxmlformats.org/officeDocument/2006/relationships" r:id="R4ad585d0dc8141e5"/>
   </p:notesMasterIdLst>
   <p:sldIdLst>
-    <p:sldId xmlns:r="http://schemas.openxmlformats.org/officeDocument/2006/relationships" id="256" r:id="R617560986d9e4c18"/>
-    <p:sldId xmlns:r="http://schemas.openxmlformats.org/officeDocument/2006/relationships" id="257" r:id="Ra30051a09c324a12"/>
-    <p:sldId xmlns:r="http://schemas.openxmlformats.org/officeDocument/2006/relationships" id="258" r:id="Ref6137499b86440b"/>
-    <p:sldId xmlns:r="http://schemas.openxmlformats.org/officeDocument/2006/relationships" id="259" r:id="Rfd92f8a03bc1418f"/>
-    <p:sldId xmlns:r="http://schemas.openxmlformats.org/officeDocument/2006/relationships" id="260" r:id="Rc2e97733c5a24e68"/>
-    <p:sldId xmlns:r="http://schemas.openxmlformats.org/officeDocument/2006/relationships" id="261" r:id="R229b7395500c4abf"/>
-    <p:sldId xmlns:r="http://schemas.openxmlformats.org/officeDocument/2006/relationships" id="262" r:id="R2eb7d009f9b74e20"/>
-    <p:sldId xmlns:r="http://schemas.openxmlformats.org/officeDocument/2006/relationships" id="263" r:id="R296adc22bbb043d0"/>
-    <p:sldId xmlns:r="http://schemas.openxmlformats.org/officeDocument/2006/relationships" id="264" r:id="R93c3e444d2dd4dd3"/>
-    <p:sldId xmlns:r="http://schemas.openxmlformats.org/officeDocument/2006/relationships" id="265" r:id="R3a2a7248b5bd45b9"/>
-    <p:sldId xmlns:r="http://schemas.openxmlformats.org/officeDocument/2006/relationships" id="266" r:id="Rb29c742832fd4235"/>
+    <p:sldId xmlns:r="http://schemas.openxmlformats.org/officeDocument/2006/relationships" id="256" r:id="R237fa2d6ab29456d"/>
+    <p:sldId xmlns:r="http://schemas.openxmlformats.org/officeDocument/2006/relationships" id="257" r:id="R501c09519a4b46eb"/>
+    <p:sldId xmlns:r="http://schemas.openxmlformats.org/officeDocument/2006/relationships" id="258" r:id="Rf7445fab11dc45c2"/>
+    <p:sldId xmlns:r="http://schemas.openxmlformats.org/officeDocument/2006/relationships" id="259" r:id="Rb438a7b072f8443c"/>
+    <p:sldId xmlns:r="http://schemas.openxmlformats.org/officeDocument/2006/relationships" id="260" r:id="R6ec473de5feb4cd6"/>
+    <p:sldId xmlns:r="http://schemas.openxmlformats.org/officeDocument/2006/relationships" id="261" r:id="R0dfaae00f18840ea"/>
+    <p:sldId xmlns:r="http://schemas.openxmlformats.org/officeDocument/2006/relationships" id="262" r:id="Rbee1ca8f1fe94474"/>
+    <p:sldId xmlns:r="http://schemas.openxmlformats.org/officeDocument/2006/relationships" id="263" r:id="R2bf913d7a75c474a"/>
+    <p:sldId xmlns:r="http://schemas.openxmlformats.org/officeDocument/2006/relationships" id="264" r:id="R4a8fa9709f6f4122"/>
+    <p:sldId xmlns:r="http://schemas.openxmlformats.org/officeDocument/2006/relationships" id="265" r:id="Rae3bb36d5f8a4c42"/>
+    <p:sldId xmlns:r="http://schemas.openxmlformats.org/officeDocument/2006/relationships" id="266" r:id="Rca2d98f75e854506"/>
   </p:sldIdLst>
   <p:sldSz cx="12192000" cy="6858000"/>
   <p:notesSz cx="6858000" cy="9144000"/>
@@ -500,6 +500,15 @@
               <a:t>[/Sources]</a:t>
             </a:r>
           </a:p>
+          <a:p xmlns:a="http://schemas.openxmlformats.org/drawingml/2006/main">
+            <a:r>
+              <a:t>
+[Sources]
+https://madebymatt.uk/Lessons/Science_Teesside/Teaching_Packs/BUILD/ — original lesson text, timings and teacher notes retained.
+https://madebymatt.uk/Lessons/Science_Teesside/Build/ — existing Made by Matt scientific artwork, where shown.
+[/Sources]</a:t>
+            </a:r>
+          </a:p>
         </p:txBody>
       </p:sp>
       <p:sp>
@@ -615,6 +624,15 @@
               <a:t>[/Sources]</a:t>
             </a:r>
           </a:p>
+          <a:p xmlns:a="http://schemas.openxmlformats.org/drawingml/2006/main">
+            <a:r>
+              <a:t>
+[Sources]
+https://madebymatt.uk/Lessons/Science_Teesside/Teaching_Packs/BUILD/ — original lesson text, timings and teacher notes retained.
+https://madebymatt.uk/Lessons/Science_Teesside/Build/ — existing Made by Matt scientific artwork, where shown.
+[/Sources]</a:t>
+            </a:r>
+          </a:p>
         </p:txBody>
       </p:sp>
       <p:sp>
@@ -730,6 +748,15 @@
               <a:t>[/Sources]</a:t>
             </a:r>
           </a:p>
+          <a:p xmlns:a="http://schemas.openxmlformats.org/drawingml/2006/main">
+            <a:r>
+              <a:t>
+[Sources]
+https://madebymatt.uk/Lessons/Science_Teesside/Teaching_Packs/BUILD/ — original lesson text, timings and teacher notes retained.
+https://madebymatt.uk/Lessons/Science_Teesside/Build/ — existing Made by Matt scientific artwork, where shown.
+[/Sources]</a:t>
+            </a:r>
+          </a:p>
         </p:txBody>
       </p:sp>
       <p:sp>
@@ -845,6 +872,15 @@
               <a:t>[/Sources]</a:t>
             </a:r>
           </a:p>
+          <a:p xmlns:a="http://schemas.openxmlformats.org/drawingml/2006/main">
+            <a:r>
+              <a:t>
+[Sources]
+https://madebymatt.uk/Lessons/Science_Teesside/Teaching_Packs/BUILD/ — original lesson text, timings and teacher notes retained.
+https://madebymatt.uk/Lessons/Science_Teesside/Build/ — existing Made by Matt scientific artwork, where shown.
+[/Sources]</a:t>
+            </a:r>
+          </a:p>
         </p:txBody>
       </p:sp>
       <p:sp>
@@ -960,6 +996,15 @@
               <a:t>[/Sources]</a:t>
             </a:r>
           </a:p>
+          <a:p xmlns:a="http://schemas.openxmlformats.org/drawingml/2006/main">
+            <a:r>
+              <a:t>
+[Sources]
+https://madebymatt.uk/Lessons/Science_Teesside/Teaching_Packs/BUILD/ — original lesson text, timings and teacher notes retained.
+https://madebymatt.uk/Lessons/Science_Teesside/Build/ — existing Made by Matt scientific artwork, where shown.
+[/Sources]</a:t>
+            </a:r>
+          </a:p>
         </p:txBody>
       </p:sp>
       <p:sp>
@@ -1075,6 +1120,15 @@
               <a:t>[/Sources]</a:t>
             </a:r>
           </a:p>
+          <a:p xmlns:a="http://schemas.openxmlformats.org/drawingml/2006/main">
+            <a:r>
+              <a:t>
+[Sources]
+https://madebymatt.uk/Lessons/Science_Teesside/Teaching_Packs/BUILD/ — original lesson text, timings and teacher notes retained.
+https://madebymatt.uk/Lessons/Science_Teesside/Build/ — existing Made by Matt scientific artwork, where shown.
+[/Sources]</a:t>
+            </a:r>
+          </a:p>
         </p:txBody>
       </p:sp>
       <p:sp>
@@ -1190,6 +1244,15 @@
               <a:t>[/Sources]</a:t>
             </a:r>
           </a:p>
+          <a:p xmlns:a="http://schemas.openxmlformats.org/drawingml/2006/main">
+            <a:r>
+              <a:t>
+[Sources]
+https://madebymatt.uk/Lessons/Science_Teesside/Teaching_Packs/BUILD/ — original lesson text, timings and teacher notes retained.
+https://madebymatt.uk/Lessons/Science_Teesside/Build/ — existing Made by Matt scientific artwork, where shown.
+[/Sources]</a:t>
+            </a:r>
+          </a:p>
         </p:txBody>
       </p:sp>
       <p:sp>
@@ -1305,6 +1368,15 @@
               <a:t>[/Sources]</a:t>
             </a:r>
           </a:p>
+          <a:p xmlns:a="http://schemas.openxmlformats.org/drawingml/2006/main">
+            <a:r>
+              <a:t>
+[Sources]
+https://madebymatt.uk/Lessons/Science_Teesside/Teaching_Packs/BUILD/ — original lesson text, timings and teacher notes retained.
+https://madebymatt.uk/Lessons/Science_Teesside/Build/ — existing Made by Matt scientific artwork, where shown.
+[/Sources]</a:t>
+            </a:r>
+          </a:p>
         </p:txBody>
       </p:sp>
       <p:sp>
@@ -1420,6 +1492,15 @@
               <a:t>[/Sources]</a:t>
             </a:r>
           </a:p>
+          <a:p xmlns:a="http://schemas.openxmlformats.org/drawingml/2006/main">
+            <a:r>
+              <a:t>
+[Sources]
+https://madebymatt.uk/Lessons/Science_Teesside/Teaching_Packs/BUILD/ — original lesson text, timings and teacher notes retained.
+https://madebymatt.uk/Lessons/Science_Teesside/Build/ — existing Made by Matt scientific artwork, where shown.
+[/Sources]</a:t>
+            </a:r>
+          </a:p>
         </p:txBody>
       </p:sp>
       <p:sp>
@@ -1535,6 +1616,15 @@
               <a:t>[/Sources]</a:t>
             </a:r>
           </a:p>
+          <a:p xmlns:a="http://schemas.openxmlformats.org/drawingml/2006/main">
+            <a:r>
+              <a:t>
+[Sources]
+https://madebymatt.uk/Lessons/Science_Teesside/Teaching_Packs/BUILD/ — original lesson text, timings and teacher notes retained.
+https://madebymatt.uk/Lessons/Science_Teesside/Build/ — existing Made by Matt scientific artwork, where shown.
+[/Sources]</a:t>
+            </a:r>
+          </a:p>
         </p:txBody>
       </p:sp>
       <p:sp>
@@ -1648,6 +1738,15 @@
           <a:p xmlns:a="http://schemas.openxmlformats.org/drawingml/2006/main">
             <a:r>
               <a:t>[/Sources]</a:t>
+            </a:r>
+          </a:p>
+          <a:p xmlns:a="http://schemas.openxmlformats.org/drawingml/2006/main">
+            <a:r>
+              <a:t>
+[Sources]
+https://madebymatt.uk/Lessons/Science_Teesside/Teaching_Packs/BUILD/ — original lesson text, timings and teacher notes retained.
+https://madebymatt.uk/Lessons/Science_Teesside/Build/ — existing Made by Matt scientific artwork, where shown.
+[/Sources]</a:t>
             </a:r>
           </a:p>
         </p:txBody>
@@ -1715,7 +1814,7 @@
   </p:cSld>
   <p:clrMap bg1="lt1" tx1="dk1" bg2="lt2" tx2="dk2" accent1="accent1" accent2="accent2" accent3="accent3" accent4="accent4" accent5="accent5" accent6="accent6" hlink="hlink" folHlink="folHlink"/>
   <p:sldLayoutIdLst>
-    <p:sldLayoutId xmlns:r="http://schemas.openxmlformats.org/officeDocument/2006/relationships" id="2147483649" r:id="R580aea378d504b19"/>
+    <p:sldLayoutId xmlns:r="http://schemas.openxmlformats.org/officeDocument/2006/relationships" id="2147483649" r:id="R207a2f0614674df6"/>
   </p:sldLayoutIdLst>
   <p:txStyles>
     <p:titleStyle>
@@ -2248,7 +2347,7 @@
     <p:bg>
       <p:bgPr>
         <a:solidFill xmlns:a="http://schemas.openxmlformats.org/drawingml/2006/main">
-          <a:srgbClr val="F5F1E8"/>
+          <a:srgbClr val="FBF9F3"/>
         </a:solidFill>
       </p:bgPr>
     </p:bg>
@@ -2277,8 +2376,8 @@
         </p:nvSpPr>
         <p:spPr>
           <a:xfrm xmlns:a="http://schemas.openxmlformats.org/drawingml/2006/main">
-            <a:off x="609600" y="552450"/>
-            <a:ext cx="781050" cy="57150"/>
+            <a:off x="609600" y="742950"/>
+            <a:ext cx="9906000" cy="38100"/>
           </a:xfrm>
           <a:prstGeom xmlns:a="http://schemas.openxmlformats.org/drawingml/2006/main" prst="rect">
             <a:avLst/>
@@ -2308,8 +2407,8 @@
         </p:nvSpPr>
         <p:spPr>
           <a:xfrm xmlns:a="http://schemas.openxmlformats.org/drawingml/2006/main">
-            <a:off x="609600" y="762000"/>
-            <a:ext cx="9334500" cy="285750"/>
+            <a:off x="609600" y="342900"/>
+            <a:ext cx="9334500" cy="266700"/>
           </a:xfrm>
           <a:prstGeom xmlns:a="http://schemas.openxmlformats.org/drawingml/2006/main" prst="rect">
             <a:avLst/>
@@ -2321,21 +2420,30 @@
           </a:ln>
         </p:spPr>
         <p:txBody>
-          <a:bodyPr xmlns:a="http://schemas.openxmlformats.org/drawingml/2006/main" lIns="0" tIns="0" rIns="0" bIns="0" anchor="ctr"/>
+          <a:bodyPr xmlns:a="http://schemas.openxmlformats.org/drawingml/2006/main" wrap="square" lIns="0" tIns="0" rIns="0" bIns="0" anchor="ctr">
+            <a:noAutofit/>
+          </a:bodyPr>
           <a:lstStyle xmlns:a="http://schemas.openxmlformats.org/drawingml/2006/main"/>
           <a:p xmlns:a="http://schemas.openxmlformats.org/drawingml/2006/main">
             <a:pPr>
-              <a:defRPr sz="1500" b="1">
+              <a:buNone/>
+              <a:defRPr sz="1425" b="1">
                 <a:solidFill>
                   <a:srgbClr val="28685E"/>
                 </a:solidFill>
+                <a:latin typeface="Arial"/>
+                <a:ea typeface="Arial"/>
+                <a:cs typeface="Arial"/>
               </a:defRPr>
             </a:pPr>
             <a:r>
-              <a:rPr sz="1500" b="1">
+              <a:rPr sz="1425" b="1">
                 <a:solidFill>
                   <a:srgbClr val="28685E"/>
                 </a:solidFill>
+                <a:latin typeface="Arial"/>
+                <a:ea typeface="Arial"/>
+                <a:cs typeface="Arial"/>
               </a:rPr>
               <a:t>MADE BY MATT  /  BUILD SCIENCE</a:t>
             </a:r>
@@ -2344,14 +2452,14 @@
       </p:sp>
       <p:pic>
         <p:nvPicPr>
-          <p:cNvPr id="12" name=""/>
+          <p:cNvPr id="15" name=""/>
           <p:cNvPicPr>
             <a:picLocks xmlns:a="http://schemas.openxmlformats.org/drawingml/2006/main" noChangeAspect="1"/>
           </p:cNvPicPr>
           <p:nvPr/>
         </p:nvPicPr>
         <p:blipFill>
-          <a:blip xmlns:r="http://schemas.openxmlformats.org/officeDocument/2006/relationships" xmlns:a="http://schemas.openxmlformats.org/drawingml/2006/main" r:embed="Raadce19f9c14485e"/>
+          <a:blip xmlns:r="http://schemas.openxmlformats.org/officeDocument/2006/relationships" xmlns:a="http://schemas.openxmlformats.org/drawingml/2006/main" r:embed="Re4858192558c412c"/>
           <a:stretch xmlns:a="http://schemas.openxmlformats.org/drawingml/2006/main"/>
         </p:blipFill>
         <p:spPr>
@@ -2380,8 +2488,8 @@
         </p:nvSpPr>
         <p:spPr>
           <a:xfrm xmlns:a="http://schemas.openxmlformats.org/drawingml/2006/main">
-            <a:off x="609600" y="1352550"/>
-            <a:ext cx="10972800" cy="952500"/>
+            <a:off x="609600" y="1047750"/>
+            <a:ext cx="10972800" cy="895350"/>
           </a:xfrm>
           <a:prstGeom xmlns:a="http://schemas.openxmlformats.org/drawingml/2006/main" prst="rect">
             <a:avLst/>
@@ -2393,21 +2501,30 @@
           </a:ln>
         </p:spPr>
         <p:txBody>
-          <a:bodyPr xmlns:a="http://schemas.openxmlformats.org/drawingml/2006/main" lIns="0" tIns="0" rIns="0" bIns="0" anchor="ctr"/>
+          <a:bodyPr xmlns:a="http://schemas.openxmlformats.org/drawingml/2006/main" wrap="square" lIns="0" tIns="0" rIns="0" bIns="0" anchor="ctr">
+            <a:noAutofit/>
+          </a:bodyPr>
           <a:lstStyle xmlns:a="http://schemas.openxmlformats.org/drawingml/2006/main"/>
           <a:p xmlns:a="http://schemas.openxmlformats.org/drawingml/2006/main">
             <a:pPr>
-              <a:defRPr sz="3750" b="1">
+              <a:buNone/>
+              <a:defRPr sz="3600" b="1">
                 <a:solidFill>
                   <a:srgbClr val="152B3A"/>
                 </a:solidFill>
+                <a:latin typeface="Arial"/>
+                <a:ea typeface="Arial"/>
+                <a:cs typeface="Arial"/>
               </a:defRPr>
             </a:pPr>
             <a:r>
-              <a:rPr sz="3750" b="1">
+              <a:rPr sz="3600" b="1">
                 <a:solidFill>
                   <a:srgbClr val="152B3A"/>
                 </a:solidFill>
+                <a:latin typeface="Arial"/>
+                <a:ea typeface="Arial"/>
+                <a:cs typeface="Arial"/>
               </a:rPr>
               <a:t>Animals get food by eating</a:t>
             </a:r>
@@ -2474,21 +2591,30 @@
           </a:ln>
         </p:spPr>
         <p:txBody>
-          <a:bodyPr xmlns:a="http://schemas.openxmlformats.org/drawingml/2006/main" lIns="0" tIns="0" rIns="0" bIns="0" anchor="ctr"/>
+          <a:bodyPr xmlns:a="http://schemas.openxmlformats.org/drawingml/2006/main" wrap="square" lIns="0" tIns="0" rIns="0" bIns="0" anchor="ctr">
+            <a:noAutofit/>
+          </a:bodyPr>
           <a:lstStyle xmlns:a="http://schemas.openxmlformats.org/drawingml/2006/main"/>
           <a:p xmlns:a="http://schemas.openxmlformats.org/drawingml/2006/main">
             <a:pPr>
-              <a:defRPr sz="1275" b="0">
+              <a:buNone/>
+              <a:defRPr sz="1200" b="0">
                 <a:solidFill>
                   <a:srgbClr val="50616B"/>
                 </a:solidFill>
+                <a:latin typeface="Arial"/>
+                <a:ea typeface="Arial"/>
+                <a:cs typeface="Arial"/>
               </a:defRPr>
             </a:pPr>
             <a:r>
-              <a:rPr sz="1275" b="0">
+              <a:rPr sz="1200" b="0">
                 <a:solidFill>
                   <a:srgbClr val="50616B"/>
                 </a:solidFill>
+                <a:latin typeface="Arial"/>
+                <a:ea typeface="Arial"/>
+                <a:cs typeface="Arial"/>
               </a:rPr>
               <a:t>AUTUMN 1  ·  WEEK 7  ·  LESSON A</a:t>
             </a:r>
@@ -2524,14 +2650,20 @@
           </a:ln>
         </p:spPr>
         <p:txBody>
-          <a:bodyPr xmlns:a="http://schemas.openxmlformats.org/drawingml/2006/main" lIns="0" tIns="0" rIns="0" bIns="0" anchor="ctr"/>
+          <a:bodyPr xmlns:a="http://schemas.openxmlformats.org/drawingml/2006/main" wrap="square" lIns="0" tIns="0" rIns="0" bIns="0" anchor="ctr">
+            <a:noAutofit/>
+          </a:bodyPr>
           <a:lstStyle xmlns:a="http://schemas.openxmlformats.org/drawingml/2006/main"/>
           <a:p xmlns:a="http://schemas.openxmlformats.org/drawingml/2006/main">
             <a:pPr>
+              <a:buNone/>
               <a:defRPr sz="1350" b="1">
                 <a:solidFill>
                   <a:srgbClr val="28685E"/>
                 </a:solidFill>
+                <a:latin typeface="Arial"/>
+                <a:ea typeface="Arial"/>
+                <a:cs typeface="Arial"/>
               </a:defRPr>
             </a:pPr>
             <a:r>
@@ -2539,6 +2671,9 @@
                 <a:solidFill>
                   <a:srgbClr val="28685E"/>
                 </a:solidFill>
+                <a:latin typeface="Arial"/>
+                <a:ea typeface="Arial"/>
+                <a:cs typeface="Arial"/>
               </a:rPr>
               <a:t>01</a:t>
             </a:r>
@@ -2561,8 +2696,8 @@
         </p:nvSpPr>
         <p:spPr>
           <a:xfrm xmlns:a="http://schemas.openxmlformats.org/drawingml/2006/main">
-            <a:off x="609600" y="2809875"/>
-            <a:ext cx="10668000" cy="1000125"/>
+            <a:off x="609600" y="2400300"/>
+            <a:ext cx="6191250" cy="1409700"/>
           </a:xfrm>
           <a:prstGeom xmlns:a="http://schemas.openxmlformats.org/drawingml/2006/main" prst="rect">
             <a:avLst/>
@@ -2574,21 +2709,30 @@
           </a:ln>
         </p:spPr>
         <p:txBody>
-          <a:bodyPr xmlns:a="http://schemas.openxmlformats.org/drawingml/2006/main" lIns="0" tIns="0" rIns="0" bIns="0" anchor="ctr"/>
+          <a:bodyPr xmlns:a="http://schemas.openxmlformats.org/drawingml/2006/main" wrap="square" lIns="0" tIns="0" rIns="0" bIns="0" anchor="ctr">
+            <a:noAutofit/>
+          </a:bodyPr>
           <a:lstStyle xmlns:a="http://schemas.openxmlformats.org/drawingml/2006/main"/>
           <a:p xmlns:a="http://schemas.openxmlformats.org/drawingml/2006/main">
             <a:pPr>
-              <a:defRPr sz="3900" b="1">
+              <a:buNone/>
+              <a:defRPr sz="3450" b="1">
                 <a:solidFill>
                   <a:srgbClr val="28685E"/>
                 </a:solidFill>
+                <a:latin typeface="Arial"/>
+                <a:ea typeface="Arial"/>
+                <a:cs typeface="Arial"/>
               </a:defRPr>
             </a:pPr>
             <a:r>
-              <a:rPr sz="3900" b="1">
+              <a:rPr sz="3450" b="1">
                 <a:solidFill>
                   <a:srgbClr val="28685E"/>
                 </a:solidFill>
+                <a:latin typeface="Arial"/>
+                <a:ea typeface="Arial"/>
+                <a:cs typeface="Arial"/>
               </a:rPr>
               <a:t>Follow the food and its energy.</a:t>
             </a:r>
@@ -2611,8 +2755,8 @@
         </p:nvSpPr>
         <p:spPr>
           <a:xfrm xmlns:a="http://schemas.openxmlformats.org/drawingml/2006/main">
-            <a:off x="609600" y="4143375"/>
-            <a:ext cx="10668000" cy="1143000"/>
+            <a:off x="609600" y="4286250"/>
+            <a:ext cx="6667500" cy="1314450"/>
           </a:xfrm>
           <a:prstGeom xmlns:a="http://schemas.openxmlformats.org/drawingml/2006/main" prst="rect">
             <a:avLst/>
@@ -2624,27 +2768,58 @@
           </a:ln>
         </p:spPr>
         <p:txBody>
-          <a:bodyPr xmlns:a="http://schemas.openxmlformats.org/drawingml/2006/main" lIns="0" tIns="0" rIns="0" bIns="0" anchor="ctr"/>
+          <a:bodyPr xmlns:a="http://schemas.openxmlformats.org/drawingml/2006/main" wrap="square" lIns="0" tIns="0" rIns="0" bIns="0" anchor="ctr">
+            <a:noAutofit/>
+          </a:bodyPr>
           <a:lstStyle xmlns:a="http://schemas.openxmlformats.org/drawingml/2006/main"/>
           <a:p xmlns:a="http://schemas.openxmlformats.org/drawingml/2006/main">
             <a:pPr>
-              <a:defRPr sz="2550" b="0">
+              <a:buNone/>
+              <a:defRPr sz="2400" b="0">
                 <a:solidFill>
                   <a:srgbClr val="152B3A"/>
                 </a:solidFill>
+                <a:latin typeface="Arial"/>
+                <a:ea typeface="Arial"/>
+                <a:cs typeface="Arial"/>
               </a:defRPr>
             </a:pPr>
             <a:r>
-              <a:rPr sz="2550" b="0">
+              <a:rPr sz="2400" b="0">
                 <a:solidFill>
                   <a:srgbClr val="152B3A"/>
                 </a:solidFill>
+                <a:latin typeface="Arial"/>
+                <a:ea typeface="Arial"/>
+                <a:cs typeface="Arial"/>
               </a:rPr>
               <a:t>I can build a food chain and explain its arrows.</a:t>
             </a:r>
           </a:p>
         </p:txBody>
       </p:sp>
+      <p:pic>
+        <p:nvPicPr>
+          <p:cNvPr id="22" name=""/>
+          <p:cNvPicPr>
+            <a:picLocks xmlns:a="http://schemas.openxmlformats.org/drawingml/2006/main" noChangeAspect="1"/>
+          </p:cNvPicPr>
+          <p:nvPr/>
+        </p:nvPicPr>
+        <p:blipFill>
+          <a:blip xmlns:r="http://schemas.openxmlformats.org/officeDocument/2006/relationships" xmlns:a="http://schemas.openxmlformats.org/drawingml/2006/main" r:embed="Ra6f8136f4c6b4adf"/>
+          <a:stretch xmlns:a="http://schemas.openxmlformats.org/drawingml/2006/main"/>
+        </p:blipFill>
+        <p:spPr>
+          <a:xfrm xmlns:a="http://schemas.openxmlformats.org/drawingml/2006/main">
+            <a:off x="7620000" y="2466856"/>
+            <a:ext cx="3714750" cy="2591038"/>
+          </a:xfrm>
+          <a:prstGeom xmlns:a="http://schemas.openxmlformats.org/drawingml/2006/main" prst="rect">
+            <a:avLst/>
+          </a:prstGeom>
+        </p:spPr>
+      </p:pic>
     </p:spTree>
     <p:extLst>
       <p:ext uri="{BB962C8B-B14F-4D97-AF65-F5344CB8AC3E}">
@@ -2661,7 +2836,7 @@
     <p:bg>
       <p:bgPr>
         <a:solidFill xmlns:a="http://schemas.openxmlformats.org/drawingml/2006/main">
-          <a:srgbClr val="F5F1E8"/>
+          <a:srgbClr val="FBF9F3"/>
         </a:solidFill>
       </p:bgPr>
     </p:bg>
@@ -2690,8 +2865,8 @@
         </p:nvSpPr>
         <p:spPr>
           <a:xfrm xmlns:a="http://schemas.openxmlformats.org/drawingml/2006/main">
-            <a:off x="609600" y="552450"/>
-            <a:ext cx="781050" cy="57150"/>
+            <a:off x="609600" y="742950"/>
+            <a:ext cx="9906000" cy="38100"/>
           </a:xfrm>
           <a:prstGeom xmlns:a="http://schemas.openxmlformats.org/drawingml/2006/main" prst="rect">
             <a:avLst/>
@@ -2721,8 +2896,8 @@
         </p:nvSpPr>
         <p:spPr>
           <a:xfrm xmlns:a="http://schemas.openxmlformats.org/drawingml/2006/main">
-            <a:off x="609600" y="762000"/>
-            <a:ext cx="9334500" cy="285750"/>
+            <a:off x="609600" y="342900"/>
+            <a:ext cx="9334500" cy="266700"/>
           </a:xfrm>
           <a:prstGeom xmlns:a="http://schemas.openxmlformats.org/drawingml/2006/main" prst="rect">
             <a:avLst/>
@@ -2734,21 +2909,30 @@
           </a:ln>
         </p:spPr>
         <p:txBody>
-          <a:bodyPr xmlns:a="http://schemas.openxmlformats.org/drawingml/2006/main" lIns="0" tIns="0" rIns="0" bIns="0" anchor="ctr"/>
+          <a:bodyPr xmlns:a="http://schemas.openxmlformats.org/drawingml/2006/main" wrap="square" lIns="0" tIns="0" rIns="0" bIns="0" anchor="ctr">
+            <a:noAutofit/>
+          </a:bodyPr>
           <a:lstStyle xmlns:a="http://schemas.openxmlformats.org/drawingml/2006/main"/>
           <a:p xmlns:a="http://schemas.openxmlformats.org/drawingml/2006/main">
             <a:pPr>
-              <a:defRPr sz="1500" b="1">
+              <a:buNone/>
+              <a:defRPr sz="1425" b="1">
                 <a:solidFill>
                   <a:srgbClr val="28685E"/>
                 </a:solidFill>
+                <a:latin typeface="Arial"/>
+                <a:ea typeface="Arial"/>
+                <a:cs typeface="Arial"/>
               </a:defRPr>
             </a:pPr>
             <a:r>
-              <a:rPr sz="1500" b="1">
+              <a:rPr sz="1425" b="1">
                 <a:solidFill>
                   <a:srgbClr val="28685E"/>
                 </a:solidFill>
+                <a:latin typeface="Arial"/>
+                <a:ea typeface="Arial"/>
+                <a:cs typeface="Arial"/>
               </a:rPr>
               <a:t>MADE BY MATT  /  BUILD SCIENCE</a:t>
             </a:r>
@@ -2757,14 +2941,14 @@
       </p:sp>
       <p:pic>
         <p:nvPicPr>
-          <p:cNvPr id="14" name=""/>
+          <p:cNvPr id="18" name=""/>
           <p:cNvPicPr>
             <a:picLocks xmlns:a="http://schemas.openxmlformats.org/drawingml/2006/main" noChangeAspect="1"/>
           </p:cNvPicPr>
           <p:nvPr/>
         </p:nvPicPr>
         <p:blipFill>
-          <a:blip xmlns:r="http://schemas.openxmlformats.org/officeDocument/2006/relationships" xmlns:a="http://schemas.openxmlformats.org/drawingml/2006/main" r:embed="R6422d6e1483b493e"/>
+          <a:blip xmlns:r="http://schemas.openxmlformats.org/officeDocument/2006/relationships" xmlns:a="http://schemas.openxmlformats.org/drawingml/2006/main" r:embed="Rc28f01a35c934493"/>
           <a:stretch xmlns:a="http://schemas.openxmlformats.org/drawingml/2006/main"/>
         </p:blipFill>
         <p:spPr>
@@ -2793,8 +2977,8 @@
         </p:nvSpPr>
         <p:spPr>
           <a:xfrm xmlns:a="http://schemas.openxmlformats.org/drawingml/2006/main">
-            <a:off x="609600" y="1352550"/>
-            <a:ext cx="10972800" cy="952500"/>
+            <a:off x="609600" y="1047750"/>
+            <a:ext cx="10972800" cy="895350"/>
           </a:xfrm>
           <a:prstGeom xmlns:a="http://schemas.openxmlformats.org/drawingml/2006/main" prst="rect">
             <a:avLst/>
@@ -2806,21 +2990,30 @@
           </a:ln>
         </p:spPr>
         <p:txBody>
-          <a:bodyPr xmlns:a="http://schemas.openxmlformats.org/drawingml/2006/main" lIns="0" tIns="0" rIns="0" bIns="0" anchor="ctr"/>
+          <a:bodyPr xmlns:a="http://schemas.openxmlformats.org/drawingml/2006/main" wrap="square" lIns="0" tIns="0" rIns="0" bIns="0" anchor="ctr">
+            <a:noAutofit/>
+          </a:bodyPr>
           <a:lstStyle xmlns:a="http://schemas.openxmlformats.org/drawingml/2006/main"/>
           <a:p xmlns:a="http://schemas.openxmlformats.org/drawingml/2006/main">
             <a:pPr>
-              <a:defRPr sz="3750" b="1">
+              <a:buNone/>
+              <a:defRPr sz="3600" b="1">
                 <a:solidFill>
                   <a:srgbClr val="152B3A"/>
                 </a:solidFill>
+                <a:latin typeface="Arial"/>
+                <a:ea typeface="Arial"/>
+                <a:cs typeface="Arial"/>
               </a:defRPr>
             </a:pPr>
             <a:r>
-              <a:rPr sz="3750" b="1">
+              <a:rPr sz="3600" b="1">
                 <a:solidFill>
                   <a:srgbClr val="152B3A"/>
                 </a:solidFill>
+                <a:latin typeface="Arial"/>
+                <a:ea typeface="Arial"/>
+                <a:cs typeface="Arial"/>
               </a:rPr>
               <a:t>Put the chain the right way round</a:t>
             </a:r>
@@ -2887,21 +3080,30 @@
           </a:ln>
         </p:spPr>
         <p:txBody>
-          <a:bodyPr xmlns:a="http://schemas.openxmlformats.org/drawingml/2006/main" lIns="0" tIns="0" rIns="0" bIns="0" anchor="ctr"/>
+          <a:bodyPr xmlns:a="http://schemas.openxmlformats.org/drawingml/2006/main" wrap="square" lIns="0" tIns="0" rIns="0" bIns="0" anchor="ctr">
+            <a:noAutofit/>
+          </a:bodyPr>
           <a:lstStyle xmlns:a="http://schemas.openxmlformats.org/drawingml/2006/main"/>
           <a:p xmlns:a="http://schemas.openxmlformats.org/drawingml/2006/main">
             <a:pPr>
-              <a:defRPr sz="1275" b="0">
+              <a:buNone/>
+              <a:defRPr sz="1200" b="0">
                 <a:solidFill>
                   <a:srgbClr val="50616B"/>
                 </a:solidFill>
+                <a:latin typeface="Arial"/>
+                <a:ea typeface="Arial"/>
+                <a:cs typeface="Arial"/>
               </a:defRPr>
             </a:pPr>
             <a:r>
-              <a:rPr sz="1275" b="0">
+              <a:rPr sz="1200" b="0">
                 <a:solidFill>
                   <a:srgbClr val="50616B"/>
                 </a:solidFill>
+                <a:latin typeface="Arial"/>
+                <a:ea typeface="Arial"/>
+                <a:cs typeface="Arial"/>
               </a:rPr>
               <a:t>AUTUMN 1  ·  WEEK 7  ·  LESSON A</a:t>
             </a:r>
@@ -2937,14 +3139,20 @@
           </a:ln>
         </p:spPr>
         <p:txBody>
-          <a:bodyPr xmlns:a="http://schemas.openxmlformats.org/drawingml/2006/main" lIns="0" tIns="0" rIns="0" bIns="0" anchor="ctr"/>
+          <a:bodyPr xmlns:a="http://schemas.openxmlformats.org/drawingml/2006/main" wrap="square" lIns="0" tIns="0" rIns="0" bIns="0" anchor="ctr">
+            <a:noAutofit/>
+          </a:bodyPr>
           <a:lstStyle xmlns:a="http://schemas.openxmlformats.org/drawingml/2006/main"/>
           <a:p xmlns:a="http://schemas.openxmlformats.org/drawingml/2006/main">
             <a:pPr>
+              <a:buNone/>
               <a:defRPr sz="1350" b="1">
                 <a:solidFill>
                   <a:srgbClr val="28685E"/>
                 </a:solidFill>
+                <a:latin typeface="Arial"/>
+                <a:ea typeface="Arial"/>
+                <a:cs typeface="Arial"/>
               </a:defRPr>
             </a:pPr>
             <a:r>
@@ -2952,6 +3160,9 @@
                 <a:solidFill>
                   <a:srgbClr val="28685E"/>
                 </a:solidFill>
+                <a:latin typeface="Arial"/>
+                <a:ea typeface="Arial"/>
+                <a:cs typeface="Arial"/>
               </a:rPr>
               <a:t>10</a:t>
             </a:r>
@@ -2974,8 +3185,8 @@
         </p:nvSpPr>
         <p:spPr>
           <a:xfrm xmlns:a="http://schemas.openxmlformats.org/drawingml/2006/main">
-            <a:off x="609600" y="2619375"/>
-            <a:ext cx="4953000" cy="428625"/>
+            <a:off x="609600" y="2257425"/>
+            <a:ext cx="5143500" cy="533400"/>
           </a:xfrm>
           <a:prstGeom xmlns:a="http://schemas.openxmlformats.org/drawingml/2006/main" prst="rect">
             <a:avLst/>
@@ -2987,21 +3198,30 @@
           </a:ln>
         </p:spPr>
         <p:txBody>
-          <a:bodyPr xmlns:a="http://schemas.openxmlformats.org/drawingml/2006/main" lIns="0" tIns="0" rIns="0" bIns="0" anchor="ctr"/>
+          <a:bodyPr xmlns:a="http://schemas.openxmlformats.org/drawingml/2006/main" wrap="square" lIns="0" tIns="0" rIns="0" bIns="0" anchor="ctr">
+            <a:noAutofit/>
+          </a:bodyPr>
           <a:lstStyle xmlns:a="http://schemas.openxmlformats.org/drawingml/2006/main"/>
           <a:p xmlns:a="http://schemas.openxmlformats.org/drawingml/2006/main">
             <a:pPr>
-              <a:defRPr sz="2025" b="1">
+              <a:buNone/>
+              <a:defRPr sz="2100" b="1">
                 <a:solidFill>
                   <a:srgbClr val="28685E"/>
                 </a:solidFill>
+                <a:latin typeface="Arial"/>
+                <a:ea typeface="Arial"/>
+                <a:cs typeface="Arial"/>
               </a:defRPr>
             </a:pPr>
             <a:r>
-              <a:rPr sz="2025" b="1">
+              <a:rPr sz="2100" b="1">
                 <a:solidFill>
                   <a:srgbClr val="28685E"/>
                 </a:solidFill>
+                <a:latin typeface="Arial"/>
+                <a:ea typeface="Arial"/>
+                <a:cs typeface="Arial"/>
               </a:rPr>
               <a:t>USE THE FEEDING CLUES</a:t>
             </a:r>
@@ -3024,8 +3244,8 @@
         </p:nvSpPr>
         <p:spPr>
           <a:xfrm xmlns:a="http://schemas.openxmlformats.org/drawingml/2006/main">
-            <a:off x="6572250" y="2619375"/>
-            <a:ext cx="4953000" cy="428625"/>
+            <a:off x="6572250" y="2257425"/>
+            <a:ext cx="5010150" cy="533400"/>
           </a:xfrm>
           <a:prstGeom xmlns:a="http://schemas.openxmlformats.org/drawingml/2006/main" prst="rect">
             <a:avLst/>
@@ -3037,21 +3257,30 @@
           </a:ln>
         </p:spPr>
         <p:txBody>
-          <a:bodyPr xmlns:a="http://schemas.openxmlformats.org/drawingml/2006/main" lIns="0" tIns="0" rIns="0" bIns="0" anchor="ctr"/>
+          <a:bodyPr xmlns:a="http://schemas.openxmlformats.org/drawingml/2006/main" wrap="square" lIns="0" tIns="0" rIns="0" bIns="0" anchor="ctr">
+            <a:noAutofit/>
+          </a:bodyPr>
           <a:lstStyle xmlns:a="http://schemas.openxmlformats.org/drawingml/2006/main"/>
           <a:p xmlns:a="http://schemas.openxmlformats.org/drawingml/2006/main">
             <a:pPr>
-              <a:defRPr sz="2025" b="1">
+              <a:buNone/>
+              <a:defRPr sz="2100" b="1">
                 <a:solidFill>
                   <a:srgbClr val="A65D25"/>
                 </a:solidFill>
+                <a:latin typeface="Arial"/>
+                <a:ea typeface="Arial"/>
+                <a:cs typeface="Arial"/>
               </a:defRPr>
             </a:pPr>
             <a:r>
-              <a:rPr sz="2025" b="1">
+              <a:rPr sz="2100" b="1">
                 <a:solidFill>
                   <a:srgbClr val="A65D25"/>
                 </a:solidFill>
+                <a:latin typeface="Arial"/>
+                <a:ea typeface="Arial"/>
+                <a:cs typeface="Arial"/>
               </a:rPr>
               <a:t>CHECK THE CLAIMS</a:t>
             </a:r>
@@ -3074,8 +3303,8 @@
         </p:nvSpPr>
         <p:spPr>
           <a:xfrm xmlns:a="http://schemas.openxmlformats.org/drawingml/2006/main">
-            <a:off x="609600" y="3333750"/>
-            <a:ext cx="4953000" cy="2524125"/>
+            <a:off x="609600" y="3238500"/>
+            <a:ext cx="5143500" cy="2286000"/>
           </a:xfrm>
           <a:prstGeom xmlns:a="http://schemas.openxmlformats.org/drawingml/2006/main" prst="rect">
             <a:avLst/>
@@ -3087,14 +3316,20 @@
           </a:ln>
         </p:spPr>
         <p:txBody>
-          <a:bodyPr xmlns:a="http://schemas.openxmlformats.org/drawingml/2006/main" lIns="0" tIns="0" rIns="0" bIns="0" anchor="ctr"/>
+          <a:bodyPr xmlns:a="http://schemas.openxmlformats.org/drawingml/2006/main" wrap="square" lIns="0" tIns="0" rIns="0" bIns="0" anchor="ctr">
+            <a:noAutofit/>
+          </a:bodyPr>
           <a:lstStyle xmlns:a="http://schemas.openxmlformats.org/drawingml/2006/main"/>
           <a:p xmlns:a="http://schemas.openxmlformats.org/drawingml/2006/main">
             <a:pPr>
+              <a:buNone/>
               <a:defRPr sz="2400" b="0">
                 <a:solidFill>
                   <a:srgbClr val="152B3A"/>
                 </a:solidFill>
+                <a:latin typeface="Arial"/>
+                <a:ea typeface="Arial"/>
+                <a:cs typeface="Arial"/>
               </a:defRPr>
             </a:pPr>
             <a:r>
@@ -3102,16 +3337,23 @@
                 <a:solidFill>
                   <a:srgbClr val="152B3A"/>
                 </a:solidFill>
+                <a:latin typeface="Arial"/>
+                <a:ea typeface="Arial"/>
+                <a:cs typeface="Arial"/>
               </a:rPr>
               <a:t>Rabbits can eat grass.</a:t>
             </a:r>
           </a:p>
           <a:p xmlns:a="http://schemas.openxmlformats.org/drawingml/2006/main">
             <a:pPr>
+              <a:buNone/>
               <a:defRPr sz="2400" b="0">
                 <a:solidFill>
                   <a:srgbClr val="152B3A"/>
                 </a:solidFill>
+                <a:latin typeface="Arial"/>
+                <a:ea typeface="Arial"/>
+                <a:cs typeface="Arial"/>
               </a:defRPr>
             </a:pPr>
             <a:r>
@@ -3119,6 +3361,9 @@
                 <a:solidFill>
                   <a:srgbClr val="152B3A"/>
                 </a:solidFill>
+                <a:latin typeface="Arial"/>
+                <a:ea typeface="Arial"/>
+                <a:cs typeface="Arial"/>
               </a:rPr>
               <a:t>Foxes can eat rabbits.</a:t>
             </a:r>
@@ -3141,8 +3386,8 @@
         </p:nvSpPr>
         <p:spPr>
           <a:xfrm xmlns:a="http://schemas.openxmlformats.org/drawingml/2006/main">
-            <a:off x="6572250" y="3333750"/>
-            <a:ext cx="4857750" cy="2524125"/>
+            <a:off x="6572250" y="3238500"/>
+            <a:ext cx="5010150" cy="2286000"/>
           </a:xfrm>
           <a:prstGeom xmlns:a="http://schemas.openxmlformats.org/drawingml/2006/main" prst="rect">
             <a:avLst/>
@@ -3154,14 +3399,20 @@
           </a:ln>
         </p:spPr>
         <p:txBody>
-          <a:bodyPr xmlns:a="http://schemas.openxmlformats.org/drawingml/2006/main" lIns="0" tIns="0" rIns="0" bIns="0" anchor="ctr"/>
+          <a:bodyPr xmlns:a="http://schemas.openxmlformats.org/drawingml/2006/main" wrap="square" lIns="0" tIns="0" rIns="0" bIns="0" anchor="ctr">
+            <a:noAutofit/>
+          </a:bodyPr>
           <a:lstStyle xmlns:a="http://schemas.openxmlformats.org/drawingml/2006/main"/>
           <a:p xmlns:a="http://schemas.openxmlformats.org/drawingml/2006/main">
             <a:pPr>
+              <a:buNone/>
               <a:defRPr sz="2400" b="0">
                 <a:solidFill>
                   <a:srgbClr val="152B3A"/>
                 </a:solidFill>
+                <a:latin typeface="Arial"/>
+                <a:ea typeface="Arial"/>
+                <a:cs typeface="Arial"/>
               </a:defRPr>
             </a:pPr>
             <a:r>
@@ -3169,16 +3420,23 @@
                 <a:solidFill>
                   <a:srgbClr val="152B3A"/>
                 </a:solidFill>
+                <a:latin typeface="Arial"/>
+                <a:ea typeface="Arial"/>
+                <a:cs typeface="Arial"/>
               </a:rPr>
               <a:t>Which organism comes first?</a:t>
             </a:r>
           </a:p>
           <a:p xmlns:a="http://schemas.openxmlformats.org/drawingml/2006/main">
             <a:pPr>
+              <a:buNone/>
               <a:defRPr sz="2400" b="0">
                 <a:solidFill>
                   <a:srgbClr val="152B3A"/>
                 </a:solidFill>
+                <a:latin typeface="Arial"/>
+                <a:ea typeface="Arial"/>
+                <a:cs typeface="Arial"/>
               </a:defRPr>
             </a:pPr>
             <a:r>
@@ -3186,16 +3444,23 @@
                 <a:solidFill>
                   <a:srgbClr val="152B3A"/>
                 </a:solidFill>
+                <a:latin typeface="Arial"/>
+                <a:ea typeface="Arial"/>
+                <a:cs typeface="Arial"/>
               </a:rPr>
               <a:t>Where does each arrow point?</a:t>
             </a:r>
           </a:p>
           <a:p xmlns:a="http://schemas.openxmlformats.org/drawingml/2006/main">
             <a:pPr>
+              <a:buNone/>
               <a:defRPr sz="2400" b="0">
                 <a:solidFill>
                   <a:srgbClr val="152B3A"/>
                 </a:solidFill>
+                <a:latin typeface="Arial"/>
+                <a:ea typeface="Arial"/>
+                <a:cs typeface="Arial"/>
               </a:defRPr>
             </a:pPr>
             <a:r>
@@ -3203,11 +3468,76 @@
                 <a:solidFill>
                   <a:srgbClr val="152B3A"/>
                 </a:solidFill>
+                <a:latin typeface="Arial"/>
+                <a:ea typeface="Arial"/>
+                <a:cs typeface="Arial"/>
               </a:rPr>
               <a:t>“Animals make their own food.”</a:t>
             </a:r>
           </a:p>
         </p:txBody>
+      </p:sp>
+      <p:sp>
+        <p:nvSpPr>
+          <p:cNvPr id="14" name="">
+            <a:extLst xmlns:a="http://schemas.openxmlformats.org/drawingml/2006/main">
+              <a:ext uri="{FF2B5EF4-FFF2-40B4-BE49-F238E27FC236}">
+                <a16:creationId xmlns:a16="http://schemas.microsoft.com/office/drawing/2014/main" id="{C9B777D8-8E29-46E1-91E8-7F80DEFD5507}"/>
+              </a:ext>
+            </a:extLst>
+          </p:cNvPr>
+          <p:cNvSpPr>
+            <a:spLocks xmlns:a="http://schemas.openxmlformats.org/drawingml/2006/main" noGrp="1"/>
+          </p:cNvSpPr>
+          <p:nvPr/>
+        </p:nvSpPr>
+        <p:spPr>
+          <a:xfrm xmlns:a="http://schemas.openxmlformats.org/drawingml/2006/main">
+            <a:off x="609600" y="2886075"/>
+            <a:ext cx="5048250" cy="0"/>
+          </a:xfrm>
+          <a:prstGeom xmlns:a="http://schemas.openxmlformats.org/drawingml/2006/main" prst="line">
+            <a:avLst/>
+          </a:prstGeom>
+          <a:noFill xmlns:a="http://schemas.openxmlformats.org/drawingml/2006/main"/>
+          <a:ln xmlns:a="http://schemas.openxmlformats.org/drawingml/2006/main" w="28575">
+            <a:solidFill>
+              <a:srgbClr val="DCE7DD"/>
+            </a:solidFill>
+            <a:prstDash val="solid"/>
+          </a:ln>
+        </p:spPr>
+      </p:sp>
+      <p:sp>
+        <p:nvSpPr>
+          <p:cNvPr id="15" name="">
+            <a:extLst xmlns:a="http://schemas.openxmlformats.org/drawingml/2006/main">
+              <a:ext uri="{FF2B5EF4-FFF2-40B4-BE49-F238E27FC236}">
+                <a16:creationId xmlns:a16="http://schemas.microsoft.com/office/drawing/2014/main" id="{F0F91C0F-96C8-41F4-B806-EB230BEC0178}"/>
+              </a:ext>
+            </a:extLst>
+          </p:cNvPr>
+          <p:cNvSpPr>
+            <a:spLocks xmlns:a="http://schemas.openxmlformats.org/drawingml/2006/main" noGrp="1"/>
+          </p:cNvSpPr>
+          <p:nvPr/>
+        </p:nvSpPr>
+        <p:spPr>
+          <a:xfrm xmlns:a="http://schemas.openxmlformats.org/drawingml/2006/main">
+            <a:off x="6572250" y="2886075"/>
+            <a:ext cx="5010150" cy="0"/>
+          </a:xfrm>
+          <a:prstGeom xmlns:a="http://schemas.openxmlformats.org/drawingml/2006/main" prst="line">
+            <a:avLst/>
+          </a:prstGeom>
+          <a:noFill xmlns:a="http://schemas.openxmlformats.org/drawingml/2006/main"/>
+          <a:ln xmlns:a="http://schemas.openxmlformats.org/drawingml/2006/main" w="28575">
+            <a:solidFill>
+              <a:srgbClr val="DCE7DD"/>
+            </a:solidFill>
+            <a:prstDash val="solid"/>
+          </a:ln>
+        </p:spPr>
       </p:sp>
     </p:spTree>
     <p:extLst>
@@ -3225,7 +3555,7 @@
     <p:bg>
       <p:bgPr>
         <a:solidFill xmlns:a="http://schemas.openxmlformats.org/drawingml/2006/main">
-          <a:srgbClr val="F5F1E8"/>
+          <a:srgbClr val="FBF9F3"/>
         </a:solidFill>
       </p:bgPr>
     </p:bg>
@@ -3254,8 +3584,8 @@
         </p:nvSpPr>
         <p:spPr>
           <a:xfrm xmlns:a="http://schemas.openxmlformats.org/drawingml/2006/main">
-            <a:off x="609600" y="552450"/>
-            <a:ext cx="781050" cy="57150"/>
+            <a:off x="609600" y="742950"/>
+            <a:ext cx="9906000" cy="38100"/>
           </a:xfrm>
           <a:prstGeom xmlns:a="http://schemas.openxmlformats.org/drawingml/2006/main" prst="rect">
             <a:avLst/>
@@ -3285,8 +3615,8 @@
         </p:nvSpPr>
         <p:spPr>
           <a:xfrm xmlns:a="http://schemas.openxmlformats.org/drawingml/2006/main">
-            <a:off x="609600" y="762000"/>
-            <a:ext cx="9334500" cy="285750"/>
+            <a:off x="609600" y="342900"/>
+            <a:ext cx="9334500" cy="266700"/>
           </a:xfrm>
           <a:prstGeom xmlns:a="http://schemas.openxmlformats.org/drawingml/2006/main" prst="rect">
             <a:avLst/>
@@ -3298,21 +3628,30 @@
           </a:ln>
         </p:spPr>
         <p:txBody>
-          <a:bodyPr xmlns:a="http://schemas.openxmlformats.org/drawingml/2006/main" lIns="0" tIns="0" rIns="0" bIns="0" anchor="ctr"/>
+          <a:bodyPr xmlns:a="http://schemas.openxmlformats.org/drawingml/2006/main" wrap="square" lIns="0" tIns="0" rIns="0" bIns="0" anchor="ctr">
+            <a:noAutofit/>
+          </a:bodyPr>
           <a:lstStyle xmlns:a="http://schemas.openxmlformats.org/drawingml/2006/main"/>
           <a:p xmlns:a="http://schemas.openxmlformats.org/drawingml/2006/main">
             <a:pPr>
-              <a:defRPr sz="1500" b="1">
+              <a:buNone/>
+              <a:defRPr sz="1425" b="1">
                 <a:solidFill>
                   <a:srgbClr val="28685E"/>
                 </a:solidFill>
+                <a:latin typeface="Arial"/>
+                <a:ea typeface="Arial"/>
+                <a:cs typeface="Arial"/>
               </a:defRPr>
             </a:pPr>
             <a:r>
-              <a:rPr sz="1500" b="1">
+              <a:rPr sz="1425" b="1">
                 <a:solidFill>
                   <a:srgbClr val="28685E"/>
                 </a:solidFill>
+                <a:latin typeface="Arial"/>
+                <a:ea typeface="Arial"/>
+                <a:cs typeface="Arial"/>
               </a:rPr>
               <a:t>MADE BY MATT  /  BUILD SCIENCE</a:t>
             </a:r>
@@ -3321,14 +3660,14 @@
       </p:sp>
       <p:pic>
         <p:nvPicPr>
-          <p:cNvPr id="14" name=""/>
+          <p:cNvPr id="16" name=""/>
           <p:cNvPicPr>
             <a:picLocks xmlns:a="http://schemas.openxmlformats.org/drawingml/2006/main" noChangeAspect="1"/>
           </p:cNvPicPr>
           <p:nvPr/>
         </p:nvPicPr>
         <p:blipFill>
-          <a:blip xmlns:r="http://schemas.openxmlformats.org/officeDocument/2006/relationships" xmlns:a="http://schemas.openxmlformats.org/drawingml/2006/main" r:embed="R946eefda6f48497e"/>
+          <a:blip xmlns:r="http://schemas.openxmlformats.org/officeDocument/2006/relationships" xmlns:a="http://schemas.openxmlformats.org/drawingml/2006/main" r:embed="R317061f72c064e29"/>
           <a:stretch xmlns:a="http://schemas.openxmlformats.org/drawingml/2006/main"/>
         </p:blipFill>
         <p:spPr>
@@ -3357,8 +3696,8 @@
         </p:nvSpPr>
         <p:spPr>
           <a:xfrm xmlns:a="http://schemas.openxmlformats.org/drawingml/2006/main">
-            <a:off x="609600" y="1352550"/>
-            <a:ext cx="10972800" cy="952500"/>
+            <a:off x="609600" y="1047750"/>
+            <a:ext cx="10972800" cy="895350"/>
           </a:xfrm>
           <a:prstGeom xmlns:a="http://schemas.openxmlformats.org/drawingml/2006/main" prst="rect">
             <a:avLst/>
@@ -3370,21 +3709,30 @@
           </a:ln>
         </p:spPr>
         <p:txBody>
-          <a:bodyPr xmlns:a="http://schemas.openxmlformats.org/drawingml/2006/main" lIns="0" tIns="0" rIns="0" bIns="0" anchor="ctr"/>
+          <a:bodyPr xmlns:a="http://schemas.openxmlformats.org/drawingml/2006/main" wrap="square" lIns="0" tIns="0" rIns="0" bIns="0" anchor="ctr">
+            <a:noAutofit/>
+          </a:bodyPr>
           <a:lstStyle xmlns:a="http://schemas.openxmlformats.org/drawingml/2006/main"/>
           <a:p xmlns:a="http://schemas.openxmlformats.org/drawingml/2006/main">
             <a:pPr>
-              <a:defRPr sz="3750" b="1">
+              <a:buNone/>
+              <a:defRPr sz="3600" b="1">
                 <a:solidFill>
                   <a:srgbClr val="152B3A"/>
                 </a:solidFill>
+                <a:latin typeface="Arial"/>
+                <a:ea typeface="Arial"/>
+                <a:cs typeface="Arial"/>
               </a:defRPr>
             </a:pPr>
             <a:r>
-              <a:rPr sz="3750" b="1">
+              <a:rPr sz="3600" b="1">
                 <a:solidFill>
                   <a:srgbClr val="152B3A"/>
                 </a:solidFill>
+                <a:latin typeface="Arial"/>
+                <a:ea typeface="Arial"/>
+                <a:cs typeface="Arial"/>
               </a:rPr>
               <a:t>Repair one arrow and save it</a:t>
             </a:r>
@@ -3451,21 +3799,30 @@
           </a:ln>
         </p:spPr>
         <p:txBody>
-          <a:bodyPr xmlns:a="http://schemas.openxmlformats.org/drawingml/2006/main" lIns="0" tIns="0" rIns="0" bIns="0" anchor="ctr"/>
+          <a:bodyPr xmlns:a="http://schemas.openxmlformats.org/drawingml/2006/main" wrap="square" lIns="0" tIns="0" rIns="0" bIns="0" anchor="ctr">
+            <a:noAutofit/>
+          </a:bodyPr>
           <a:lstStyle xmlns:a="http://schemas.openxmlformats.org/drawingml/2006/main"/>
           <a:p xmlns:a="http://schemas.openxmlformats.org/drawingml/2006/main">
             <a:pPr>
-              <a:defRPr sz="1275" b="0">
+              <a:buNone/>
+              <a:defRPr sz="1200" b="0">
                 <a:solidFill>
                   <a:srgbClr val="50616B"/>
                 </a:solidFill>
+                <a:latin typeface="Arial"/>
+                <a:ea typeface="Arial"/>
+                <a:cs typeface="Arial"/>
               </a:defRPr>
             </a:pPr>
             <a:r>
-              <a:rPr sz="1275" b="0">
+              <a:rPr sz="1200" b="0">
                 <a:solidFill>
                   <a:srgbClr val="50616B"/>
                 </a:solidFill>
+                <a:latin typeface="Arial"/>
+                <a:ea typeface="Arial"/>
+                <a:cs typeface="Arial"/>
               </a:rPr>
               <a:t>AUTUMN 1  ·  WEEK 7  ·  LESSON A</a:t>
             </a:r>
@@ -3501,14 +3858,20 @@
           </a:ln>
         </p:spPr>
         <p:txBody>
-          <a:bodyPr xmlns:a="http://schemas.openxmlformats.org/drawingml/2006/main" lIns="0" tIns="0" rIns="0" bIns="0" anchor="ctr"/>
+          <a:bodyPr xmlns:a="http://schemas.openxmlformats.org/drawingml/2006/main" wrap="square" lIns="0" tIns="0" rIns="0" bIns="0" anchor="ctr">
+            <a:noAutofit/>
+          </a:bodyPr>
           <a:lstStyle xmlns:a="http://schemas.openxmlformats.org/drawingml/2006/main"/>
           <a:p xmlns:a="http://schemas.openxmlformats.org/drawingml/2006/main">
             <a:pPr>
+              <a:buNone/>
               <a:defRPr sz="1350" b="1">
                 <a:solidFill>
                   <a:srgbClr val="28685E"/>
                 </a:solidFill>
+                <a:latin typeface="Arial"/>
+                <a:ea typeface="Arial"/>
+                <a:cs typeface="Arial"/>
               </a:defRPr>
             </a:pPr>
             <a:r>
@@ -3516,6 +3879,9 @@
                 <a:solidFill>
                   <a:srgbClr val="28685E"/>
                 </a:solidFill>
+                <a:latin typeface="Arial"/>
+                <a:ea typeface="Arial"/>
+                <a:cs typeface="Arial"/>
               </a:rPr>
               <a:t>11</a:t>
             </a:r>
@@ -3538,8 +3904,8 @@
         </p:nvSpPr>
         <p:spPr>
           <a:xfrm xmlns:a="http://schemas.openxmlformats.org/drawingml/2006/main">
-            <a:off x="609600" y="2619375"/>
-            <a:ext cx="10972800" cy="714375"/>
+            <a:off x="609600" y="2305050"/>
+            <a:ext cx="10972800" cy="704850"/>
           </a:xfrm>
           <a:prstGeom xmlns:a="http://schemas.openxmlformats.org/drawingml/2006/main" prst="rect">
             <a:avLst/>
@@ -3551,14 +3917,20 @@
           </a:ln>
         </p:spPr>
         <p:txBody>
-          <a:bodyPr xmlns:a="http://schemas.openxmlformats.org/drawingml/2006/main" lIns="0" tIns="0" rIns="0" bIns="0" anchor="ctr"/>
+          <a:bodyPr xmlns:a="http://schemas.openxmlformats.org/drawingml/2006/main" wrap="square" lIns="0" tIns="0" rIns="0" bIns="0" anchor="ctr">
+            <a:noAutofit/>
+          </a:bodyPr>
           <a:lstStyle xmlns:a="http://schemas.openxmlformats.org/drawingml/2006/main"/>
           <a:p xmlns:a="http://schemas.openxmlformats.org/drawingml/2006/main">
             <a:pPr>
+              <a:buNone/>
               <a:defRPr sz="2550" b="0">
                 <a:solidFill>
                   <a:srgbClr val="152B3A"/>
                 </a:solidFill>
+                <a:latin typeface="Arial"/>
+                <a:ea typeface="Arial"/>
+                <a:cs typeface="Arial"/>
               </a:defRPr>
             </a:pPr>
             <a:r>
@@ -3566,6 +3938,9 @@
                 <a:solidFill>
                   <a:srgbClr val="152B3A"/>
                 </a:solidFill>
+                <a:latin typeface="Arial"/>
+                <a:ea typeface="Arial"/>
+                <a:cs typeface="Arial"/>
               </a:rPr>
               <a:t>Turn one arrow the wrong way on purpose.</a:t>
             </a:r>
@@ -3588,8 +3963,8 @@
         </p:nvSpPr>
         <p:spPr>
           <a:xfrm xmlns:a="http://schemas.openxmlformats.org/drawingml/2006/main">
-            <a:off x="609600" y="3409950"/>
-            <a:ext cx="10972800" cy="714375"/>
+            <a:off x="609600" y="3143250"/>
+            <a:ext cx="10972800" cy="704850"/>
           </a:xfrm>
           <a:prstGeom xmlns:a="http://schemas.openxmlformats.org/drawingml/2006/main" prst="rect">
             <a:avLst/>
@@ -3601,14 +3976,20 @@
           </a:ln>
         </p:spPr>
         <p:txBody>
-          <a:bodyPr xmlns:a="http://schemas.openxmlformats.org/drawingml/2006/main" lIns="0" tIns="0" rIns="0" bIns="0" anchor="ctr"/>
+          <a:bodyPr xmlns:a="http://schemas.openxmlformats.org/drawingml/2006/main" wrap="square" lIns="0" tIns="0" rIns="0" bIns="0" anchor="ctr">
+            <a:noAutofit/>
+          </a:bodyPr>
           <a:lstStyle xmlns:a="http://schemas.openxmlformats.org/drawingml/2006/main"/>
           <a:p xmlns:a="http://schemas.openxmlformats.org/drawingml/2006/main">
             <a:pPr>
+              <a:buNone/>
               <a:defRPr sz="2550" b="0">
                 <a:solidFill>
                   <a:srgbClr val="152B3A"/>
                 </a:solidFill>
+                <a:latin typeface="Arial"/>
+                <a:ea typeface="Arial"/>
+                <a:cs typeface="Arial"/>
               </a:defRPr>
             </a:pPr>
             <a:r>
@@ -3616,6 +3997,9 @@
                 <a:solidFill>
                   <a:srgbClr val="152B3A"/>
                 </a:solidFill>
+                <a:latin typeface="Arial"/>
+                <a:ea typeface="Arial"/>
+                <a:cs typeface="Arial"/>
               </a:rPr>
               <a:t>Use the feeding clue to repair it.</a:t>
             </a:r>
@@ -3638,8 +4022,8 @@
         </p:nvSpPr>
         <p:spPr>
           <a:xfrm xmlns:a="http://schemas.openxmlformats.org/drawingml/2006/main">
-            <a:off x="609600" y="4200525"/>
-            <a:ext cx="10972800" cy="714375"/>
+            <a:off x="609600" y="3981450"/>
+            <a:ext cx="10972800" cy="704850"/>
           </a:xfrm>
           <a:prstGeom xmlns:a="http://schemas.openxmlformats.org/drawingml/2006/main" prst="rect">
             <a:avLst/>
@@ -3651,14 +4035,20 @@
           </a:ln>
         </p:spPr>
         <p:txBody>
-          <a:bodyPr xmlns:a="http://schemas.openxmlformats.org/drawingml/2006/main" lIns="0" tIns="0" rIns="0" bIns="0" anchor="ctr"/>
+          <a:bodyPr xmlns:a="http://schemas.openxmlformats.org/drawingml/2006/main" wrap="square" lIns="0" tIns="0" rIns="0" bIns="0" anchor="ctr">
+            <a:noAutofit/>
+          </a:bodyPr>
           <a:lstStyle xmlns:a="http://schemas.openxmlformats.org/drawingml/2006/main"/>
           <a:p xmlns:a="http://schemas.openxmlformats.org/drawingml/2006/main">
             <a:pPr>
+              <a:buNone/>
               <a:defRPr sz="2550" b="0">
                 <a:solidFill>
                   <a:srgbClr val="152B3A"/>
                 </a:solidFill>
+                <a:latin typeface="Arial"/>
+                <a:ea typeface="Arial"/>
+                <a:cs typeface="Arial"/>
               </a:defRPr>
             </a:pPr>
             <a:r>
@@ -3666,6 +4056,9 @@
                 <a:solidFill>
                   <a:srgbClr val="152B3A"/>
                 </a:solidFill>
+                <a:latin typeface="Arial"/>
+                <a:ea typeface="Arial"/>
+                <a:cs typeface="Arial"/>
               </a:rPr>
               <a:t>Say who receives food at that arrow.</a:t>
             </a:r>
@@ -3688,8 +4081,8 @@
         </p:nvSpPr>
         <p:spPr>
           <a:xfrm xmlns:a="http://schemas.openxmlformats.org/drawingml/2006/main">
-            <a:off x="609600" y="4991100"/>
-            <a:ext cx="10972800" cy="714375"/>
+            <a:off x="609600" y="4819650"/>
+            <a:ext cx="10972800" cy="704850"/>
           </a:xfrm>
           <a:prstGeom xmlns:a="http://schemas.openxmlformats.org/drawingml/2006/main" prst="rect">
             <a:avLst/>
@@ -3701,21 +4094,30 @@
           </a:ln>
         </p:spPr>
         <p:txBody>
-          <a:bodyPr xmlns:a="http://schemas.openxmlformats.org/drawingml/2006/main" lIns="0" tIns="0" rIns="0" bIns="0" anchor="ctr"/>
+          <a:bodyPr xmlns:a="http://schemas.openxmlformats.org/drawingml/2006/main" wrap="square" lIns="0" tIns="0" rIns="0" bIns="0" anchor="ctr">
+            <a:noAutofit/>
+          </a:bodyPr>
           <a:lstStyle xmlns:a="http://schemas.openxmlformats.org/drawingml/2006/main"/>
           <a:p xmlns:a="http://schemas.openxmlformats.org/drawingml/2006/main">
             <a:pPr>
-              <a:defRPr sz="2550" b="0">
-                <a:solidFill>
-                  <a:srgbClr val="152B3A"/>
-                </a:solidFill>
+              <a:buNone/>
+              <a:defRPr sz="2550" b="1">
+                <a:solidFill>
+                  <a:srgbClr val="28685E"/>
+                </a:solidFill>
+                <a:latin typeface="Arial"/>
+                <a:ea typeface="Arial"/>
+                <a:cs typeface="Arial"/>
               </a:defRPr>
             </a:pPr>
             <a:r>
-              <a:rPr sz="2550" b="0">
-                <a:solidFill>
-                  <a:srgbClr val="152B3A"/>
-                </a:solidFill>
+              <a:rPr sz="2550" b="1">
+                <a:solidFill>
+                  <a:srgbClr val="28685E"/>
+                </a:solidFill>
+                <a:latin typeface="Arial"/>
+                <a:ea typeface="Arial"/>
+                <a:cs typeface="Arial"/>
               </a:rPr>
               <a:t>Keep the chain for Wednesday.</a:t>
             </a:r>
@@ -3738,7 +4140,7 @@
     <p:bg>
       <p:bgPr>
         <a:solidFill xmlns:a="http://schemas.openxmlformats.org/drawingml/2006/main">
-          <a:srgbClr val="F5F1E8"/>
+          <a:srgbClr val="FBF9F3"/>
         </a:solidFill>
       </p:bgPr>
     </p:bg>
@@ -3767,8 +4169,8 @@
         </p:nvSpPr>
         <p:spPr>
           <a:xfrm xmlns:a="http://schemas.openxmlformats.org/drawingml/2006/main">
-            <a:off x="609600" y="552450"/>
-            <a:ext cx="781050" cy="57150"/>
+            <a:off x="609600" y="742950"/>
+            <a:ext cx="9906000" cy="38100"/>
           </a:xfrm>
           <a:prstGeom xmlns:a="http://schemas.openxmlformats.org/drawingml/2006/main" prst="rect">
             <a:avLst/>
@@ -3798,8 +4200,8 @@
         </p:nvSpPr>
         <p:spPr>
           <a:xfrm xmlns:a="http://schemas.openxmlformats.org/drawingml/2006/main">
-            <a:off x="609600" y="762000"/>
-            <a:ext cx="9334500" cy="285750"/>
+            <a:off x="609600" y="342900"/>
+            <a:ext cx="9334500" cy="266700"/>
           </a:xfrm>
           <a:prstGeom xmlns:a="http://schemas.openxmlformats.org/drawingml/2006/main" prst="rect">
             <a:avLst/>
@@ -3811,21 +4213,30 @@
           </a:ln>
         </p:spPr>
         <p:txBody>
-          <a:bodyPr xmlns:a="http://schemas.openxmlformats.org/drawingml/2006/main" lIns="0" tIns="0" rIns="0" bIns="0" anchor="ctr"/>
+          <a:bodyPr xmlns:a="http://schemas.openxmlformats.org/drawingml/2006/main" wrap="square" lIns="0" tIns="0" rIns="0" bIns="0" anchor="ctr">
+            <a:noAutofit/>
+          </a:bodyPr>
           <a:lstStyle xmlns:a="http://schemas.openxmlformats.org/drawingml/2006/main"/>
           <a:p xmlns:a="http://schemas.openxmlformats.org/drawingml/2006/main">
             <a:pPr>
-              <a:defRPr sz="1500" b="1">
+              <a:buNone/>
+              <a:defRPr sz="1425" b="1">
                 <a:solidFill>
                   <a:srgbClr val="28685E"/>
                 </a:solidFill>
+                <a:latin typeface="Arial"/>
+                <a:ea typeface="Arial"/>
+                <a:cs typeface="Arial"/>
               </a:defRPr>
             </a:pPr>
             <a:r>
-              <a:rPr sz="1500" b="1">
+              <a:rPr sz="1425" b="1">
                 <a:solidFill>
                   <a:srgbClr val="28685E"/>
                 </a:solidFill>
+                <a:latin typeface="Arial"/>
+                <a:ea typeface="Arial"/>
+                <a:cs typeface="Arial"/>
               </a:rPr>
               <a:t>MADE BY MATT  /  BUILD SCIENCE</a:t>
             </a:r>
@@ -3834,14 +4245,14 @@
       </p:sp>
       <p:pic>
         <p:nvPicPr>
-          <p:cNvPr id="13" name=""/>
+          <p:cNvPr id="17" name=""/>
           <p:cNvPicPr>
             <a:picLocks xmlns:a="http://schemas.openxmlformats.org/drawingml/2006/main" noChangeAspect="1"/>
           </p:cNvPicPr>
           <p:nvPr/>
         </p:nvPicPr>
         <p:blipFill>
-          <a:blip xmlns:r="http://schemas.openxmlformats.org/officeDocument/2006/relationships" xmlns:a="http://schemas.openxmlformats.org/drawingml/2006/main" r:embed="R6922989a0304413d"/>
+          <a:blip xmlns:r="http://schemas.openxmlformats.org/officeDocument/2006/relationships" xmlns:a="http://schemas.openxmlformats.org/drawingml/2006/main" r:embed="Rf47f86ec96504623"/>
           <a:stretch xmlns:a="http://schemas.openxmlformats.org/drawingml/2006/main"/>
         </p:blipFill>
         <p:spPr>
@@ -3870,8 +4281,8 @@
         </p:nvSpPr>
         <p:spPr>
           <a:xfrm xmlns:a="http://schemas.openxmlformats.org/drawingml/2006/main">
-            <a:off x="609600" y="1352550"/>
-            <a:ext cx="10972800" cy="952500"/>
+            <a:off x="609600" y="1047750"/>
+            <a:ext cx="10972800" cy="895350"/>
           </a:xfrm>
           <a:prstGeom xmlns:a="http://schemas.openxmlformats.org/drawingml/2006/main" prst="rect">
             <a:avLst/>
@@ -3883,21 +4294,30 @@
           </a:ln>
         </p:spPr>
         <p:txBody>
-          <a:bodyPr xmlns:a="http://schemas.openxmlformats.org/drawingml/2006/main" lIns="0" tIns="0" rIns="0" bIns="0" anchor="ctr"/>
+          <a:bodyPr xmlns:a="http://schemas.openxmlformats.org/drawingml/2006/main" wrap="square" lIns="0" tIns="0" rIns="0" bIns="0" anchor="ctr">
+            <a:noAutofit/>
+          </a:bodyPr>
           <a:lstStyle xmlns:a="http://schemas.openxmlformats.org/drawingml/2006/main"/>
           <a:p xmlns:a="http://schemas.openxmlformats.org/drawingml/2006/main">
             <a:pPr>
-              <a:defRPr sz="3750" b="1">
+              <a:buNone/>
+              <a:defRPr sz="3600" b="1">
                 <a:solidFill>
                   <a:srgbClr val="152B3A"/>
                 </a:solidFill>
+                <a:latin typeface="Arial"/>
+                <a:ea typeface="Arial"/>
+                <a:cs typeface="Arial"/>
               </a:defRPr>
             </a:pPr>
             <a:r>
-              <a:rPr sz="3750" b="1">
+              <a:rPr sz="3600" b="1">
                 <a:solidFill>
                   <a:srgbClr val="152B3A"/>
                 </a:solidFill>
+                <a:latin typeface="Arial"/>
+                <a:ea typeface="Arial"/>
+                <a:cs typeface="Arial"/>
               </a:rPr>
               <a:t>Start with a feeding link</a:t>
             </a:r>
@@ -3964,21 +4384,30 @@
           </a:ln>
         </p:spPr>
         <p:txBody>
-          <a:bodyPr xmlns:a="http://schemas.openxmlformats.org/drawingml/2006/main" lIns="0" tIns="0" rIns="0" bIns="0" anchor="ctr"/>
+          <a:bodyPr xmlns:a="http://schemas.openxmlformats.org/drawingml/2006/main" wrap="square" lIns="0" tIns="0" rIns="0" bIns="0" anchor="ctr">
+            <a:noAutofit/>
+          </a:bodyPr>
           <a:lstStyle xmlns:a="http://schemas.openxmlformats.org/drawingml/2006/main"/>
           <a:p xmlns:a="http://schemas.openxmlformats.org/drawingml/2006/main">
             <a:pPr>
-              <a:defRPr sz="1275" b="0">
+              <a:buNone/>
+              <a:defRPr sz="1200" b="0">
                 <a:solidFill>
                   <a:srgbClr val="50616B"/>
                 </a:solidFill>
+                <a:latin typeface="Arial"/>
+                <a:ea typeface="Arial"/>
+                <a:cs typeface="Arial"/>
               </a:defRPr>
             </a:pPr>
             <a:r>
-              <a:rPr sz="1275" b="0">
+              <a:rPr sz="1200" b="0">
                 <a:solidFill>
                   <a:srgbClr val="50616B"/>
                 </a:solidFill>
+                <a:latin typeface="Arial"/>
+                <a:ea typeface="Arial"/>
+                <a:cs typeface="Arial"/>
               </a:rPr>
               <a:t>AUTUMN 1  ·  WEEK 7  ·  LESSON A</a:t>
             </a:r>
@@ -4014,14 +4443,20 @@
           </a:ln>
         </p:spPr>
         <p:txBody>
-          <a:bodyPr xmlns:a="http://schemas.openxmlformats.org/drawingml/2006/main" lIns="0" tIns="0" rIns="0" bIns="0" anchor="ctr"/>
+          <a:bodyPr xmlns:a="http://schemas.openxmlformats.org/drawingml/2006/main" wrap="square" lIns="0" tIns="0" rIns="0" bIns="0" anchor="ctr">
+            <a:noAutofit/>
+          </a:bodyPr>
           <a:lstStyle xmlns:a="http://schemas.openxmlformats.org/drawingml/2006/main"/>
           <a:p xmlns:a="http://schemas.openxmlformats.org/drawingml/2006/main">
             <a:pPr>
+              <a:buNone/>
               <a:defRPr sz="1350" b="1">
                 <a:solidFill>
                   <a:srgbClr val="28685E"/>
                 </a:solidFill>
+                <a:latin typeface="Arial"/>
+                <a:ea typeface="Arial"/>
+                <a:cs typeface="Arial"/>
               </a:defRPr>
             </a:pPr>
             <a:r>
@@ -4029,6 +4464,9 @@
                 <a:solidFill>
                   <a:srgbClr val="28685E"/>
                 </a:solidFill>
+                <a:latin typeface="Arial"/>
+                <a:ea typeface="Arial"/>
+                <a:cs typeface="Arial"/>
               </a:rPr>
               <a:t>02</a:t>
             </a:r>
@@ -4051,8 +4489,8 @@
         </p:nvSpPr>
         <p:spPr>
           <a:xfrm xmlns:a="http://schemas.openxmlformats.org/drawingml/2006/main">
-            <a:off x="609600" y="2619375"/>
-            <a:ext cx="10972800" cy="781050"/>
+            <a:off x="609600" y="2305050"/>
+            <a:ext cx="7096125" cy="914400"/>
           </a:xfrm>
           <a:prstGeom xmlns:a="http://schemas.openxmlformats.org/drawingml/2006/main" prst="rect">
             <a:avLst/>
@@ -4064,14 +4502,20 @@
           </a:ln>
         </p:spPr>
         <p:txBody>
-          <a:bodyPr xmlns:a="http://schemas.openxmlformats.org/drawingml/2006/main" lIns="0" tIns="0" rIns="0" bIns="0" anchor="ctr"/>
+          <a:bodyPr xmlns:a="http://schemas.openxmlformats.org/drawingml/2006/main" wrap="square" lIns="0" tIns="0" rIns="0" bIns="0" anchor="ctr">
+            <a:noAutofit/>
+          </a:bodyPr>
           <a:lstStyle xmlns:a="http://schemas.openxmlformats.org/drawingml/2006/main"/>
           <a:p xmlns:a="http://schemas.openxmlformats.org/drawingml/2006/main">
             <a:pPr>
+              <a:buNone/>
               <a:defRPr sz="2550" b="0">
                 <a:solidFill>
                   <a:srgbClr val="152B3A"/>
                 </a:solidFill>
+                <a:latin typeface="Arial"/>
+                <a:ea typeface="Arial"/>
+                <a:cs typeface="Arial"/>
               </a:defRPr>
             </a:pPr>
             <a:r>
@@ -4079,6 +4523,9 @@
                 <a:solidFill>
                   <a:srgbClr val="152B3A"/>
                 </a:solidFill>
+                <a:latin typeface="Arial"/>
+                <a:ea typeface="Arial"/>
+                <a:cs typeface="Arial"/>
               </a:rPr>
               <a:t>A rabbit can eat grass.</a:t>
             </a:r>
@@ -4101,8 +4548,8 @@
         </p:nvSpPr>
         <p:spPr>
           <a:xfrm xmlns:a="http://schemas.openxmlformats.org/drawingml/2006/main">
-            <a:off x="609600" y="3476625"/>
-            <a:ext cx="10972800" cy="781050"/>
+            <a:off x="609600" y="3352800"/>
+            <a:ext cx="7096125" cy="914400"/>
           </a:xfrm>
           <a:prstGeom xmlns:a="http://schemas.openxmlformats.org/drawingml/2006/main" prst="rect">
             <a:avLst/>
@@ -4114,14 +4561,20 @@
           </a:ln>
         </p:spPr>
         <p:txBody>
-          <a:bodyPr xmlns:a="http://schemas.openxmlformats.org/drawingml/2006/main" lIns="0" tIns="0" rIns="0" bIns="0" anchor="ctr"/>
+          <a:bodyPr xmlns:a="http://schemas.openxmlformats.org/drawingml/2006/main" wrap="square" lIns="0" tIns="0" rIns="0" bIns="0" anchor="ctr">
+            <a:noAutofit/>
+          </a:bodyPr>
           <a:lstStyle xmlns:a="http://schemas.openxmlformats.org/drawingml/2006/main"/>
           <a:p xmlns:a="http://schemas.openxmlformats.org/drawingml/2006/main">
             <a:pPr>
+              <a:buNone/>
               <a:defRPr sz="2550" b="0">
                 <a:solidFill>
                   <a:srgbClr val="152B3A"/>
                 </a:solidFill>
+                <a:latin typeface="Arial"/>
+                <a:ea typeface="Arial"/>
+                <a:cs typeface="Arial"/>
               </a:defRPr>
             </a:pPr>
             <a:r>
@@ -4129,6 +4582,9 @@
                 <a:solidFill>
                   <a:srgbClr val="152B3A"/>
                 </a:solidFill>
+                <a:latin typeface="Arial"/>
+                <a:ea typeface="Arial"/>
+                <a:cs typeface="Arial"/>
               </a:rPr>
               <a:t>Which living thing is the plant?</a:t>
             </a:r>
@@ -4151,8 +4607,8 @@
         </p:nvSpPr>
         <p:spPr>
           <a:xfrm xmlns:a="http://schemas.openxmlformats.org/drawingml/2006/main">
-            <a:off x="609600" y="4333875"/>
-            <a:ext cx="10972800" cy="781050"/>
+            <a:off x="609600" y="4400550"/>
+            <a:ext cx="7096125" cy="914400"/>
           </a:xfrm>
           <a:prstGeom xmlns:a="http://schemas.openxmlformats.org/drawingml/2006/main" prst="rect">
             <a:avLst/>
@@ -4164,27 +4620,80 @@
           </a:ln>
         </p:spPr>
         <p:txBody>
-          <a:bodyPr xmlns:a="http://schemas.openxmlformats.org/drawingml/2006/main" lIns="0" tIns="0" rIns="0" bIns="0" anchor="ctr"/>
+          <a:bodyPr xmlns:a="http://schemas.openxmlformats.org/drawingml/2006/main" wrap="square" lIns="0" tIns="0" rIns="0" bIns="0" anchor="ctr">
+            <a:noAutofit/>
+          </a:bodyPr>
           <a:lstStyle xmlns:a="http://schemas.openxmlformats.org/drawingml/2006/main"/>
           <a:p xmlns:a="http://schemas.openxmlformats.org/drawingml/2006/main">
             <a:pPr>
-              <a:defRPr sz="2550" b="0">
-                <a:solidFill>
-                  <a:srgbClr val="152B3A"/>
-                </a:solidFill>
+              <a:buNone/>
+              <a:defRPr sz="2550" b="1">
+                <a:solidFill>
+                  <a:srgbClr val="28685E"/>
+                </a:solidFill>
+                <a:latin typeface="Arial"/>
+                <a:ea typeface="Arial"/>
+                <a:cs typeface="Arial"/>
               </a:defRPr>
             </a:pPr>
             <a:r>
-              <a:rPr sz="2550" b="0">
-                <a:solidFill>
-                  <a:srgbClr val="152B3A"/>
-                </a:solidFill>
+              <a:rPr sz="2550" b="1">
+                <a:solidFill>
+                  <a:srgbClr val="28685E"/>
+                </a:solidFill>
+                <a:latin typeface="Arial"/>
+                <a:ea typeface="Arial"/>
+                <a:cs typeface="Arial"/>
               </a:rPr>
               <a:t>Who gets the food when the rabbit eats?</a:t>
             </a:r>
           </a:p>
         </p:txBody>
       </p:sp>
+      <p:pic>
+        <p:nvPicPr>
+          <p:cNvPr id="25" name=""/>
+          <p:cNvPicPr>
+            <a:picLocks xmlns:a="http://schemas.openxmlformats.org/drawingml/2006/main" noChangeAspect="1"/>
+          </p:cNvPicPr>
+          <p:nvPr/>
+        </p:nvPicPr>
+        <p:blipFill>
+          <a:blip xmlns:r="http://schemas.openxmlformats.org/officeDocument/2006/relationships" xmlns:a="http://schemas.openxmlformats.org/drawingml/2006/main" r:embed="R7f12070aa2094ad6"/>
+          <a:stretch xmlns:a="http://schemas.openxmlformats.org/drawingml/2006/main"/>
+        </p:blipFill>
+        <p:spPr>
+          <a:xfrm xmlns:a="http://schemas.openxmlformats.org/drawingml/2006/main">
+            <a:off x="9256395" y="2381250"/>
+            <a:ext cx="1203960" cy="1524000"/>
+          </a:xfrm>
+          <a:prstGeom xmlns:a="http://schemas.openxmlformats.org/drawingml/2006/main" prst="rect">
+            <a:avLst/>
+          </a:prstGeom>
+        </p:spPr>
+      </p:pic>
+      <p:pic>
+        <p:nvPicPr>
+          <p:cNvPr id="26" name=""/>
+          <p:cNvPicPr>
+            <a:picLocks xmlns:a="http://schemas.openxmlformats.org/drawingml/2006/main" noChangeAspect="1"/>
+          </p:cNvPicPr>
+          <p:nvPr/>
+        </p:nvPicPr>
+        <p:blipFill>
+          <a:blip xmlns:r="http://schemas.openxmlformats.org/officeDocument/2006/relationships" xmlns:a="http://schemas.openxmlformats.org/drawingml/2006/main" r:embed="R1db72b1f86c74178"/>
+          <a:stretch xmlns:a="http://schemas.openxmlformats.org/drawingml/2006/main"/>
+        </p:blipFill>
+        <p:spPr>
+          <a:xfrm xmlns:a="http://schemas.openxmlformats.org/drawingml/2006/main">
+            <a:off x="9182735" y="4095750"/>
+            <a:ext cx="1351280" cy="1524000"/>
+          </a:xfrm>
+          <a:prstGeom xmlns:a="http://schemas.openxmlformats.org/drawingml/2006/main" prst="rect">
+            <a:avLst/>
+          </a:prstGeom>
+        </p:spPr>
+      </p:pic>
     </p:spTree>
     <p:extLst>
       <p:ext uri="{BB962C8B-B14F-4D97-AF65-F5344CB8AC3E}">
@@ -4201,7 +4710,7 @@
     <p:bg>
       <p:bgPr>
         <a:solidFill xmlns:a="http://schemas.openxmlformats.org/drawingml/2006/main">
-          <a:srgbClr val="F5F1E8"/>
+          <a:srgbClr val="FBF9F3"/>
         </a:solidFill>
       </p:bgPr>
     </p:bg>
@@ -4230,8 +4739,8 @@
         </p:nvSpPr>
         <p:spPr>
           <a:xfrm xmlns:a="http://schemas.openxmlformats.org/drawingml/2006/main">
-            <a:off x="609600" y="552450"/>
-            <a:ext cx="781050" cy="57150"/>
+            <a:off x="609600" y="742950"/>
+            <a:ext cx="9906000" cy="38100"/>
           </a:xfrm>
           <a:prstGeom xmlns:a="http://schemas.openxmlformats.org/drawingml/2006/main" prst="rect">
             <a:avLst/>
@@ -4261,8 +4770,8 @@
         </p:nvSpPr>
         <p:spPr>
           <a:xfrm xmlns:a="http://schemas.openxmlformats.org/drawingml/2006/main">
-            <a:off x="609600" y="762000"/>
-            <a:ext cx="9334500" cy="285750"/>
+            <a:off x="609600" y="342900"/>
+            <a:ext cx="9334500" cy="266700"/>
           </a:xfrm>
           <a:prstGeom xmlns:a="http://schemas.openxmlformats.org/drawingml/2006/main" prst="rect">
             <a:avLst/>
@@ -4274,21 +4783,30 @@
           </a:ln>
         </p:spPr>
         <p:txBody>
-          <a:bodyPr xmlns:a="http://schemas.openxmlformats.org/drawingml/2006/main" lIns="0" tIns="0" rIns="0" bIns="0" anchor="ctr"/>
+          <a:bodyPr xmlns:a="http://schemas.openxmlformats.org/drawingml/2006/main" wrap="square" lIns="0" tIns="0" rIns="0" bIns="0" anchor="ctr">
+            <a:noAutofit/>
+          </a:bodyPr>
           <a:lstStyle xmlns:a="http://schemas.openxmlformats.org/drawingml/2006/main"/>
           <a:p xmlns:a="http://schemas.openxmlformats.org/drawingml/2006/main">
             <a:pPr>
-              <a:defRPr sz="1500" b="1">
+              <a:buNone/>
+              <a:defRPr sz="1425" b="1">
                 <a:solidFill>
                   <a:srgbClr val="28685E"/>
                 </a:solidFill>
+                <a:latin typeface="Arial"/>
+                <a:ea typeface="Arial"/>
+                <a:cs typeface="Arial"/>
               </a:defRPr>
             </a:pPr>
             <a:r>
-              <a:rPr sz="1500" b="1">
+              <a:rPr sz="1425" b="1">
                 <a:solidFill>
                   <a:srgbClr val="28685E"/>
                 </a:solidFill>
+                <a:latin typeface="Arial"/>
+                <a:ea typeface="Arial"/>
+                <a:cs typeface="Arial"/>
               </a:rPr>
               <a:t>MADE BY MATT  /  BUILD SCIENCE</a:t>
             </a:r>
@@ -4297,14 +4815,14 @@
       </p:sp>
       <p:pic>
         <p:nvPicPr>
-          <p:cNvPr id="13" name=""/>
+          <p:cNvPr id="15" name=""/>
           <p:cNvPicPr>
             <a:picLocks xmlns:a="http://schemas.openxmlformats.org/drawingml/2006/main" noChangeAspect="1"/>
           </p:cNvPicPr>
           <p:nvPr/>
         </p:nvPicPr>
         <p:blipFill>
-          <a:blip xmlns:r="http://schemas.openxmlformats.org/officeDocument/2006/relationships" xmlns:a="http://schemas.openxmlformats.org/drawingml/2006/main" r:embed="R62640d204d174a70"/>
+          <a:blip xmlns:r="http://schemas.openxmlformats.org/officeDocument/2006/relationships" xmlns:a="http://schemas.openxmlformats.org/drawingml/2006/main" r:embed="R18f25877e600456a"/>
           <a:stretch xmlns:a="http://schemas.openxmlformats.org/drawingml/2006/main"/>
         </p:blipFill>
         <p:spPr>
@@ -4333,8 +4851,8 @@
         </p:nvSpPr>
         <p:spPr>
           <a:xfrm xmlns:a="http://schemas.openxmlformats.org/drawingml/2006/main">
-            <a:off x="609600" y="1352550"/>
-            <a:ext cx="10972800" cy="952500"/>
+            <a:off x="609600" y="1047750"/>
+            <a:ext cx="10972800" cy="895350"/>
           </a:xfrm>
           <a:prstGeom xmlns:a="http://schemas.openxmlformats.org/drawingml/2006/main" prst="rect">
             <a:avLst/>
@@ -4346,21 +4864,30 @@
           </a:ln>
         </p:spPr>
         <p:txBody>
-          <a:bodyPr xmlns:a="http://schemas.openxmlformats.org/drawingml/2006/main" lIns="0" tIns="0" rIns="0" bIns="0" anchor="ctr"/>
+          <a:bodyPr xmlns:a="http://schemas.openxmlformats.org/drawingml/2006/main" wrap="square" lIns="0" tIns="0" rIns="0" bIns="0" anchor="ctr">
+            <a:noAutofit/>
+          </a:bodyPr>
           <a:lstStyle xmlns:a="http://schemas.openxmlformats.org/drawingml/2006/main"/>
           <a:p xmlns:a="http://schemas.openxmlformats.org/drawingml/2006/main">
             <a:pPr>
-              <a:defRPr sz="3750" b="1">
+              <a:buNone/>
+              <a:defRPr sz="3600" b="1">
                 <a:solidFill>
                   <a:srgbClr val="152B3A"/>
                 </a:solidFill>
+                <a:latin typeface="Arial"/>
+                <a:ea typeface="Arial"/>
+                <a:cs typeface="Arial"/>
               </a:defRPr>
             </a:pPr>
             <a:r>
-              <a:rPr sz="3750" b="1">
+              <a:rPr sz="3600" b="1">
                 <a:solidFill>
                   <a:srgbClr val="152B3A"/>
                 </a:solidFill>
+                <a:latin typeface="Arial"/>
+                <a:ea typeface="Arial"/>
+                <a:cs typeface="Arial"/>
               </a:rPr>
               <a:t>Three things we will do</a:t>
             </a:r>
@@ -4427,21 +4954,30 @@
           </a:ln>
         </p:spPr>
         <p:txBody>
-          <a:bodyPr xmlns:a="http://schemas.openxmlformats.org/drawingml/2006/main" lIns="0" tIns="0" rIns="0" bIns="0" anchor="ctr"/>
+          <a:bodyPr xmlns:a="http://schemas.openxmlformats.org/drawingml/2006/main" wrap="square" lIns="0" tIns="0" rIns="0" bIns="0" anchor="ctr">
+            <a:noAutofit/>
+          </a:bodyPr>
           <a:lstStyle xmlns:a="http://schemas.openxmlformats.org/drawingml/2006/main"/>
           <a:p xmlns:a="http://schemas.openxmlformats.org/drawingml/2006/main">
             <a:pPr>
-              <a:defRPr sz="1275" b="0">
+              <a:buNone/>
+              <a:defRPr sz="1200" b="0">
                 <a:solidFill>
                   <a:srgbClr val="50616B"/>
                 </a:solidFill>
+                <a:latin typeface="Arial"/>
+                <a:ea typeface="Arial"/>
+                <a:cs typeface="Arial"/>
               </a:defRPr>
             </a:pPr>
             <a:r>
-              <a:rPr sz="1275" b="0">
+              <a:rPr sz="1200" b="0">
                 <a:solidFill>
                   <a:srgbClr val="50616B"/>
                 </a:solidFill>
+                <a:latin typeface="Arial"/>
+                <a:ea typeface="Arial"/>
+                <a:cs typeface="Arial"/>
               </a:rPr>
               <a:t>AUTUMN 1  ·  WEEK 7  ·  LESSON A</a:t>
             </a:r>
@@ -4477,14 +5013,20 @@
           </a:ln>
         </p:spPr>
         <p:txBody>
-          <a:bodyPr xmlns:a="http://schemas.openxmlformats.org/drawingml/2006/main" lIns="0" tIns="0" rIns="0" bIns="0" anchor="ctr"/>
+          <a:bodyPr xmlns:a="http://schemas.openxmlformats.org/drawingml/2006/main" wrap="square" lIns="0" tIns="0" rIns="0" bIns="0" anchor="ctr">
+            <a:noAutofit/>
+          </a:bodyPr>
           <a:lstStyle xmlns:a="http://schemas.openxmlformats.org/drawingml/2006/main"/>
           <a:p xmlns:a="http://schemas.openxmlformats.org/drawingml/2006/main">
             <a:pPr>
+              <a:buNone/>
               <a:defRPr sz="1350" b="1">
                 <a:solidFill>
                   <a:srgbClr val="28685E"/>
                 </a:solidFill>
+                <a:latin typeface="Arial"/>
+                <a:ea typeface="Arial"/>
+                <a:cs typeface="Arial"/>
               </a:defRPr>
             </a:pPr>
             <a:r>
@@ -4492,6 +5034,9 @@
                 <a:solidFill>
                   <a:srgbClr val="28685E"/>
                 </a:solidFill>
+                <a:latin typeface="Arial"/>
+                <a:ea typeface="Arial"/>
+                <a:cs typeface="Arial"/>
               </a:rPr>
               <a:t>03</a:t>
             </a:r>
@@ -4514,8 +5059,8 @@
         </p:nvSpPr>
         <p:spPr>
           <a:xfrm xmlns:a="http://schemas.openxmlformats.org/drawingml/2006/main">
-            <a:off x="609600" y="2619375"/>
-            <a:ext cx="10972800" cy="781050"/>
+            <a:off x="609600" y="2305050"/>
+            <a:ext cx="10972800" cy="914400"/>
           </a:xfrm>
           <a:prstGeom xmlns:a="http://schemas.openxmlformats.org/drawingml/2006/main" prst="rect">
             <a:avLst/>
@@ -4527,14 +5072,20 @@
           </a:ln>
         </p:spPr>
         <p:txBody>
-          <a:bodyPr xmlns:a="http://schemas.openxmlformats.org/drawingml/2006/main" lIns="0" tIns="0" rIns="0" bIns="0" anchor="ctr"/>
+          <a:bodyPr xmlns:a="http://schemas.openxmlformats.org/drawingml/2006/main" wrap="square" lIns="0" tIns="0" rIns="0" bIns="0" anchor="ctr">
+            <a:noAutofit/>
+          </a:bodyPr>
           <a:lstStyle xmlns:a="http://schemas.openxmlformats.org/drawingml/2006/main"/>
           <a:p xmlns:a="http://schemas.openxmlformats.org/drawingml/2006/main">
             <a:pPr>
+              <a:buNone/>
               <a:defRPr sz="2550" b="0">
                 <a:solidFill>
                   <a:srgbClr val="152B3A"/>
                 </a:solidFill>
+                <a:latin typeface="Arial"/>
+                <a:ea typeface="Arial"/>
+                <a:cs typeface="Arial"/>
               </a:defRPr>
             </a:pPr>
             <a:r>
@@ -4542,6 +5093,9 @@
                 <a:solidFill>
                   <a:srgbClr val="152B3A"/>
                 </a:solidFill>
+                <a:latin typeface="Arial"/>
+                <a:ea typeface="Arial"/>
+                <a:cs typeface="Arial"/>
               </a:rPr>
               <a:t>Identify a producer and consumers.</a:t>
             </a:r>
@@ -4564,8 +5118,8 @@
         </p:nvSpPr>
         <p:spPr>
           <a:xfrm xmlns:a="http://schemas.openxmlformats.org/drawingml/2006/main">
-            <a:off x="609600" y="3476625"/>
-            <a:ext cx="10972800" cy="781050"/>
+            <a:off x="609600" y="3352800"/>
+            <a:ext cx="10972800" cy="914400"/>
           </a:xfrm>
           <a:prstGeom xmlns:a="http://schemas.openxmlformats.org/drawingml/2006/main" prst="rect">
             <a:avLst/>
@@ -4577,14 +5131,20 @@
           </a:ln>
         </p:spPr>
         <p:txBody>
-          <a:bodyPr xmlns:a="http://schemas.openxmlformats.org/drawingml/2006/main" lIns="0" tIns="0" rIns="0" bIns="0" anchor="ctr"/>
+          <a:bodyPr xmlns:a="http://schemas.openxmlformats.org/drawingml/2006/main" wrap="square" lIns="0" tIns="0" rIns="0" bIns="0" anchor="ctr">
+            <a:noAutofit/>
+          </a:bodyPr>
           <a:lstStyle xmlns:a="http://schemas.openxmlformats.org/drawingml/2006/main"/>
           <a:p xmlns:a="http://schemas.openxmlformats.org/drawingml/2006/main">
             <a:pPr>
+              <a:buNone/>
               <a:defRPr sz="2550" b="0">
                 <a:solidFill>
                   <a:srgbClr val="152B3A"/>
                 </a:solidFill>
+                <a:latin typeface="Arial"/>
+                <a:ea typeface="Arial"/>
+                <a:cs typeface="Arial"/>
               </a:defRPr>
             </a:pPr>
             <a:r>
@@ -4592,6 +5152,9 @@
                 <a:solidFill>
                   <a:srgbClr val="152B3A"/>
                 </a:solidFill>
+                <a:latin typeface="Arial"/>
+                <a:ea typeface="Arial"/>
+                <a:cs typeface="Arial"/>
               </a:rPr>
               <a:t>Read the food-chain arrow.</a:t>
             </a:r>
@@ -4614,8 +5177,8 @@
         </p:nvSpPr>
         <p:spPr>
           <a:xfrm xmlns:a="http://schemas.openxmlformats.org/drawingml/2006/main">
-            <a:off x="609600" y="4333875"/>
-            <a:ext cx="10972800" cy="781050"/>
+            <a:off x="609600" y="4400550"/>
+            <a:ext cx="10972800" cy="914400"/>
           </a:xfrm>
           <a:prstGeom xmlns:a="http://schemas.openxmlformats.org/drawingml/2006/main" prst="rect">
             <a:avLst/>
@@ -4627,21 +5190,30 @@
           </a:ln>
         </p:spPr>
         <p:txBody>
-          <a:bodyPr xmlns:a="http://schemas.openxmlformats.org/drawingml/2006/main" lIns="0" tIns="0" rIns="0" bIns="0" anchor="ctr"/>
+          <a:bodyPr xmlns:a="http://schemas.openxmlformats.org/drawingml/2006/main" wrap="square" lIns="0" tIns="0" rIns="0" bIns="0" anchor="ctr">
+            <a:noAutofit/>
+          </a:bodyPr>
           <a:lstStyle xmlns:a="http://schemas.openxmlformats.org/drawingml/2006/main"/>
           <a:p xmlns:a="http://schemas.openxmlformats.org/drawingml/2006/main">
             <a:pPr>
-              <a:defRPr sz="2550" b="0">
-                <a:solidFill>
-                  <a:srgbClr val="152B3A"/>
-                </a:solidFill>
+              <a:buNone/>
+              <a:defRPr sz="2550" b="1">
+                <a:solidFill>
+                  <a:srgbClr val="28685E"/>
+                </a:solidFill>
+                <a:latin typeface="Arial"/>
+                <a:ea typeface="Arial"/>
+                <a:cs typeface="Arial"/>
               </a:defRPr>
             </a:pPr>
             <a:r>
-              <a:rPr sz="2550" b="0">
-                <a:solidFill>
-                  <a:srgbClr val="152B3A"/>
-                </a:solidFill>
+              <a:rPr sz="2550" b="1">
+                <a:solidFill>
+                  <a:srgbClr val="28685E"/>
+                </a:solidFill>
+                <a:latin typeface="Arial"/>
+                <a:ea typeface="Arial"/>
+                <a:cs typeface="Arial"/>
               </a:rPr>
               <a:t>Build and check a simple chain.</a:t>
             </a:r>
@@ -4664,7 +5236,7 @@
     <p:bg>
       <p:bgPr>
         <a:solidFill xmlns:a="http://schemas.openxmlformats.org/drawingml/2006/main">
-          <a:srgbClr val="F5F1E8"/>
+          <a:srgbClr val="FBF9F3"/>
         </a:solidFill>
       </p:bgPr>
     </p:bg>
@@ -4693,8 +5265,8 @@
         </p:nvSpPr>
         <p:spPr>
           <a:xfrm xmlns:a="http://schemas.openxmlformats.org/drawingml/2006/main">
-            <a:off x="609600" y="552450"/>
-            <a:ext cx="781050" cy="57150"/>
+            <a:off x="609600" y="742950"/>
+            <a:ext cx="9906000" cy="38100"/>
           </a:xfrm>
           <a:prstGeom xmlns:a="http://schemas.openxmlformats.org/drawingml/2006/main" prst="rect">
             <a:avLst/>
@@ -4724,8 +5296,8 @@
         </p:nvSpPr>
         <p:spPr>
           <a:xfrm xmlns:a="http://schemas.openxmlformats.org/drawingml/2006/main">
-            <a:off x="609600" y="762000"/>
-            <a:ext cx="9334500" cy="285750"/>
+            <a:off x="609600" y="342900"/>
+            <a:ext cx="9334500" cy="266700"/>
           </a:xfrm>
           <a:prstGeom xmlns:a="http://schemas.openxmlformats.org/drawingml/2006/main" prst="rect">
             <a:avLst/>
@@ -4737,21 +5309,30 @@
           </a:ln>
         </p:spPr>
         <p:txBody>
-          <a:bodyPr xmlns:a="http://schemas.openxmlformats.org/drawingml/2006/main" lIns="0" tIns="0" rIns="0" bIns="0" anchor="ctr"/>
+          <a:bodyPr xmlns:a="http://schemas.openxmlformats.org/drawingml/2006/main" wrap="square" lIns="0" tIns="0" rIns="0" bIns="0" anchor="ctr">
+            <a:noAutofit/>
+          </a:bodyPr>
           <a:lstStyle xmlns:a="http://schemas.openxmlformats.org/drawingml/2006/main"/>
           <a:p xmlns:a="http://schemas.openxmlformats.org/drawingml/2006/main">
             <a:pPr>
-              <a:defRPr sz="1500" b="1">
+              <a:buNone/>
+              <a:defRPr sz="1425" b="1">
                 <a:solidFill>
                   <a:srgbClr val="28685E"/>
                 </a:solidFill>
+                <a:latin typeface="Arial"/>
+                <a:ea typeface="Arial"/>
+                <a:cs typeface="Arial"/>
               </a:defRPr>
             </a:pPr>
             <a:r>
-              <a:rPr sz="1500" b="1">
+              <a:rPr sz="1425" b="1">
                 <a:solidFill>
                   <a:srgbClr val="28685E"/>
                 </a:solidFill>
+                <a:latin typeface="Arial"/>
+                <a:ea typeface="Arial"/>
+                <a:cs typeface="Arial"/>
               </a:rPr>
               <a:t>MADE BY MATT  /  BUILD SCIENCE</a:t>
             </a:r>
@@ -4760,14 +5341,14 @@
       </p:sp>
       <p:pic>
         <p:nvPicPr>
-          <p:cNvPr id="24" name=""/>
+          <p:cNvPr id="29" name=""/>
           <p:cNvPicPr>
             <a:picLocks xmlns:a="http://schemas.openxmlformats.org/drawingml/2006/main" noChangeAspect="1"/>
           </p:cNvPicPr>
           <p:nvPr/>
         </p:nvPicPr>
         <p:blipFill>
-          <a:blip xmlns:r="http://schemas.openxmlformats.org/officeDocument/2006/relationships" xmlns:a="http://schemas.openxmlformats.org/drawingml/2006/main" r:embed="R88e704dc79f34b90"/>
+          <a:blip xmlns:r="http://schemas.openxmlformats.org/officeDocument/2006/relationships" xmlns:a="http://schemas.openxmlformats.org/drawingml/2006/main" r:embed="R7f828917a6d544af"/>
           <a:stretch xmlns:a="http://schemas.openxmlformats.org/drawingml/2006/main"/>
         </p:blipFill>
         <p:spPr>
@@ -4796,8 +5377,8 @@
         </p:nvSpPr>
         <p:spPr>
           <a:xfrm xmlns:a="http://schemas.openxmlformats.org/drawingml/2006/main">
-            <a:off x="609600" y="1352550"/>
-            <a:ext cx="10972800" cy="952500"/>
+            <a:off x="609600" y="1047750"/>
+            <a:ext cx="10972800" cy="895350"/>
           </a:xfrm>
           <a:prstGeom xmlns:a="http://schemas.openxmlformats.org/drawingml/2006/main" prst="rect">
             <a:avLst/>
@@ -4809,21 +5390,30 @@
           </a:ln>
         </p:spPr>
         <p:txBody>
-          <a:bodyPr xmlns:a="http://schemas.openxmlformats.org/drawingml/2006/main" lIns="0" tIns="0" rIns="0" bIns="0" anchor="ctr"/>
+          <a:bodyPr xmlns:a="http://schemas.openxmlformats.org/drawingml/2006/main" wrap="square" lIns="0" tIns="0" rIns="0" bIns="0" anchor="ctr">
+            <a:noAutofit/>
+          </a:bodyPr>
           <a:lstStyle xmlns:a="http://schemas.openxmlformats.org/drawingml/2006/main"/>
           <a:p xmlns:a="http://schemas.openxmlformats.org/drawingml/2006/main">
             <a:pPr>
-              <a:defRPr sz="3750" b="1">
+              <a:buNone/>
+              <a:defRPr sz="3600" b="1">
                 <a:solidFill>
                   <a:srgbClr val="152B3A"/>
                 </a:solidFill>
+                <a:latin typeface="Arial"/>
+                <a:ea typeface="Arial"/>
+                <a:cs typeface="Arial"/>
               </a:defRPr>
             </a:pPr>
             <a:r>
-              <a:rPr sz="3750" b="1">
+              <a:rPr sz="3600" b="1">
                 <a:solidFill>
                   <a:srgbClr val="152B3A"/>
                 </a:solidFill>
+                <a:latin typeface="Arial"/>
+                <a:ea typeface="Arial"/>
+                <a:cs typeface="Arial"/>
               </a:rPr>
               <a:t>Read the chain from food to eater</a:t>
             </a:r>
@@ -4890,21 +5480,30 @@
           </a:ln>
         </p:spPr>
         <p:txBody>
-          <a:bodyPr xmlns:a="http://schemas.openxmlformats.org/drawingml/2006/main" lIns="0" tIns="0" rIns="0" bIns="0" anchor="ctr"/>
+          <a:bodyPr xmlns:a="http://schemas.openxmlformats.org/drawingml/2006/main" wrap="square" lIns="0" tIns="0" rIns="0" bIns="0" anchor="ctr">
+            <a:noAutofit/>
+          </a:bodyPr>
           <a:lstStyle xmlns:a="http://schemas.openxmlformats.org/drawingml/2006/main"/>
           <a:p xmlns:a="http://schemas.openxmlformats.org/drawingml/2006/main">
             <a:pPr>
-              <a:defRPr sz="1275" b="0">
+              <a:buNone/>
+              <a:defRPr sz="1200" b="0">
                 <a:solidFill>
                   <a:srgbClr val="50616B"/>
                 </a:solidFill>
+                <a:latin typeface="Arial"/>
+                <a:ea typeface="Arial"/>
+                <a:cs typeface="Arial"/>
               </a:defRPr>
             </a:pPr>
             <a:r>
-              <a:rPr sz="1275" b="0">
+              <a:rPr sz="1200" b="0">
                 <a:solidFill>
                   <a:srgbClr val="50616B"/>
                 </a:solidFill>
+                <a:latin typeface="Arial"/>
+                <a:ea typeface="Arial"/>
+                <a:cs typeface="Arial"/>
               </a:rPr>
               <a:t>AUTUMN 1  ·  WEEK 7  ·  LESSON A</a:t>
             </a:r>
@@ -4940,14 +5539,20 @@
           </a:ln>
         </p:spPr>
         <p:txBody>
-          <a:bodyPr xmlns:a="http://schemas.openxmlformats.org/drawingml/2006/main" lIns="0" tIns="0" rIns="0" bIns="0" anchor="ctr"/>
+          <a:bodyPr xmlns:a="http://schemas.openxmlformats.org/drawingml/2006/main" wrap="square" lIns="0" tIns="0" rIns="0" bIns="0" anchor="ctr">
+            <a:noAutofit/>
+          </a:bodyPr>
           <a:lstStyle xmlns:a="http://schemas.openxmlformats.org/drawingml/2006/main"/>
           <a:p xmlns:a="http://schemas.openxmlformats.org/drawingml/2006/main">
             <a:pPr>
+              <a:buNone/>
               <a:defRPr sz="1350" b="1">
                 <a:solidFill>
                   <a:srgbClr val="28685E"/>
                 </a:solidFill>
+                <a:latin typeface="Arial"/>
+                <a:ea typeface="Arial"/>
+                <a:cs typeface="Arial"/>
               </a:defRPr>
             </a:pPr>
             <a:r>
@@ -4955,6 +5560,9 @@
                 <a:solidFill>
                   <a:srgbClr val="28685E"/>
                 </a:solidFill>
+                <a:latin typeface="Arial"/>
+                <a:ea typeface="Arial"/>
+                <a:cs typeface="Arial"/>
               </a:rPr>
               <a:t>04</a:t>
             </a:r>
@@ -4977,14 +5585,14 @@
         </p:nvSpPr>
         <p:spPr>
           <a:xfrm xmlns:a="http://schemas.openxmlformats.org/drawingml/2006/main">
-            <a:off x="2114550" y="3486150"/>
-            <a:ext cx="428625" cy="247650"/>
+            <a:off x="2114550" y="4000500"/>
+            <a:ext cx="438150" cy="209550"/>
           </a:xfrm>
           <a:prstGeom xmlns:a="http://schemas.openxmlformats.org/drawingml/2006/main" prst="rightArrow">
             <a:avLst/>
           </a:prstGeom>
           <a:solidFill xmlns:a="http://schemas.openxmlformats.org/drawingml/2006/main">
-            <a:srgbClr val="4E7A9B"/>
+            <a:srgbClr val="28685E"/>
           </a:solidFill>
           <a:ln xmlns:a="http://schemas.openxmlformats.org/drawingml/2006/main" w="19050">
             <a:solidFill>
@@ -5010,14 +5618,14 @@
         </p:nvSpPr>
         <p:spPr>
           <a:xfrm xmlns:a="http://schemas.openxmlformats.org/drawingml/2006/main">
-            <a:off x="3905250" y="3486150"/>
-            <a:ext cx="428625" cy="247650"/>
+            <a:off x="3905250" y="4000500"/>
+            <a:ext cx="438150" cy="209550"/>
           </a:xfrm>
           <a:prstGeom xmlns:a="http://schemas.openxmlformats.org/drawingml/2006/main" prst="rightArrow">
             <a:avLst/>
           </a:prstGeom>
           <a:solidFill xmlns:a="http://schemas.openxmlformats.org/drawingml/2006/main">
-            <a:srgbClr val="4E7A9B"/>
+            <a:srgbClr val="28685E"/>
           </a:solidFill>
           <a:ln xmlns:a="http://schemas.openxmlformats.org/drawingml/2006/main" w="19050">
             <a:solidFill>
@@ -5043,8 +5651,8 @@
         </p:nvSpPr>
         <p:spPr>
           <a:xfrm xmlns:a="http://schemas.openxmlformats.org/drawingml/2006/main">
-            <a:off x="762000" y="3238500"/>
-            <a:ext cx="1314450" cy="800100"/>
+            <a:off x="762000" y="3848100"/>
+            <a:ext cx="1314450" cy="504825"/>
           </a:xfrm>
           <a:prstGeom xmlns:a="http://schemas.openxmlformats.org/drawingml/2006/main" prst="rect">
             <a:avLst/>
@@ -5076,8 +5684,8 @@
         </p:nvSpPr>
         <p:spPr>
           <a:xfrm xmlns:a="http://schemas.openxmlformats.org/drawingml/2006/main">
-            <a:off x="2552700" y="3238500"/>
-            <a:ext cx="1314450" cy="800100"/>
+            <a:off x="2552700" y="3848100"/>
+            <a:ext cx="1314450" cy="504825"/>
           </a:xfrm>
           <a:prstGeom xmlns:a="http://schemas.openxmlformats.org/drawingml/2006/main" prst="rect">
             <a:avLst/>
@@ -5109,8 +5717,8 @@
         </p:nvSpPr>
         <p:spPr>
           <a:xfrm xmlns:a="http://schemas.openxmlformats.org/drawingml/2006/main">
-            <a:off x="4343400" y="3238500"/>
-            <a:ext cx="1314450" cy="800100"/>
+            <a:off x="4343400" y="3848100"/>
+            <a:ext cx="1314450" cy="504825"/>
           </a:xfrm>
           <a:prstGeom xmlns:a="http://schemas.openxmlformats.org/drawingml/2006/main" prst="rect">
             <a:avLst/>
@@ -5142,8 +5750,8 @@
         </p:nvSpPr>
         <p:spPr>
           <a:xfrm xmlns:a="http://schemas.openxmlformats.org/drawingml/2006/main">
-            <a:off x="857250" y="3467100"/>
-            <a:ext cx="1123950" cy="381000"/>
+            <a:off x="819150" y="3905250"/>
+            <a:ext cx="1200150" cy="381000"/>
           </a:xfrm>
           <a:prstGeom xmlns:a="http://schemas.openxmlformats.org/drawingml/2006/main" prst="rect">
             <a:avLst/>
@@ -5155,21 +5763,30 @@
           </a:ln>
         </p:spPr>
         <p:txBody>
-          <a:bodyPr xmlns:a="http://schemas.openxmlformats.org/drawingml/2006/main" lIns="0" tIns="0" rIns="0" bIns="0" anchor="ctr"/>
+          <a:bodyPr xmlns:a="http://schemas.openxmlformats.org/drawingml/2006/main" wrap="square" lIns="0" tIns="0" rIns="0" bIns="0" anchor="ctr">
+            <a:noAutofit/>
+          </a:bodyPr>
           <a:lstStyle xmlns:a="http://schemas.openxmlformats.org/drawingml/2006/main"/>
           <a:p xmlns:a="http://schemas.openxmlformats.org/drawingml/2006/main">
             <a:pPr>
-              <a:defRPr sz="1725" b="1">
+              <a:buNone/>
+              <a:defRPr sz="1875" b="1">
                 <a:solidFill>
                   <a:srgbClr val="152B3A"/>
                 </a:solidFill>
+                <a:latin typeface="Arial"/>
+                <a:ea typeface="Arial"/>
+                <a:cs typeface="Arial"/>
               </a:defRPr>
             </a:pPr>
             <a:r>
-              <a:rPr sz="1725" b="1">
+              <a:rPr sz="1875" b="1">
                 <a:solidFill>
                   <a:srgbClr val="152B3A"/>
                 </a:solidFill>
+                <a:latin typeface="Arial"/>
+                <a:ea typeface="Arial"/>
+                <a:cs typeface="Arial"/>
               </a:rPr>
               <a:t>grass</a:t>
             </a:r>
@@ -5192,8 +5809,8 @@
         </p:nvSpPr>
         <p:spPr>
           <a:xfrm xmlns:a="http://schemas.openxmlformats.org/drawingml/2006/main">
-            <a:off x="2647950" y="3467100"/>
-            <a:ext cx="1123950" cy="381000"/>
+            <a:off x="2609850" y="3905250"/>
+            <a:ext cx="1200150" cy="381000"/>
           </a:xfrm>
           <a:prstGeom xmlns:a="http://schemas.openxmlformats.org/drawingml/2006/main" prst="rect">
             <a:avLst/>
@@ -5205,21 +5822,30 @@
           </a:ln>
         </p:spPr>
         <p:txBody>
-          <a:bodyPr xmlns:a="http://schemas.openxmlformats.org/drawingml/2006/main" lIns="0" tIns="0" rIns="0" bIns="0" anchor="ctr"/>
+          <a:bodyPr xmlns:a="http://schemas.openxmlformats.org/drawingml/2006/main" wrap="square" lIns="0" tIns="0" rIns="0" bIns="0" anchor="ctr">
+            <a:noAutofit/>
+          </a:bodyPr>
           <a:lstStyle xmlns:a="http://schemas.openxmlformats.org/drawingml/2006/main"/>
           <a:p xmlns:a="http://schemas.openxmlformats.org/drawingml/2006/main">
             <a:pPr>
-              <a:defRPr sz="1725" b="1">
+              <a:buNone/>
+              <a:defRPr sz="1875" b="1">
                 <a:solidFill>
                   <a:srgbClr val="152B3A"/>
                 </a:solidFill>
+                <a:latin typeface="Arial"/>
+                <a:ea typeface="Arial"/>
+                <a:cs typeface="Arial"/>
               </a:defRPr>
             </a:pPr>
             <a:r>
-              <a:rPr sz="1725" b="1">
+              <a:rPr sz="1875" b="1">
                 <a:solidFill>
                   <a:srgbClr val="152B3A"/>
                 </a:solidFill>
+                <a:latin typeface="Arial"/>
+                <a:ea typeface="Arial"/>
+                <a:cs typeface="Arial"/>
               </a:rPr>
               <a:t>rabbit</a:t>
             </a:r>
@@ -5242,8 +5868,8 @@
         </p:nvSpPr>
         <p:spPr>
           <a:xfrm xmlns:a="http://schemas.openxmlformats.org/drawingml/2006/main">
-            <a:off x="4438650" y="3467100"/>
-            <a:ext cx="1123950" cy="381000"/>
+            <a:off x="4400550" y="3905250"/>
+            <a:ext cx="1200150" cy="381000"/>
           </a:xfrm>
           <a:prstGeom xmlns:a="http://schemas.openxmlformats.org/drawingml/2006/main" prst="rect">
             <a:avLst/>
@@ -5255,21 +5881,30 @@
           </a:ln>
         </p:spPr>
         <p:txBody>
-          <a:bodyPr xmlns:a="http://schemas.openxmlformats.org/drawingml/2006/main" lIns="0" tIns="0" rIns="0" bIns="0" anchor="ctr"/>
+          <a:bodyPr xmlns:a="http://schemas.openxmlformats.org/drawingml/2006/main" wrap="square" lIns="0" tIns="0" rIns="0" bIns="0" anchor="ctr">
+            <a:noAutofit/>
+          </a:bodyPr>
           <a:lstStyle xmlns:a="http://schemas.openxmlformats.org/drawingml/2006/main"/>
           <a:p xmlns:a="http://schemas.openxmlformats.org/drawingml/2006/main">
             <a:pPr>
-              <a:defRPr sz="1725" b="1">
+              <a:buNone/>
+              <a:defRPr sz="1875" b="1">
                 <a:solidFill>
                   <a:srgbClr val="152B3A"/>
                 </a:solidFill>
+                <a:latin typeface="Arial"/>
+                <a:ea typeface="Arial"/>
+                <a:cs typeface="Arial"/>
               </a:defRPr>
             </a:pPr>
             <a:r>
-              <a:rPr sz="1725" b="1">
+              <a:rPr sz="1875" b="1">
                 <a:solidFill>
                   <a:srgbClr val="152B3A"/>
                 </a:solidFill>
+                <a:latin typeface="Arial"/>
+                <a:ea typeface="Arial"/>
+                <a:cs typeface="Arial"/>
               </a:rPr>
               <a:t>fox</a:t>
             </a:r>
@@ -5292,8 +5927,8 @@
         </p:nvSpPr>
         <p:spPr>
           <a:xfrm xmlns:a="http://schemas.openxmlformats.org/drawingml/2006/main">
-            <a:off x="781050" y="4267200"/>
-            <a:ext cx="1381125" cy="381000"/>
+            <a:off x="762000" y="4514850"/>
+            <a:ext cx="1428750" cy="428625"/>
           </a:xfrm>
           <a:prstGeom xmlns:a="http://schemas.openxmlformats.org/drawingml/2006/main" prst="rect">
             <a:avLst/>
@@ -5305,21 +5940,30 @@
           </a:ln>
         </p:spPr>
         <p:txBody>
-          <a:bodyPr xmlns:a="http://schemas.openxmlformats.org/drawingml/2006/main" lIns="0" tIns="0" rIns="0" bIns="0" anchor="ctr"/>
+          <a:bodyPr xmlns:a="http://schemas.openxmlformats.org/drawingml/2006/main" wrap="square" lIns="0" tIns="0" rIns="0" bIns="0" anchor="ctr">
+            <a:noAutofit/>
+          </a:bodyPr>
           <a:lstStyle xmlns:a="http://schemas.openxmlformats.org/drawingml/2006/main"/>
           <a:p xmlns:a="http://schemas.openxmlformats.org/drawingml/2006/main">
             <a:pPr>
-              <a:defRPr sz="1650" b="1">
-                <a:solidFill>
-                  <a:srgbClr val="152B3A"/>
-                </a:solidFill>
+              <a:buNone/>
+              <a:defRPr sz="1800" b="1">
+                <a:solidFill>
+                  <a:srgbClr val="28685E"/>
+                </a:solidFill>
+                <a:latin typeface="Arial"/>
+                <a:ea typeface="Arial"/>
+                <a:cs typeface="Arial"/>
               </a:defRPr>
             </a:pPr>
             <a:r>
-              <a:rPr sz="1650" b="1">
-                <a:solidFill>
-                  <a:srgbClr val="152B3A"/>
-                </a:solidFill>
+              <a:rPr sz="1800" b="1">
+                <a:solidFill>
+                  <a:srgbClr val="28685E"/>
+                </a:solidFill>
+                <a:latin typeface="Arial"/>
+                <a:ea typeface="Arial"/>
+                <a:cs typeface="Arial"/>
               </a:rPr>
               <a:t>producer</a:t>
             </a:r>
@@ -5342,8 +5986,8 @@
         </p:nvSpPr>
         <p:spPr>
           <a:xfrm xmlns:a="http://schemas.openxmlformats.org/drawingml/2006/main">
-            <a:off x="2552700" y="4267200"/>
-            <a:ext cx="1428750" cy="381000"/>
+            <a:off x="2552700" y="4514850"/>
+            <a:ext cx="1428750" cy="428625"/>
           </a:xfrm>
           <a:prstGeom xmlns:a="http://schemas.openxmlformats.org/drawingml/2006/main" prst="rect">
             <a:avLst/>
@@ -5355,21 +5999,30 @@
           </a:ln>
         </p:spPr>
         <p:txBody>
-          <a:bodyPr xmlns:a="http://schemas.openxmlformats.org/drawingml/2006/main" lIns="0" tIns="0" rIns="0" bIns="0" anchor="ctr"/>
+          <a:bodyPr xmlns:a="http://schemas.openxmlformats.org/drawingml/2006/main" wrap="square" lIns="0" tIns="0" rIns="0" bIns="0" anchor="ctr">
+            <a:noAutofit/>
+          </a:bodyPr>
           <a:lstStyle xmlns:a="http://schemas.openxmlformats.org/drawingml/2006/main"/>
           <a:p xmlns:a="http://schemas.openxmlformats.org/drawingml/2006/main">
             <a:pPr>
-              <a:defRPr sz="1650" b="1">
-                <a:solidFill>
-                  <a:srgbClr val="152B3A"/>
-                </a:solidFill>
+              <a:buNone/>
+              <a:defRPr sz="1800" b="1">
+                <a:solidFill>
+                  <a:srgbClr val="28685E"/>
+                </a:solidFill>
+                <a:latin typeface="Arial"/>
+                <a:ea typeface="Arial"/>
+                <a:cs typeface="Arial"/>
               </a:defRPr>
             </a:pPr>
             <a:r>
-              <a:rPr sz="1650" b="1">
-                <a:solidFill>
-                  <a:srgbClr val="152B3A"/>
-                </a:solidFill>
+              <a:rPr sz="1800" b="1">
+                <a:solidFill>
+                  <a:srgbClr val="28685E"/>
+                </a:solidFill>
+                <a:latin typeface="Arial"/>
+                <a:ea typeface="Arial"/>
+                <a:cs typeface="Arial"/>
               </a:rPr>
               <a:t>consumer</a:t>
             </a:r>
@@ -5392,8 +6045,8 @@
         </p:nvSpPr>
         <p:spPr>
           <a:xfrm xmlns:a="http://schemas.openxmlformats.org/drawingml/2006/main">
-            <a:off x="4343400" y="4267200"/>
-            <a:ext cx="1428750" cy="381000"/>
+            <a:off x="4343400" y="4514850"/>
+            <a:ext cx="1428750" cy="428625"/>
           </a:xfrm>
           <a:prstGeom xmlns:a="http://schemas.openxmlformats.org/drawingml/2006/main" prst="rect">
             <a:avLst/>
@@ -5405,21 +6058,30 @@
           </a:ln>
         </p:spPr>
         <p:txBody>
-          <a:bodyPr xmlns:a="http://schemas.openxmlformats.org/drawingml/2006/main" lIns="0" tIns="0" rIns="0" bIns="0" anchor="ctr"/>
+          <a:bodyPr xmlns:a="http://schemas.openxmlformats.org/drawingml/2006/main" wrap="square" lIns="0" tIns="0" rIns="0" bIns="0" anchor="ctr">
+            <a:noAutofit/>
+          </a:bodyPr>
           <a:lstStyle xmlns:a="http://schemas.openxmlformats.org/drawingml/2006/main"/>
           <a:p xmlns:a="http://schemas.openxmlformats.org/drawingml/2006/main">
             <a:pPr>
-              <a:defRPr sz="1650" b="1">
-                <a:solidFill>
-                  <a:srgbClr val="152B3A"/>
-                </a:solidFill>
+              <a:buNone/>
+              <a:defRPr sz="1800" b="1">
+                <a:solidFill>
+                  <a:srgbClr val="28685E"/>
+                </a:solidFill>
+                <a:latin typeface="Arial"/>
+                <a:ea typeface="Arial"/>
+                <a:cs typeface="Arial"/>
               </a:defRPr>
             </a:pPr>
             <a:r>
-              <a:rPr sz="1650" b="1">
-                <a:solidFill>
-                  <a:srgbClr val="152B3A"/>
-                </a:solidFill>
+              <a:rPr sz="1800" b="1">
+                <a:solidFill>
+                  <a:srgbClr val="28685E"/>
+                </a:solidFill>
+                <a:latin typeface="Arial"/>
+                <a:ea typeface="Arial"/>
+                <a:cs typeface="Arial"/>
               </a:rPr>
               <a:t>consumer</a:t>
             </a:r>
@@ -5442,8 +6104,8 @@
         </p:nvSpPr>
         <p:spPr>
           <a:xfrm xmlns:a="http://schemas.openxmlformats.org/drawingml/2006/main">
-            <a:off x="847725" y="4857750"/>
-            <a:ext cx="4810125" cy="619125"/>
+            <a:off x="781050" y="5143500"/>
+            <a:ext cx="5191125" cy="590550"/>
           </a:xfrm>
           <a:prstGeom xmlns:a="http://schemas.openxmlformats.org/drawingml/2006/main" prst="rect">
             <a:avLst/>
@@ -5455,14 +6117,20 @@
           </a:ln>
         </p:spPr>
         <p:txBody>
-          <a:bodyPr xmlns:a="http://schemas.openxmlformats.org/drawingml/2006/main" lIns="0" tIns="0" rIns="0" bIns="0" anchor="ctr"/>
+          <a:bodyPr xmlns:a="http://schemas.openxmlformats.org/drawingml/2006/main" wrap="square" lIns="0" tIns="0" rIns="0" bIns="0" anchor="ctr">
+            <a:noAutofit/>
+          </a:bodyPr>
           <a:lstStyle xmlns:a="http://schemas.openxmlformats.org/drawingml/2006/main"/>
           <a:p xmlns:a="http://schemas.openxmlformats.org/drawingml/2006/main">
             <a:pPr>
+              <a:buNone/>
               <a:defRPr sz="1800" b="1">
                 <a:solidFill>
                   <a:srgbClr val="152B3A"/>
                 </a:solidFill>
+                <a:latin typeface="Arial"/>
+                <a:ea typeface="Arial"/>
+                <a:cs typeface="Arial"/>
               </a:defRPr>
             </a:pPr>
             <a:r>
@@ -5470,6 +6138,9 @@
                 <a:solidFill>
                   <a:srgbClr val="152B3A"/>
                 </a:solidFill>
+                <a:latin typeface="Arial"/>
+                <a:ea typeface="Arial"/>
+                <a:cs typeface="Arial"/>
               </a:rPr>
               <a:t>food / energy passes to the eater</a:t>
             </a:r>
@@ -5492,8 +6163,8 @@
         </p:nvSpPr>
         <p:spPr>
           <a:xfrm xmlns:a="http://schemas.openxmlformats.org/drawingml/2006/main">
-            <a:off x="6667500" y="2714625"/>
-            <a:ext cx="4857750" cy="1762125"/>
+            <a:off x="6667500" y="2533650"/>
+            <a:ext cx="4762500" cy="1809750"/>
           </a:xfrm>
           <a:prstGeom xmlns:a="http://schemas.openxmlformats.org/drawingml/2006/main" prst="rect">
             <a:avLst/>
@@ -5505,21 +6176,30 @@
           </a:ln>
         </p:spPr>
         <p:txBody>
-          <a:bodyPr xmlns:a="http://schemas.openxmlformats.org/drawingml/2006/main" lIns="0" tIns="0" rIns="0" bIns="0" anchor="ctr"/>
+          <a:bodyPr xmlns:a="http://schemas.openxmlformats.org/drawingml/2006/main" wrap="square" lIns="0" tIns="0" rIns="0" bIns="0" anchor="ctr">
+            <a:noAutofit/>
+          </a:bodyPr>
           <a:lstStyle xmlns:a="http://schemas.openxmlformats.org/drawingml/2006/main"/>
           <a:p xmlns:a="http://schemas.openxmlformats.org/drawingml/2006/main">
             <a:pPr>
-              <a:defRPr sz="2550" b="1">
+              <a:buNone/>
+              <a:defRPr sz="2475" b="1">
                 <a:solidFill>
                   <a:srgbClr val="152B3A"/>
                 </a:solidFill>
+                <a:latin typeface="Arial"/>
+                <a:ea typeface="Arial"/>
+                <a:cs typeface="Arial"/>
               </a:defRPr>
             </a:pPr>
             <a:r>
-              <a:rPr sz="2550" b="1">
+              <a:rPr sz="2475" b="1">
                 <a:solidFill>
                   <a:srgbClr val="152B3A"/>
                 </a:solidFill>
+                <a:latin typeface="Arial"/>
+                <a:ea typeface="Arial"/>
+                <a:cs typeface="Arial"/>
               </a:rPr>
               <a:t>Grass can be eaten by a rabbit. A rabbit can be eaten by a fox.</a:t>
             </a:r>
@@ -5542,8 +6222,8 @@
         </p:nvSpPr>
         <p:spPr>
           <a:xfrm xmlns:a="http://schemas.openxmlformats.org/drawingml/2006/main">
-            <a:off x="6667500" y="4714875"/>
-            <a:ext cx="4857750" cy="1000125"/>
+            <a:off x="6667500" y="4629150"/>
+            <a:ext cx="4762500" cy="1162050"/>
           </a:xfrm>
           <a:prstGeom xmlns:a="http://schemas.openxmlformats.org/drawingml/2006/main" prst="rect">
             <a:avLst/>
@@ -5555,14 +6235,20 @@
           </a:ln>
         </p:spPr>
         <p:txBody>
-          <a:bodyPr xmlns:a="http://schemas.openxmlformats.org/drawingml/2006/main" lIns="0" tIns="0" rIns="0" bIns="0" anchor="ctr"/>
+          <a:bodyPr xmlns:a="http://schemas.openxmlformats.org/drawingml/2006/main" wrap="square" lIns="0" tIns="0" rIns="0" bIns="0" anchor="ctr">
+            <a:noAutofit/>
+          </a:bodyPr>
           <a:lstStyle xmlns:a="http://schemas.openxmlformats.org/drawingml/2006/main"/>
           <a:p xmlns:a="http://schemas.openxmlformats.org/drawingml/2006/main">
             <a:pPr>
+              <a:buNone/>
               <a:defRPr sz="2175" b="0">
                 <a:solidFill>
                   <a:srgbClr val="28685E"/>
                 </a:solidFill>
+                <a:latin typeface="Arial"/>
+                <a:ea typeface="Arial"/>
+                <a:cs typeface="Arial"/>
               </a:defRPr>
             </a:pPr>
             <a:r>
@@ -5570,12 +6256,81 @@
                 <a:solidFill>
                   <a:srgbClr val="28685E"/>
                 </a:solidFill>
+                <a:latin typeface="Arial"/>
+                <a:ea typeface="Arial"/>
+                <a:cs typeface="Arial"/>
               </a:rPr>
               <a:t>The arrows show food and energy passing to the eater.</a:t>
             </a:r>
           </a:p>
         </p:txBody>
       </p:sp>
+      <p:pic>
+        <p:nvPicPr>
+          <p:cNvPr id="48" name=""/>
+          <p:cNvPicPr>
+            <a:picLocks xmlns:a="http://schemas.openxmlformats.org/drawingml/2006/main" noChangeAspect="1"/>
+          </p:cNvPicPr>
+          <p:nvPr/>
+        </p:nvPicPr>
+        <p:blipFill>
+          <a:blip xmlns:r="http://schemas.openxmlformats.org/officeDocument/2006/relationships" xmlns:a="http://schemas.openxmlformats.org/drawingml/2006/main" r:embed="R1a9889fbcfef4bee"/>
+          <a:stretch xmlns:a="http://schemas.openxmlformats.org/drawingml/2006/main"/>
+        </p:blipFill>
+        <p:spPr>
+          <a:xfrm xmlns:a="http://schemas.openxmlformats.org/drawingml/2006/main">
+            <a:off x="813483" y="2190750"/>
+            <a:ext cx="1211485" cy="1533525"/>
+          </a:xfrm>
+          <a:prstGeom xmlns:a="http://schemas.openxmlformats.org/drawingml/2006/main" prst="rect">
+            <a:avLst/>
+          </a:prstGeom>
+        </p:spPr>
+      </p:pic>
+      <p:pic>
+        <p:nvPicPr>
+          <p:cNvPr id="49" name=""/>
+          <p:cNvPicPr>
+            <a:picLocks xmlns:a="http://schemas.openxmlformats.org/drawingml/2006/main" noChangeAspect="1"/>
+          </p:cNvPicPr>
+          <p:nvPr/>
+        </p:nvPicPr>
+        <p:blipFill>
+          <a:blip xmlns:r="http://schemas.openxmlformats.org/officeDocument/2006/relationships" xmlns:a="http://schemas.openxmlformats.org/drawingml/2006/main" r:embed="R59bb65b22e1a4cc9"/>
+          <a:stretch xmlns:a="http://schemas.openxmlformats.org/drawingml/2006/main"/>
+        </p:blipFill>
+        <p:spPr>
+          <a:xfrm xmlns:a="http://schemas.openxmlformats.org/drawingml/2006/main">
+            <a:off x="2552700" y="2216281"/>
+            <a:ext cx="1314450" cy="1482462"/>
+          </a:xfrm>
+          <a:prstGeom xmlns:a="http://schemas.openxmlformats.org/drawingml/2006/main" prst="rect">
+            <a:avLst/>
+          </a:prstGeom>
+        </p:spPr>
+      </p:pic>
+      <p:pic>
+        <p:nvPicPr>
+          <p:cNvPr id="50" name=""/>
+          <p:cNvPicPr>
+            <a:picLocks xmlns:a="http://schemas.openxmlformats.org/drawingml/2006/main" noChangeAspect="1"/>
+          </p:cNvPicPr>
+          <p:nvPr/>
+        </p:nvPicPr>
+        <p:blipFill>
+          <a:blip xmlns:r="http://schemas.openxmlformats.org/officeDocument/2006/relationships" xmlns:a="http://schemas.openxmlformats.org/drawingml/2006/main" r:embed="R8d5d47757bbc4163"/>
+          <a:stretch xmlns:a="http://schemas.openxmlformats.org/drawingml/2006/main"/>
+        </p:blipFill>
+        <p:spPr>
+          <a:xfrm xmlns:a="http://schemas.openxmlformats.org/drawingml/2006/main">
+            <a:off x="4343400" y="2581251"/>
+            <a:ext cx="1314450" cy="752523"/>
+          </a:xfrm>
+          <a:prstGeom xmlns:a="http://schemas.openxmlformats.org/drawingml/2006/main" prst="rect">
+            <a:avLst/>
+          </a:prstGeom>
+        </p:spPr>
+      </p:pic>
     </p:spTree>
     <p:extLst>
       <p:ext uri="{BB962C8B-B14F-4D97-AF65-F5344CB8AC3E}">
@@ -5592,7 +6347,7 @@
     <p:bg>
       <p:bgPr>
         <a:solidFill xmlns:a="http://schemas.openxmlformats.org/drawingml/2006/main">
-          <a:srgbClr val="F5F1E8"/>
+          <a:srgbClr val="FBF9F3"/>
         </a:solidFill>
       </p:bgPr>
     </p:bg>
@@ -5621,8 +6376,8 @@
         </p:nvSpPr>
         <p:spPr>
           <a:xfrm xmlns:a="http://schemas.openxmlformats.org/drawingml/2006/main">
-            <a:off x="609600" y="552450"/>
-            <a:ext cx="781050" cy="57150"/>
+            <a:off x="609600" y="742950"/>
+            <a:ext cx="9906000" cy="38100"/>
           </a:xfrm>
           <a:prstGeom xmlns:a="http://schemas.openxmlformats.org/drawingml/2006/main" prst="rect">
             <a:avLst/>
@@ -5652,8 +6407,8 @@
         </p:nvSpPr>
         <p:spPr>
           <a:xfrm xmlns:a="http://schemas.openxmlformats.org/drawingml/2006/main">
-            <a:off x="609600" y="762000"/>
-            <a:ext cx="9334500" cy="285750"/>
+            <a:off x="609600" y="342900"/>
+            <a:ext cx="9334500" cy="266700"/>
           </a:xfrm>
           <a:prstGeom xmlns:a="http://schemas.openxmlformats.org/drawingml/2006/main" prst="rect">
             <a:avLst/>
@@ -5665,21 +6420,30 @@
           </a:ln>
         </p:spPr>
         <p:txBody>
-          <a:bodyPr xmlns:a="http://schemas.openxmlformats.org/drawingml/2006/main" lIns="0" tIns="0" rIns="0" bIns="0" anchor="ctr"/>
+          <a:bodyPr xmlns:a="http://schemas.openxmlformats.org/drawingml/2006/main" wrap="square" lIns="0" tIns="0" rIns="0" bIns="0" anchor="ctr">
+            <a:noAutofit/>
+          </a:bodyPr>
           <a:lstStyle xmlns:a="http://schemas.openxmlformats.org/drawingml/2006/main"/>
           <a:p xmlns:a="http://schemas.openxmlformats.org/drawingml/2006/main">
             <a:pPr>
-              <a:defRPr sz="1500" b="1">
+              <a:buNone/>
+              <a:defRPr sz="1425" b="1">
                 <a:solidFill>
                   <a:srgbClr val="28685E"/>
                 </a:solidFill>
+                <a:latin typeface="Arial"/>
+                <a:ea typeface="Arial"/>
+                <a:cs typeface="Arial"/>
               </a:defRPr>
             </a:pPr>
             <a:r>
-              <a:rPr sz="1500" b="1">
+              <a:rPr sz="1425" b="1">
                 <a:solidFill>
                   <a:srgbClr val="28685E"/>
                 </a:solidFill>
+                <a:latin typeface="Arial"/>
+                <a:ea typeface="Arial"/>
+                <a:cs typeface="Arial"/>
               </a:rPr>
               <a:t>MADE BY MATT  /  BUILD SCIENCE</a:t>
             </a:r>
@@ -5688,14 +6452,14 @@
       </p:sp>
       <p:pic>
         <p:nvPicPr>
-          <p:cNvPr id="14" name=""/>
+          <p:cNvPr id="18" name=""/>
           <p:cNvPicPr>
             <a:picLocks xmlns:a="http://schemas.openxmlformats.org/drawingml/2006/main" noChangeAspect="1"/>
           </p:cNvPicPr>
           <p:nvPr/>
         </p:nvPicPr>
         <p:blipFill>
-          <a:blip xmlns:r="http://schemas.openxmlformats.org/officeDocument/2006/relationships" xmlns:a="http://schemas.openxmlformats.org/drawingml/2006/main" r:embed="R90d68d84db47464f"/>
+          <a:blip xmlns:r="http://schemas.openxmlformats.org/officeDocument/2006/relationships" xmlns:a="http://schemas.openxmlformats.org/drawingml/2006/main" r:embed="Re0b162759dec4c44"/>
           <a:stretch xmlns:a="http://schemas.openxmlformats.org/drawingml/2006/main"/>
         </p:blipFill>
         <p:spPr>
@@ -5724,8 +6488,8 @@
         </p:nvSpPr>
         <p:spPr>
           <a:xfrm xmlns:a="http://schemas.openxmlformats.org/drawingml/2006/main">
-            <a:off x="609600" y="1352550"/>
-            <a:ext cx="10972800" cy="952500"/>
+            <a:off x="609600" y="1047750"/>
+            <a:ext cx="10972800" cy="895350"/>
           </a:xfrm>
           <a:prstGeom xmlns:a="http://schemas.openxmlformats.org/drawingml/2006/main" prst="rect">
             <a:avLst/>
@@ -5737,21 +6501,30 @@
           </a:ln>
         </p:spPr>
         <p:txBody>
-          <a:bodyPr xmlns:a="http://schemas.openxmlformats.org/drawingml/2006/main" lIns="0" tIns="0" rIns="0" bIns="0" anchor="ctr"/>
+          <a:bodyPr xmlns:a="http://schemas.openxmlformats.org/drawingml/2006/main" wrap="square" lIns="0" tIns="0" rIns="0" bIns="0" anchor="ctr">
+            <a:noAutofit/>
+          </a:bodyPr>
           <a:lstStyle xmlns:a="http://schemas.openxmlformats.org/drawingml/2006/main"/>
           <a:p xmlns:a="http://schemas.openxmlformats.org/drawingml/2006/main">
             <a:pPr>
-              <a:defRPr sz="3750" b="1">
+              <a:buNone/>
+              <a:defRPr sz="3600" b="1">
                 <a:solidFill>
                   <a:srgbClr val="152B3A"/>
                 </a:solidFill>
+                <a:latin typeface="Arial"/>
+                <a:ea typeface="Arial"/>
+                <a:cs typeface="Arial"/>
               </a:defRPr>
             </a:pPr>
             <a:r>
-              <a:rPr sz="3750" b="1">
+              <a:rPr sz="3600" b="1">
                 <a:solidFill>
                   <a:srgbClr val="152B3A"/>
                 </a:solidFill>
+                <a:latin typeface="Arial"/>
+                <a:ea typeface="Arial"/>
+                <a:cs typeface="Arial"/>
               </a:rPr>
               <a:t>A reversed arrow changes meaning</a:t>
             </a:r>
@@ -5818,21 +6591,30 @@
           </a:ln>
         </p:spPr>
         <p:txBody>
-          <a:bodyPr xmlns:a="http://schemas.openxmlformats.org/drawingml/2006/main" lIns="0" tIns="0" rIns="0" bIns="0" anchor="ctr"/>
+          <a:bodyPr xmlns:a="http://schemas.openxmlformats.org/drawingml/2006/main" wrap="square" lIns="0" tIns="0" rIns="0" bIns="0" anchor="ctr">
+            <a:noAutofit/>
+          </a:bodyPr>
           <a:lstStyle xmlns:a="http://schemas.openxmlformats.org/drawingml/2006/main"/>
           <a:p xmlns:a="http://schemas.openxmlformats.org/drawingml/2006/main">
             <a:pPr>
-              <a:defRPr sz="1275" b="0">
+              <a:buNone/>
+              <a:defRPr sz="1200" b="0">
                 <a:solidFill>
                   <a:srgbClr val="50616B"/>
                 </a:solidFill>
+                <a:latin typeface="Arial"/>
+                <a:ea typeface="Arial"/>
+                <a:cs typeface="Arial"/>
               </a:defRPr>
             </a:pPr>
             <a:r>
-              <a:rPr sz="1275" b="0">
+              <a:rPr sz="1200" b="0">
                 <a:solidFill>
                   <a:srgbClr val="50616B"/>
                 </a:solidFill>
+                <a:latin typeface="Arial"/>
+                <a:ea typeface="Arial"/>
+                <a:cs typeface="Arial"/>
               </a:rPr>
               <a:t>AUTUMN 1  ·  WEEK 7  ·  LESSON A</a:t>
             </a:r>
@@ -5868,14 +6650,20 @@
           </a:ln>
         </p:spPr>
         <p:txBody>
-          <a:bodyPr xmlns:a="http://schemas.openxmlformats.org/drawingml/2006/main" lIns="0" tIns="0" rIns="0" bIns="0" anchor="ctr"/>
+          <a:bodyPr xmlns:a="http://schemas.openxmlformats.org/drawingml/2006/main" wrap="square" lIns="0" tIns="0" rIns="0" bIns="0" anchor="ctr">
+            <a:noAutofit/>
+          </a:bodyPr>
           <a:lstStyle xmlns:a="http://schemas.openxmlformats.org/drawingml/2006/main"/>
           <a:p xmlns:a="http://schemas.openxmlformats.org/drawingml/2006/main">
             <a:pPr>
+              <a:buNone/>
               <a:defRPr sz="1350" b="1">
                 <a:solidFill>
                   <a:srgbClr val="28685E"/>
                 </a:solidFill>
+                <a:latin typeface="Arial"/>
+                <a:ea typeface="Arial"/>
+                <a:cs typeface="Arial"/>
               </a:defRPr>
             </a:pPr>
             <a:r>
@@ -5883,6 +6671,9 @@
                 <a:solidFill>
                   <a:srgbClr val="28685E"/>
                 </a:solidFill>
+                <a:latin typeface="Arial"/>
+                <a:ea typeface="Arial"/>
+                <a:cs typeface="Arial"/>
               </a:rPr>
               <a:t>05</a:t>
             </a:r>
@@ -5905,8 +6696,8 @@
         </p:nvSpPr>
         <p:spPr>
           <a:xfrm xmlns:a="http://schemas.openxmlformats.org/drawingml/2006/main">
-            <a:off x="609600" y="2619375"/>
-            <a:ext cx="4953000" cy="428625"/>
+            <a:off x="609600" y="2257425"/>
+            <a:ext cx="5143500" cy="533400"/>
           </a:xfrm>
           <a:prstGeom xmlns:a="http://schemas.openxmlformats.org/drawingml/2006/main" prst="rect">
             <a:avLst/>
@@ -5918,21 +6709,30 @@
           </a:ln>
         </p:spPr>
         <p:txBody>
-          <a:bodyPr xmlns:a="http://schemas.openxmlformats.org/drawingml/2006/main" lIns="0" tIns="0" rIns="0" bIns="0" anchor="ctr"/>
+          <a:bodyPr xmlns:a="http://schemas.openxmlformats.org/drawingml/2006/main" wrap="square" lIns="0" tIns="0" rIns="0" bIns="0" anchor="ctr">
+            <a:noAutofit/>
+          </a:bodyPr>
           <a:lstStyle xmlns:a="http://schemas.openxmlformats.org/drawingml/2006/main"/>
           <a:p xmlns:a="http://schemas.openxmlformats.org/drawingml/2006/main">
             <a:pPr>
-              <a:defRPr sz="2025" b="1">
+              <a:buNone/>
+              <a:defRPr sz="2100" b="1">
                 <a:solidFill>
                   <a:srgbClr val="28685E"/>
                 </a:solidFill>
+                <a:latin typeface="Arial"/>
+                <a:ea typeface="Arial"/>
+                <a:cs typeface="Arial"/>
               </a:defRPr>
             </a:pPr>
             <a:r>
-              <a:rPr sz="2025" b="1">
+              <a:rPr sz="2100" b="1">
                 <a:solidFill>
                   <a:srgbClr val="28685E"/>
                 </a:solidFill>
+                <a:latin typeface="Arial"/>
+                <a:ea typeface="Arial"/>
+                <a:cs typeface="Arial"/>
               </a:rPr>
               <a:t>WRONG FOR THESE CLUES</a:t>
             </a:r>
@@ -5955,8 +6755,8 @@
         </p:nvSpPr>
         <p:spPr>
           <a:xfrm xmlns:a="http://schemas.openxmlformats.org/drawingml/2006/main">
-            <a:off x="6572250" y="2619375"/>
-            <a:ext cx="4953000" cy="428625"/>
+            <a:off x="6572250" y="2257425"/>
+            <a:ext cx="5010150" cy="533400"/>
           </a:xfrm>
           <a:prstGeom xmlns:a="http://schemas.openxmlformats.org/drawingml/2006/main" prst="rect">
             <a:avLst/>
@@ -5968,21 +6768,30 @@
           </a:ln>
         </p:spPr>
         <p:txBody>
-          <a:bodyPr xmlns:a="http://schemas.openxmlformats.org/drawingml/2006/main" lIns="0" tIns="0" rIns="0" bIns="0" anchor="ctr"/>
+          <a:bodyPr xmlns:a="http://schemas.openxmlformats.org/drawingml/2006/main" wrap="square" lIns="0" tIns="0" rIns="0" bIns="0" anchor="ctr">
+            <a:noAutofit/>
+          </a:bodyPr>
           <a:lstStyle xmlns:a="http://schemas.openxmlformats.org/drawingml/2006/main"/>
           <a:p xmlns:a="http://schemas.openxmlformats.org/drawingml/2006/main">
             <a:pPr>
-              <a:defRPr sz="2025" b="1">
+              <a:buNone/>
+              <a:defRPr sz="2100" b="1">
                 <a:solidFill>
                   <a:srgbClr val="A65D25"/>
                 </a:solidFill>
+                <a:latin typeface="Arial"/>
+                <a:ea typeface="Arial"/>
+                <a:cs typeface="Arial"/>
               </a:defRPr>
             </a:pPr>
             <a:r>
-              <a:rPr sz="2025" b="1">
+              <a:rPr sz="2100" b="1">
                 <a:solidFill>
                   <a:srgbClr val="A65D25"/>
                 </a:solidFill>
+                <a:latin typeface="Arial"/>
+                <a:ea typeface="Arial"/>
+                <a:cs typeface="Arial"/>
               </a:rPr>
               <a:t>CHECK THE EVIDENCE</a:t>
             </a:r>
@@ -6005,8 +6814,8 @@
         </p:nvSpPr>
         <p:spPr>
           <a:xfrm xmlns:a="http://schemas.openxmlformats.org/drawingml/2006/main">
-            <a:off x="609600" y="3333750"/>
-            <a:ext cx="4953000" cy="2524125"/>
+            <a:off x="609600" y="3238500"/>
+            <a:ext cx="5143500" cy="2286000"/>
           </a:xfrm>
           <a:prstGeom xmlns:a="http://schemas.openxmlformats.org/drawingml/2006/main" prst="rect">
             <a:avLst/>
@@ -6018,14 +6827,20 @@
           </a:ln>
         </p:spPr>
         <p:txBody>
-          <a:bodyPr xmlns:a="http://schemas.openxmlformats.org/drawingml/2006/main" lIns="0" tIns="0" rIns="0" bIns="0" anchor="ctr"/>
+          <a:bodyPr xmlns:a="http://schemas.openxmlformats.org/drawingml/2006/main" wrap="square" lIns="0" tIns="0" rIns="0" bIns="0" anchor="ctr">
+            <a:noAutofit/>
+          </a:bodyPr>
           <a:lstStyle xmlns:a="http://schemas.openxmlformats.org/drawingml/2006/main"/>
           <a:p xmlns:a="http://schemas.openxmlformats.org/drawingml/2006/main">
             <a:pPr>
+              <a:buNone/>
               <a:defRPr sz="2400" b="0">
                 <a:solidFill>
                   <a:srgbClr val="152B3A"/>
                 </a:solidFill>
+                <a:latin typeface="Arial"/>
+                <a:ea typeface="Arial"/>
+                <a:cs typeface="Arial"/>
               </a:defRPr>
             </a:pPr>
             <a:r>
@@ -6033,16 +6848,23 @@
                 <a:solidFill>
                   <a:srgbClr val="152B3A"/>
                 </a:solidFill>
+                <a:latin typeface="Arial"/>
+                <a:ea typeface="Arial"/>
+                <a:cs typeface="Arial"/>
               </a:rPr>
               <a:t>Rabbit → grass</a:t>
             </a:r>
           </a:p>
           <a:p xmlns:a="http://schemas.openxmlformats.org/drawingml/2006/main">
             <a:pPr>
+              <a:buNone/>
               <a:defRPr sz="2400" b="0">
                 <a:solidFill>
                   <a:srgbClr val="152B3A"/>
                 </a:solidFill>
+                <a:latin typeface="Arial"/>
+                <a:ea typeface="Arial"/>
+                <a:cs typeface="Arial"/>
               </a:defRPr>
             </a:pPr>
             <a:r>
@@ -6050,6 +6872,9 @@
                 <a:solidFill>
                   <a:srgbClr val="152B3A"/>
                 </a:solidFill>
+                <a:latin typeface="Arial"/>
+                <a:ea typeface="Arial"/>
+                <a:cs typeface="Arial"/>
               </a:rPr>
               <a:t>This would pass food to grass.</a:t>
             </a:r>
@@ -6072,8 +6897,8 @@
         </p:nvSpPr>
         <p:spPr>
           <a:xfrm xmlns:a="http://schemas.openxmlformats.org/drawingml/2006/main">
-            <a:off x="6572250" y="3333750"/>
-            <a:ext cx="4857750" cy="2524125"/>
+            <a:off x="6572250" y="3238500"/>
+            <a:ext cx="5010150" cy="2286000"/>
           </a:xfrm>
           <a:prstGeom xmlns:a="http://schemas.openxmlformats.org/drawingml/2006/main" prst="rect">
             <a:avLst/>
@@ -6085,14 +6910,20 @@
           </a:ln>
         </p:spPr>
         <p:txBody>
-          <a:bodyPr xmlns:a="http://schemas.openxmlformats.org/drawingml/2006/main" lIns="0" tIns="0" rIns="0" bIns="0" anchor="ctr"/>
+          <a:bodyPr xmlns:a="http://schemas.openxmlformats.org/drawingml/2006/main" wrap="square" lIns="0" tIns="0" rIns="0" bIns="0" anchor="ctr">
+            <a:noAutofit/>
+          </a:bodyPr>
           <a:lstStyle xmlns:a="http://schemas.openxmlformats.org/drawingml/2006/main"/>
           <a:p xmlns:a="http://schemas.openxmlformats.org/drawingml/2006/main">
             <a:pPr>
+              <a:buNone/>
               <a:defRPr sz="2400" b="0">
                 <a:solidFill>
                   <a:srgbClr val="152B3A"/>
                 </a:solidFill>
+                <a:latin typeface="Arial"/>
+                <a:ea typeface="Arial"/>
+                <a:cs typeface="Arial"/>
               </a:defRPr>
             </a:pPr>
             <a:r>
@@ -6100,16 +6931,23 @@
                 <a:solidFill>
                   <a:srgbClr val="152B3A"/>
                 </a:solidFill>
+                <a:latin typeface="Arial"/>
+                <a:ea typeface="Arial"/>
+                <a:cs typeface="Arial"/>
               </a:rPr>
               <a:t>Grass → rabbit</a:t>
             </a:r>
           </a:p>
           <a:p xmlns:a="http://schemas.openxmlformats.org/drawingml/2006/main">
             <a:pPr>
+              <a:buNone/>
               <a:defRPr sz="2400" b="0">
                 <a:solidFill>
                   <a:srgbClr val="152B3A"/>
                 </a:solidFill>
+                <a:latin typeface="Arial"/>
+                <a:ea typeface="Arial"/>
+                <a:cs typeface="Arial"/>
               </a:defRPr>
             </a:pPr>
             <a:r>
@@ -6117,11 +6955,76 @@
                 <a:solidFill>
                   <a:srgbClr val="152B3A"/>
                 </a:solidFill>
+                <a:latin typeface="Arial"/>
+                <a:ea typeface="Arial"/>
+                <a:cs typeface="Arial"/>
               </a:rPr>
               <a:t>The rabbit eats the grass.</a:t>
             </a:r>
           </a:p>
         </p:txBody>
+      </p:sp>
+      <p:sp>
+        <p:nvSpPr>
+          <p:cNvPr id="14" name="">
+            <a:extLst xmlns:a="http://schemas.openxmlformats.org/drawingml/2006/main">
+              <a:ext uri="{FF2B5EF4-FFF2-40B4-BE49-F238E27FC236}">
+                <a16:creationId xmlns:a16="http://schemas.microsoft.com/office/drawing/2014/main" id="{5B9B0A1E-CD86-45DE-9459-D6C8B602C030}"/>
+              </a:ext>
+            </a:extLst>
+          </p:cNvPr>
+          <p:cNvSpPr>
+            <a:spLocks xmlns:a="http://schemas.openxmlformats.org/drawingml/2006/main" noGrp="1"/>
+          </p:cNvSpPr>
+          <p:nvPr/>
+        </p:nvSpPr>
+        <p:spPr>
+          <a:xfrm xmlns:a="http://schemas.openxmlformats.org/drawingml/2006/main">
+            <a:off x="609600" y="2886075"/>
+            <a:ext cx="5048250" cy="0"/>
+          </a:xfrm>
+          <a:prstGeom xmlns:a="http://schemas.openxmlformats.org/drawingml/2006/main" prst="line">
+            <a:avLst/>
+          </a:prstGeom>
+          <a:noFill xmlns:a="http://schemas.openxmlformats.org/drawingml/2006/main"/>
+          <a:ln xmlns:a="http://schemas.openxmlformats.org/drawingml/2006/main" w="28575">
+            <a:solidFill>
+              <a:srgbClr val="DCE7DD"/>
+            </a:solidFill>
+            <a:prstDash val="solid"/>
+          </a:ln>
+        </p:spPr>
+      </p:sp>
+      <p:sp>
+        <p:nvSpPr>
+          <p:cNvPr id="15" name="">
+            <a:extLst xmlns:a="http://schemas.openxmlformats.org/drawingml/2006/main">
+              <a:ext uri="{FF2B5EF4-FFF2-40B4-BE49-F238E27FC236}">
+                <a16:creationId xmlns:a16="http://schemas.microsoft.com/office/drawing/2014/main" id="{4FC085B4-0E57-419A-95E8-A07D70F5A326}"/>
+              </a:ext>
+            </a:extLst>
+          </p:cNvPr>
+          <p:cNvSpPr>
+            <a:spLocks xmlns:a="http://schemas.openxmlformats.org/drawingml/2006/main" noGrp="1"/>
+          </p:cNvSpPr>
+          <p:nvPr/>
+        </p:nvSpPr>
+        <p:spPr>
+          <a:xfrm xmlns:a="http://schemas.openxmlformats.org/drawingml/2006/main">
+            <a:off x="6572250" y="2886075"/>
+            <a:ext cx="5010150" cy="0"/>
+          </a:xfrm>
+          <a:prstGeom xmlns:a="http://schemas.openxmlformats.org/drawingml/2006/main" prst="line">
+            <a:avLst/>
+          </a:prstGeom>
+          <a:noFill xmlns:a="http://schemas.openxmlformats.org/drawingml/2006/main"/>
+          <a:ln xmlns:a="http://schemas.openxmlformats.org/drawingml/2006/main" w="28575">
+            <a:solidFill>
+              <a:srgbClr val="DCE7DD"/>
+            </a:solidFill>
+            <a:prstDash val="solid"/>
+          </a:ln>
+        </p:spPr>
       </p:sp>
     </p:spTree>
     <p:extLst>
@@ -6139,7 +7042,7 @@
     <p:bg>
       <p:bgPr>
         <a:solidFill xmlns:a="http://schemas.openxmlformats.org/drawingml/2006/main">
-          <a:srgbClr val="F5F1E8"/>
+          <a:srgbClr val="FBF9F3"/>
         </a:solidFill>
       </p:bgPr>
     </p:bg>
@@ -6168,8 +7071,8 @@
         </p:nvSpPr>
         <p:spPr>
           <a:xfrm xmlns:a="http://schemas.openxmlformats.org/drawingml/2006/main">
-            <a:off x="609600" y="552450"/>
-            <a:ext cx="781050" cy="57150"/>
+            <a:off x="609600" y="742950"/>
+            <a:ext cx="9906000" cy="38100"/>
           </a:xfrm>
           <a:prstGeom xmlns:a="http://schemas.openxmlformats.org/drawingml/2006/main" prst="rect">
             <a:avLst/>
@@ -6199,8 +7102,8 @@
         </p:nvSpPr>
         <p:spPr>
           <a:xfrm xmlns:a="http://schemas.openxmlformats.org/drawingml/2006/main">
-            <a:off x="609600" y="762000"/>
-            <a:ext cx="9334500" cy="285750"/>
+            <a:off x="609600" y="342900"/>
+            <a:ext cx="9334500" cy="266700"/>
           </a:xfrm>
           <a:prstGeom xmlns:a="http://schemas.openxmlformats.org/drawingml/2006/main" prst="rect">
             <a:avLst/>
@@ -6212,21 +7115,30 @@
           </a:ln>
         </p:spPr>
         <p:txBody>
-          <a:bodyPr xmlns:a="http://schemas.openxmlformats.org/drawingml/2006/main" lIns="0" tIns="0" rIns="0" bIns="0" anchor="ctr"/>
+          <a:bodyPr xmlns:a="http://schemas.openxmlformats.org/drawingml/2006/main" wrap="square" lIns="0" tIns="0" rIns="0" bIns="0" anchor="ctr">
+            <a:noAutofit/>
+          </a:bodyPr>
           <a:lstStyle xmlns:a="http://schemas.openxmlformats.org/drawingml/2006/main"/>
           <a:p xmlns:a="http://schemas.openxmlformats.org/drawingml/2006/main">
             <a:pPr>
-              <a:defRPr sz="1500" b="1">
+              <a:buNone/>
+              <a:defRPr sz="1425" b="1">
                 <a:solidFill>
                   <a:srgbClr val="28685E"/>
                 </a:solidFill>
+                <a:latin typeface="Arial"/>
+                <a:ea typeface="Arial"/>
+                <a:cs typeface="Arial"/>
               </a:defRPr>
             </a:pPr>
             <a:r>
-              <a:rPr sz="1500" b="1">
+              <a:rPr sz="1425" b="1">
                 <a:solidFill>
                   <a:srgbClr val="28685E"/>
                 </a:solidFill>
+                <a:latin typeface="Arial"/>
+                <a:ea typeface="Arial"/>
+                <a:cs typeface="Arial"/>
               </a:rPr>
               <a:t>MADE BY MATT  /  BUILD SCIENCE</a:t>
             </a:r>
@@ -6235,14 +7147,14 @@
       </p:sp>
       <p:pic>
         <p:nvPicPr>
-          <p:cNvPr id="14" name=""/>
+          <p:cNvPr id="18" name=""/>
           <p:cNvPicPr>
             <a:picLocks xmlns:a="http://schemas.openxmlformats.org/drawingml/2006/main" noChangeAspect="1"/>
           </p:cNvPicPr>
           <p:nvPr/>
         </p:nvPicPr>
         <p:blipFill>
-          <a:blip xmlns:r="http://schemas.openxmlformats.org/officeDocument/2006/relationships" xmlns:a="http://schemas.openxmlformats.org/drawingml/2006/main" r:embed="Rf3913f8947cd42e8"/>
+          <a:blip xmlns:r="http://schemas.openxmlformats.org/officeDocument/2006/relationships" xmlns:a="http://schemas.openxmlformats.org/drawingml/2006/main" r:embed="R9c3f72518a8f44e6"/>
           <a:stretch xmlns:a="http://schemas.openxmlformats.org/drawingml/2006/main"/>
         </p:blipFill>
         <p:spPr>
@@ -6271,8 +7183,8 @@
         </p:nvSpPr>
         <p:spPr>
           <a:xfrm xmlns:a="http://schemas.openxmlformats.org/drawingml/2006/main">
-            <a:off x="609600" y="1352550"/>
-            <a:ext cx="10972800" cy="952500"/>
+            <a:off x="609600" y="1047750"/>
+            <a:ext cx="10972800" cy="895350"/>
           </a:xfrm>
           <a:prstGeom xmlns:a="http://schemas.openxmlformats.org/drawingml/2006/main" prst="rect">
             <a:avLst/>
@@ -6284,21 +7196,30 @@
           </a:ln>
         </p:spPr>
         <p:txBody>
-          <a:bodyPr xmlns:a="http://schemas.openxmlformats.org/drawingml/2006/main" lIns="0" tIns="0" rIns="0" bIns="0" anchor="ctr"/>
+          <a:bodyPr xmlns:a="http://schemas.openxmlformats.org/drawingml/2006/main" wrap="square" lIns="0" tIns="0" rIns="0" bIns="0" anchor="ctr">
+            <a:noAutofit/>
+          </a:bodyPr>
           <a:lstStyle xmlns:a="http://schemas.openxmlformats.org/drawingml/2006/main"/>
           <a:p xmlns:a="http://schemas.openxmlformats.org/drawingml/2006/main">
             <a:pPr>
-              <a:defRPr sz="3750" b="1">
+              <a:buNone/>
+              <a:defRPr sz="3600" b="1">
                 <a:solidFill>
                   <a:srgbClr val="152B3A"/>
                 </a:solidFill>
+                <a:latin typeface="Arial"/>
+                <a:ea typeface="Arial"/>
+                <a:cs typeface="Arial"/>
               </a:defRPr>
             </a:pPr>
             <a:r>
-              <a:rPr sz="3750" b="1">
+              <a:rPr sz="3600" b="1">
                 <a:solidFill>
                   <a:srgbClr val="152B3A"/>
                 </a:solidFill>
+                <a:latin typeface="Arial"/>
+                <a:ea typeface="Arial"/>
+                <a:cs typeface="Arial"/>
               </a:rPr>
               <a:t>Producer or consumer?</a:t>
             </a:r>
@@ -6365,21 +7286,30 @@
           </a:ln>
         </p:spPr>
         <p:txBody>
-          <a:bodyPr xmlns:a="http://schemas.openxmlformats.org/drawingml/2006/main" lIns="0" tIns="0" rIns="0" bIns="0" anchor="ctr"/>
+          <a:bodyPr xmlns:a="http://schemas.openxmlformats.org/drawingml/2006/main" wrap="square" lIns="0" tIns="0" rIns="0" bIns="0" anchor="ctr">
+            <a:noAutofit/>
+          </a:bodyPr>
           <a:lstStyle xmlns:a="http://schemas.openxmlformats.org/drawingml/2006/main"/>
           <a:p xmlns:a="http://schemas.openxmlformats.org/drawingml/2006/main">
             <a:pPr>
-              <a:defRPr sz="1275" b="0">
+              <a:buNone/>
+              <a:defRPr sz="1200" b="0">
                 <a:solidFill>
                   <a:srgbClr val="50616B"/>
                 </a:solidFill>
+                <a:latin typeface="Arial"/>
+                <a:ea typeface="Arial"/>
+                <a:cs typeface="Arial"/>
               </a:defRPr>
             </a:pPr>
             <a:r>
-              <a:rPr sz="1275" b="0">
+              <a:rPr sz="1200" b="0">
                 <a:solidFill>
                   <a:srgbClr val="50616B"/>
                 </a:solidFill>
+                <a:latin typeface="Arial"/>
+                <a:ea typeface="Arial"/>
+                <a:cs typeface="Arial"/>
               </a:rPr>
               <a:t>AUTUMN 1  ·  WEEK 7  ·  LESSON A</a:t>
             </a:r>
@@ -6415,14 +7345,20 @@
           </a:ln>
         </p:spPr>
         <p:txBody>
-          <a:bodyPr xmlns:a="http://schemas.openxmlformats.org/drawingml/2006/main" lIns="0" tIns="0" rIns="0" bIns="0" anchor="ctr"/>
+          <a:bodyPr xmlns:a="http://schemas.openxmlformats.org/drawingml/2006/main" wrap="square" lIns="0" tIns="0" rIns="0" bIns="0" anchor="ctr">
+            <a:noAutofit/>
+          </a:bodyPr>
           <a:lstStyle xmlns:a="http://schemas.openxmlformats.org/drawingml/2006/main"/>
           <a:p xmlns:a="http://schemas.openxmlformats.org/drawingml/2006/main">
             <a:pPr>
+              <a:buNone/>
               <a:defRPr sz="1350" b="1">
                 <a:solidFill>
                   <a:srgbClr val="28685E"/>
                 </a:solidFill>
+                <a:latin typeface="Arial"/>
+                <a:ea typeface="Arial"/>
+                <a:cs typeface="Arial"/>
               </a:defRPr>
             </a:pPr>
             <a:r>
@@ -6430,6 +7366,9 @@
                 <a:solidFill>
                   <a:srgbClr val="28685E"/>
                 </a:solidFill>
+                <a:latin typeface="Arial"/>
+                <a:ea typeface="Arial"/>
+                <a:cs typeface="Arial"/>
               </a:rPr>
               <a:t>06</a:t>
             </a:r>
@@ -6452,8 +7391,8 @@
         </p:nvSpPr>
         <p:spPr>
           <a:xfrm xmlns:a="http://schemas.openxmlformats.org/drawingml/2006/main">
-            <a:off x="609600" y="2619375"/>
-            <a:ext cx="10972800" cy="714375"/>
+            <a:off x="609600" y="2305050"/>
+            <a:ext cx="7096125" cy="704850"/>
           </a:xfrm>
           <a:prstGeom xmlns:a="http://schemas.openxmlformats.org/drawingml/2006/main" prst="rect">
             <a:avLst/>
@@ -6465,14 +7404,20 @@
           </a:ln>
         </p:spPr>
         <p:txBody>
-          <a:bodyPr xmlns:a="http://schemas.openxmlformats.org/drawingml/2006/main" lIns="0" tIns="0" rIns="0" bIns="0" anchor="ctr"/>
+          <a:bodyPr xmlns:a="http://schemas.openxmlformats.org/drawingml/2006/main" wrap="square" lIns="0" tIns="0" rIns="0" bIns="0" anchor="ctr">
+            <a:noAutofit/>
+          </a:bodyPr>
           <a:lstStyle xmlns:a="http://schemas.openxmlformats.org/drawingml/2006/main"/>
           <a:p xmlns:a="http://schemas.openxmlformats.org/drawingml/2006/main">
             <a:pPr>
+              <a:buNone/>
               <a:defRPr sz="2550" b="0">
                 <a:solidFill>
                   <a:srgbClr val="152B3A"/>
                 </a:solidFill>
+                <a:latin typeface="Arial"/>
+                <a:ea typeface="Arial"/>
+                <a:cs typeface="Arial"/>
               </a:defRPr>
             </a:pPr>
             <a:r>
@@ -6480,6 +7425,9 @@
                 <a:solidFill>
                   <a:srgbClr val="152B3A"/>
                 </a:solidFill>
+                <a:latin typeface="Arial"/>
+                <a:ea typeface="Arial"/>
+                <a:cs typeface="Arial"/>
               </a:rPr>
               <a:t>Green grass makes food using light.</a:t>
             </a:r>
@@ -6502,8 +7450,8 @@
         </p:nvSpPr>
         <p:spPr>
           <a:xfrm xmlns:a="http://schemas.openxmlformats.org/drawingml/2006/main">
-            <a:off x="609600" y="3409950"/>
-            <a:ext cx="10972800" cy="714375"/>
+            <a:off x="609600" y="3143250"/>
+            <a:ext cx="7096125" cy="704850"/>
           </a:xfrm>
           <a:prstGeom xmlns:a="http://schemas.openxmlformats.org/drawingml/2006/main" prst="rect">
             <a:avLst/>
@@ -6515,14 +7463,20 @@
           </a:ln>
         </p:spPr>
         <p:txBody>
-          <a:bodyPr xmlns:a="http://schemas.openxmlformats.org/drawingml/2006/main" lIns="0" tIns="0" rIns="0" bIns="0" anchor="ctr"/>
+          <a:bodyPr xmlns:a="http://schemas.openxmlformats.org/drawingml/2006/main" wrap="square" lIns="0" tIns="0" rIns="0" bIns="0" anchor="ctr">
+            <a:noAutofit/>
+          </a:bodyPr>
           <a:lstStyle xmlns:a="http://schemas.openxmlformats.org/drawingml/2006/main"/>
           <a:p xmlns:a="http://schemas.openxmlformats.org/drawingml/2006/main">
             <a:pPr>
+              <a:buNone/>
               <a:defRPr sz="2550" b="0">
                 <a:solidFill>
                   <a:srgbClr val="152B3A"/>
                 </a:solidFill>
+                <a:latin typeface="Arial"/>
+                <a:ea typeface="Arial"/>
+                <a:cs typeface="Arial"/>
               </a:defRPr>
             </a:pPr>
             <a:r>
@@ -6530,6 +7484,9 @@
                 <a:solidFill>
                   <a:srgbClr val="152B3A"/>
                 </a:solidFill>
+                <a:latin typeface="Arial"/>
+                <a:ea typeface="Arial"/>
+                <a:cs typeface="Arial"/>
               </a:rPr>
               <a:t>A rabbit eats plants.</a:t>
             </a:r>
@@ -6552,8 +7509,8 @@
         </p:nvSpPr>
         <p:spPr>
           <a:xfrm xmlns:a="http://schemas.openxmlformats.org/drawingml/2006/main">
-            <a:off x="609600" y="4200525"/>
-            <a:ext cx="10972800" cy="714375"/>
+            <a:off x="609600" y="3981450"/>
+            <a:ext cx="7096125" cy="704850"/>
           </a:xfrm>
           <a:prstGeom xmlns:a="http://schemas.openxmlformats.org/drawingml/2006/main" prst="rect">
             <a:avLst/>
@@ -6565,14 +7522,20 @@
           </a:ln>
         </p:spPr>
         <p:txBody>
-          <a:bodyPr xmlns:a="http://schemas.openxmlformats.org/drawingml/2006/main" lIns="0" tIns="0" rIns="0" bIns="0" anchor="ctr"/>
+          <a:bodyPr xmlns:a="http://schemas.openxmlformats.org/drawingml/2006/main" wrap="square" lIns="0" tIns="0" rIns="0" bIns="0" anchor="ctr">
+            <a:noAutofit/>
+          </a:bodyPr>
           <a:lstStyle xmlns:a="http://schemas.openxmlformats.org/drawingml/2006/main"/>
           <a:p xmlns:a="http://schemas.openxmlformats.org/drawingml/2006/main">
             <a:pPr>
+              <a:buNone/>
               <a:defRPr sz="2550" b="0">
                 <a:solidFill>
                   <a:srgbClr val="152B3A"/>
                 </a:solidFill>
+                <a:latin typeface="Arial"/>
+                <a:ea typeface="Arial"/>
+                <a:cs typeface="Arial"/>
               </a:defRPr>
             </a:pPr>
             <a:r>
@@ -6580,6 +7543,9 @@
                 <a:solidFill>
                   <a:srgbClr val="152B3A"/>
                 </a:solidFill>
+                <a:latin typeface="Arial"/>
+                <a:ea typeface="Arial"/>
+                <a:cs typeface="Arial"/>
               </a:rPr>
               <a:t>A fox eats other animals.</a:t>
             </a:r>
@@ -6602,8 +7568,8 @@
         </p:nvSpPr>
         <p:spPr>
           <a:xfrm xmlns:a="http://schemas.openxmlformats.org/drawingml/2006/main">
-            <a:off x="609600" y="4991100"/>
-            <a:ext cx="10972800" cy="714375"/>
+            <a:off x="609600" y="4819650"/>
+            <a:ext cx="7096125" cy="704850"/>
           </a:xfrm>
           <a:prstGeom xmlns:a="http://schemas.openxmlformats.org/drawingml/2006/main" prst="rect">
             <a:avLst/>
@@ -6615,27 +7581,80 @@
           </a:ln>
         </p:spPr>
         <p:txBody>
-          <a:bodyPr xmlns:a="http://schemas.openxmlformats.org/drawingml/2006/main" lIns="0" tIns="0" rIns="0" bIns="0" anchor="ctr"/>
+          <a:bodyPr xmlns:a="http://schemas.openxmlformats.org/drawingml/2006/main" wrap="square" lIns="0" tIns="0" rIns="0" bIns="0" anchor="ctr">
+            <a:noAutofit/>
+          </a:bodyPr>
           <a:lstStyle xmlns:a="http://schemas.openxmlformats.org/drawingml/2006/main"/>
           <a:p xmlns:a="http://schemas.openxmlformats.org/drawingml/2006/main">
             <a:pPr>
-              <a:defRPr sz="2550" b="0">
-                <a:solidFill>
-                  <a:srgbClr val="152B3A"/>
-                </a:solidFill>
+              <a:buNone/>
+              <a:defRPr sz="2550" b="1">
+                <a:solidFill>
+                  <a:srgbClr val="28685E"/>
+                </a:solidFill>
+                <a:latin typeface="Arial"/>
+                <a:ea typeface="Arial"/>
+                <a:cs typeface="Arial"/>
               </a:defRPr>
             </a:pPr>
             <a:r>
-              <a:rPr sz="2550" b="0">
-                <a:solidFill>
-                  <a:srgbClr val="152B3A"/>
-                </a:solidFill>
+              <a:rPr sz="2550" b="1">
+                <a:solidFill>
+                  <a:srgbClr val="28685E"/>
+                </a:solidFill>
+                <a:latin typeface="Arial"/>
+                <a:ea typeface="Arial"/>
+                <a:cs typeface="Arial"/>
               </a:rPr>
               <a:t>Choose the role before the explanation.</a:t>
             </a:r>
           </a:p>
         </p:txBody>
       </p:sp>
+      <p:pic>
+        <p:nvPicPr>
+          <p:cNvPr id="27" name=""/>
+          <p:cNvPicPr>
+            <a:picLocks xmlns:a="http://schemas.openxmlformats.org/drawingml/2006/main" noChangeAspect="1"/>
+          </p:cNvPicPr>
+          <p:nvPr/>
+        </p:nvPicPr>
+        <p:blipFill>
+          <a:blip xmlns:r="http://schemas.openxmlformats.org/officeDocument/2006/relationships" xmlns:a="http://schemas.openxmlformats.org/drawingml/2006/main" r:embed="R74b25e3492ee4a79"/>
+          <a:stretch xmlns:a="http://schemas.openxmlformats.org/drawingml/2006/main"/>
+        </p:blipFill>
+        <p:spPr>
+          <a:xfrm xmlns:a="http://schemas.openxmlformats.org/drawingml/2006/main">
+            <a:off x="9182735" y="2381250"/>
+            <a:ext cx="1351280" cy="1524000"/>
+          </a:xfrm>
+          <a:prstGeom xmlns:a="http://schemas.openxmlformats.org/drawingml/2006/main" prst="rect">
+            <a:avLst/>
+          </a:prstGeom>
+        </p:spPr>
+      </p:pic>
+      <p:pic>
+        <p:nvPicPr>
+          <p:cNvPr id="28" name=""/>
+          <p:cNvPicPr>
+            <a:picLocks xmlns:a="http://schemas.openxmlformats.org/drawingml/2006/main" noChangeAspect="1"/>
+          </p:cNvPicPr>
+          <p:nvPr/>
+        </p:nvPicPr>
+        <p:blipFill>
+          <a:blip xmlns:r="http://schemas.openxmlformats.org/officeDocument/2006/relationships" xmlns:a="http://schemas.openxmlformats.org/drawingml/2006/main" r:embed="R71c377c2f4a34db0"/>
+          <a:stretch xmlns:a="http://schemas.openxmlformats.org/drawingml/2006/main"/>
+        </p:blipFill>
+        <p:spPr>
+          <a:xfrm xmlns:a="http://schemas.openxmlformats.org/drawingml/2006/main">
+            <a:off x="8527371" y="4095750"/>
+            <a:ext cx="2662009" cy="1524000"/>
+          </a:xfrm>
+          <a:prstGeom xmlns:a="http://schemas.openxmlformats.org/drawingml/2006/main" prst="rect">
+            <a:avLst/>
+          </a:prstGeom>
+        </p:spPr>
+      </p:pic>
     </p:spTree>
     <p:extLst>
       <p:ext uri="{BB962C8B-B14F-4D97-AF65-F5344CB8AC3E}">
@@ -6652,7 +7671,7 @@
     <p:bg>
       <p:bgPr>
         <a:solidFill xmlns:a="http://schemas.openxmlformats.org/drawingml/2006/main">
-          <a:srgbClr val="F5F1E8"/>
+          <a:srgbClr val="FBF9F3"/>
         </a:solidFill>
       </p:bgPr>
     </p:bg>
@@ -6681,8 +7700,8 @@
         </p:nvSpPr>
         <p:spPr>
           <a:xfrm xmlns:a="http://schemas.openxmlformats.org/drawingml/2006/main">
-            <a:off x="609600" y="552450"/>
-            <a:ext cx="781050" cy="57150"/>
+            <a:off x="609600" y="742950"/>
+            <a:ext cx="9906000" cy="38100"/>
           </a:xfrm>
           <a:prstGeom xmlns:a="http://schemas.openxmlformats.org/drawingml/2006/main" prst="rect">
             <a:avLst/>
@@ -6712,8 +7731,8 @@
         </p:nvSpPr>
         <p:spPr>
           <a:xfrm xmlns:a="http://schemas.openxmlformats.org/drawingml/2006/main">
-            <a:off x="609600" y="762000"/>
-            <a:ext cx="9334500" cy="285750"/>
+            <a:off x="609600" y="342900"/>
+            <a:ext cx="9334500" cy="266700"/>
           </a:xfrm>
           <a:prstGeom xmlns:a="http://schemas.openxmlformats.org/drawingml/2006/main" prst="rect">
             <a:avLst/>
@@ -6725,21 +7744,30 @@
           </a:ln>
         </p:spPr>
         <p:txBody>
-          <a:bodyPr xmlns:a="http://schemas.openxmlformats.org/drawingml/2006/main" lIns="0" tIns="0" rIns="0" bIns="0" anchor="ctr"/>
+          <a:bodyPr xmlns:a="http://schemas.openxmlformats.org/drawingml/2006/main" wrap="square" lIns="0" tIns="0" rIns="0" bIns="0" anchor="ctr">
+            <a:noAutofit/>
+          </a:bodyPr>
           <a:lstStyle xmlns:a="http://schemas.openxmlformats.org/drawingml/2006/main"/>
           <a:p xmlns:a="http://schemas.openxmlformats.org/drawingml/2006/main">
             <a:pPr>
-              <a:defRPr sz="1500" b="1">
+              <a:buNone/>
+              <a:defRPr sz="1425" b="1">
                 <a:solidFill>
                   <a:srgbClr val="28685E"/>
                 </a:solidFill>
+                <a:latin typeface="Arial"/>
+                <a:ea typeface="Arial"/>
+                <a:cs typeface="Arial"/>
               </a:defRPr>
             </a:pPr>
             <a:r>
-              <a:rPr sz="1500" b="1">
+              <a:rPr sz="1425" b="1">
                 <a:solidFill>
                   <a:srgbClr val="28685E"/>
                 </a:solidFill>
+                <a:latin typeface="Arial"/>
+                <a:ea typeface="Arial"/>
+                <a:cs typeface="Arial"/>
               </a:rPr>
               <a:t>MADE BY MATT  /  BUILD SCIENCE</a:t>
             </a:r>
@@ -6748,14 +7776,14 @@
       </p:sp>
       <p:pic>
         <p:nvPicPr>
-          <p:cNvPr id="14" name=""/>
+          <p:cNvPr id="17" name=""/>
           <p:cNvPicPr>
             <a:picLocks xmlns:a="http://schemas.openxmlformats.org/drawingml/2006/main" noChangeAspect="1"/>
           </p:cNvPicPr>
           <p:nvPr/>
         </p:nvPicPr>
         <p:blipFill>
-          <a:blip xmlns:r="http://schemas.openxmlformats.org/officeDocument/2006/relationships" xmlns:a="http://schemas.openxmlformats.org/drawingml/2006/main" r:embed="R8c42a3446ade493a"/>
+          <a:blip xmlns:r="http://schemas.openxmlformats.org/officeDocument/2006/relationships" xmlns:a="http://schemas.openxmlformats.org/drawingml/2006/main" r:embed="R28cd67d742f24c43"/>
           <a:stretch xmlns:a="http://schemas.openxmlformats.org/drawingml/2006/main"/>
         </p:blipFill>
         <p:spPr>
@@ -6784,8 +7812,8 @@
         </p:nvSpPr>
         <p:spPr>
           <a:xfrm xmlns:a="http://schemas.openxmlformats.org/drawingml/2006/main">
-            <a:off x="609600" y="1352550"/>
-            <a:ext cx="10972800" cy="952500"/>
+            <a:off x="609600" y="1047750"/>
+            <a:ext cx="10972800" cy="895350"/>
           </a:xfrm>
           <a:prstGeom xmlns:a="http://schemas.openxmlformats.org/drawingml/2006/main" prst="rect">
             <a:avLst/>
@@ -6797,21 +7825,30 @@
           </a:ln>
         </p:spPr>
         <p:txBody>
-          <a:bodyPr xmlns:a="http://schemas.openxmlformats.org/drawingml/2006/main" lIns="0" tIns="0" rIns="0" bIns="0" anchor="ctr"/>
+          <a:bodyPr xmlns:a="http://schemas.openxmlformats.org/drawingml/2006/main" wrap="square" lIns="0" tIns="0" rIns="0" bIns="0" anchor="ctr">
+            <a:noAutofit/>
+          </a:bodyPr>
           <a:lstStyle xmlns:a="http://schemas.openxmlformats.org/drawingml/2006/main"/>
           <a:p xmlns:a="http://schemas.openxmlformats.org/drawingml/2006/main">
             <a:pPr>
-              <a:defRPr sz="3750" b="1">
+              <a:buNone/>
+              <a:defRPr sz="3600" b="1">
                 <a:solidFill>
                   <a:srgbClr val="152B3A"/>
                 </a:solidFill>
+                <a:latin typeface="Arial"/>
+                <a:ea typeface="Arial"/>
+                <a:cs typeface="Arial"/>
               </a:defRPr>
             </a:pPr>
             <a:r>
-              <a:rPr sz="3750" b="1">
+              <a:rPr sz="3600" b="1">
                 <a:solidFill>
                   <a:srgbClr val="152B3A"/>
                 </a:solidFill>
+                <a:latin typeface="Arial"/>
+                <a:ea typeface="Arial"/>
+                <a:cs typeface="Arial"/>
               </a:rPr>
               <a:t>Try a second set of living things</a:t>
             </a:r>
@@ -6878,21 +7915,30 @@
           </a:ln>
         </p:spPr>
         <p:txBody>
-          <a:bodyPr xmlns:a="http://schemas.openxmlformats.org/drawingml/2006/main" lIns="0" tIns="0" rIns="0" bIns="0" anchor="ctr"/>
+          <a:bodyPr xmlns:a="http://schemas.openxmlformats.org/drawingml/2006/main" wrap="square" lIns="0" tIns="0" rIns="0" bIns="0" anchor="ctr">
+            <a:noAutofit/>
+          </a:bodyPr>
           <a:lstStyle xmlns:a="http://schemas.openxmlformats.org/drawingml/2006/main"/>
           <a:p xmlns:a="http://schemas.openxmlformats.org/drawingml/2006/main">
             <a:pPr>
-              <a:defRPr sz="1275" b="0">
+              <a:buNone/>
+              <a:defRPr sz="1200" b="0">
                 <a:solidFill>
                   <a:srgbClr val="50616B"/>
                 </a:solidFill>
+                <a:latin typeface="Arial"/>
+                <a:ea typeface="Arial"/>
+                <a:cs typeface="Arial"/>
               </a:defRPr>
             </a:pPr>
             <a:r>
-              <a:rPr sz="1275" b="0">
+              <a:rPr sz="1200" b="0">
                 <a:solidFill>
                   <a:srgbClr val="50616B"/>
                 </a:solidFill>
+                <a:latin typeface="Arial"/>
+                <a:ea typeface="Arial"/>
+                <a:cs typeface="Arial"/>
               </a:rPr>
               <a:t>AUTUMN 1  ·  WEEK 7  ·  LESSON A</a:t>
             </a:r>
@@ -6928,14 +7974,20 @@
           </a:ln>
         </p:spPr>
         <p:txBody>
-          <a:bodyPr xmlns:a="http://schemas.openxmlformats.org/drawingml/2006/main" lIns="0" tIns="0" rIns="0" bIns="0" anchor="ctr"/>
+          <a:bodyPr xmlns:a="http://schemas.openxmlformats.org/drawingml/2006/main" wrap="square" lIns="0" tIns="0" rIns="0" bIns="0" anchor="ctr">
+            <a:noAutofit/>
+          </a:bodyPr>
           <a:lstStyle xmlns:a="http://schemas.openxmlformats.org/drawingml/2006/main"/>
           <a:p xmlns:a="http://schemas.openxmlformats.org/drawingml/2006/main">
             <a:pPr>
+              <a:buNone/>
               <a:defRPr sz="1350" b="1">
                 <a:solidFill>
                   <a:srgbClr val="28685E"/>
                 </a:solidFill>
+                <a:latin typeface="Arial"/>
+                <a:ea typeface="Arial"/>
+                <a:cs typeface="Arial"/>
               </a:defRPr>
             </a:pPr>
             <a:r>
@@ -6943,6 +7995,9 @@
                 <a:solidFill>
                   <a:srgbClr val="28685E"/>
                 </a:solidFill>
+                <a:latin typeface="Arial"/>
+                <a:ea typeface="Arial"/>
+                <a:cs typeface="Arial"/>
               </a:rPr>
               <a:t>07</a:t>
             </a:r>
@@ -6965,8 +8020,8 @@
         </p:nvSpPr>
         <p:spPr>
           <a:xfrm xmlns:a="http://schemas.openxmlformats.org/drawingml/2006/main">
-            <a:off x="609600" y="2619375"/>
-            <a:ext cx="10972800" cy="714375"/>
+            <a:off x="609600" y="2305050"/>
+            <a:ext cx="7096125" cy="704850"/>
           </a:xfrm>
           <a:prstGeom xmlns:a="http://schemas.openxmlformats.org/drawingml/2006/main" prst="rect">
             <a:avLst/>
@@ -6978,14 +8033,20 @@
           </a:ln>
         </p:spPr>
         <p:txBody>
-          <a:bodyPr xmlns:a="http://schemas.openxmlformats.org/drawingml/2006/main" lIns="0" tIns="0" rIns="0" bIns="0" anchor="ctr"/>
+          <a:bodyPr xmlns:a="http://schemas.openxmlformats.org/drawingml/2006/main" wrap="square" lIns="0" tIns="0" rIns="0" bIns="0" anchor="ctr">
+            <a:noAutofit/>
+          </a:bodyPr>
           <a:lstStyle xmlns:a="http://schemas.openxmlformats.org/drawingml/2006/main"/>
           <a:p xmlns:a="http://schemas.openxmlformats.org/drawingml/2006/main">
             <a:pPr>
+              <a:buNone/>
               <a:defRPr sz="2550" b="0">
                 <a:solidFill>
                   <a:srgbClr val="152B3A"/>
                 </a:solidFill>
+                <a:latin typeface="Arial"/>
+                <a:ea typeface="Arial"/>
+                <a:cs typeface="Arial"/>
               </a:defRPr>
             </a:pPr>
             <a:r>
@@ -6993,6 +8054,9 @@
                 <a:solidFill>
                   <a:srgbClr val="152B3A"/>
                 </a:solidFill>
+                <a:latin typeface="Arial"/>
+                <a:ea typeface="Arial"/>
+                <a:cs typeface="Arial"/>
               </a:rPr>
               <a:t>Green leaves on a plant</a:t>
             </a:r>
@@ -7015,8 +8079,8 @@
         </p:nvSpPr>
         <p:spPr>
           <a:xfrm xmlns:a="http://schemas.openxmlformats.org/drawingml/2006/main">
-            <a:off x="609600" y="3409950"/>
-            <a:ext cx="10972800" cy="714375"/>
+            <a:off x="609600" y="3143250"/>
+            <a:ext cx="7096125" cy="704850"/>
           </a:xfrm>
           <a:prstGeom xmlns:a="http://schemas.openxmlformats.org/drawingml/2006/main" prst="rect">
             <a:avLst/>
@@ -7028,14 +8092,20 @@
           </a:ln>
         </p:spPr>
         <p:txBody>
-          <a:bodyPr xmlns:a="http://schemas.openxmlformats.org/drawingml/2006/main" lIns="0" tIns="0" rIns="0" bIns="0" anchor="ctr"/>
+          <a:bodyPr xmlns:a="http://schemas.openxmlformats.org/drawingml/2006/main" wrap="square" lIns="0" tIns="0" rIns="0" bIns="0" anchor="ctr">
+            <a:noAutofit/>
+          </a:bodyPr>
           <a:lstStyle xmlns:a="http://schemas.openxmlformats.org/drawingml/2006/main"/>
           <a:p xmlns:a="http://schemas.openxmlformats.org/drawingml/2006/main">
             <a:pPr>
+              <a:buNone/>
               <a:defRPr sz="2550" b="0">
                 <a:solidFill>
                   <a:srgbClr val="152B3A"/>
                 </a:solidFill>
+                <a:latin typeface="Arial"/>
+                <a:ea typeface="Arial"/>
+                <a:cs typeface="Arial"/>
               </a:defRPr>
             </a:pPr>
             <a:r>
@@ -7043,6 +8113,9 @@
                 <a:solidFill>
                   <a:srgbClr val="152B3A"/>
                 </a:solidFill>
+                <a:latin typeface="Arial"/>
+                <a:ea typeface="Arial"/>
+                <a:cs typeface="Arial"/>
               </a:rPr>
               <a:t>Caterpillar</a:t>
             </a:r>
@@ -7065,8 +8138,8 @@
         </p:nvSpPr>
         <p:spPr>
           <a:xfrm xmlns:a="http://schemas.openxmlformats.org/drawingml/2006/main">
-            <a:off x="609600" y="4200525"/>
-            <a:ext cx="10972800" cy="714375"/>
+            <a:off x="609600" y="3981450"/>
+            <a:ext cx="7096125" cy="704850"/>
           </a:xfrm>
           <a:prstGeom xmlns:a="http://schemas.openxmlformats.org/drawingml/2006/main" prst="rect">
             <a:avLst/>
@@ -7078,14 +8151,20 @@
           </a:ln>
         </p:spPr>
         <p:txBody>
-          <a:bodyPr xmlns:a="http://schemas.openxmlformats.org/drawingml/2006/main" lIns="0" tIns="0" rIns="0" bIns="0" anchor="ctr"/>
+          <a:bodyPr xmlns:a="http://schemas.openxmlformats.org/drawingml/2006/main" wrap="square" lIns="0" tIns="0" rIns="0" bIns="0" anchor="ctr">
+            <a:noAutofit/>
+          </a:bodyPr>
           <a:lstStyle xmlns:a="http://schemas.openxmlformats.org/drawingml/2006/main"/>
           <a:p xmlns:a="http://schemas.openxmlformats.org/drawingml/2006/main">
             <a:pPr>
+              <a:buNone/>
               <a:defRPr sz="2550" b="0">
                 <a:solidFill>
                   <a:srgbClr val="152B3A"/>
                 </a:solidFill>
+                <a:latin typeface="Arial"/>
+                <a:ea typeface="Arial"/>
+                <a:cs typeface="Arial"/>
               </a:defRPr>
             </a:pPr>
             <a:r>
@@ -7093,6 +8172,9 @@
                 <a:solidFill>
                   <a:srgbClr val="152B3A"/>
                 </a:solidFill>
+                <a:latin typeface="Arial"/>
+                <a:ea typeface="Arial"/>
+                <a:cs typeface="Arial"/>
               </a:rPr>
               <a:t>Robin</a:t>
             </a:r>
@@ -7115,8 +8197,8 @@
         </p:nvSpPr>
         <p:spPr>
           <a:xfrm xmlns:a="http://schemas.openxmlformats.org/drawingml/2006/main">
-            <a:off x="609600" y="4991100"/>
-            <a:ext cx="10972800" cy="714375"/>
+            <a:off x="609600" y="4819650"/>
+            <a:ext cx="7096125" cy="704850"/>
           </a:xfrm>
           <a:prstGeom xmlns:a="http://schemas.openxmlformats.org/drawingml/2006/main" prst="rect">
             <a:avLst/>
@@ -7128,27 +8210,58 @@
           </a:ln>
         </p:spPr>
         <p:txBody>
-          <a:bodyPr xmlns:a="http://schemas.openxmlformats.org/drawingml/2006/main" lIns="0" tIns="0" rIns="0" bIns="0" anchor="ctr"/>
+          <a:bodyPr xmlns:a="http://schemas.openxmlformats.org/drawingml/2006/main" wrap="square" lIns="0" tIns="0" rIns="0" bIns="0" anchor="ctr">
+            <a:noAutofit/>
+          </a:bodyPr>
           <a:lstStyle xmlns:a="http://schemas.openxmlformats.org/drawingml/2006/main"/>
           <a:p xmlns:a="http://schemas.openxmlformats.org/drawingml/2006/main">
             <a:pPr>
-              <a:defRPr sz="2550" b="0">
-                <a:solidFill>
-                  <a:srgbClr val="152B3A"/>
-                </a:solidFill>
+              <a:buNone/>
+              <a:defRPr sz="2550" b="1">
+                <a:solidFill>
+                  <a:srgbClr val="28685E"/>
+                </a:solidFill>
+                <a:latin typeface="Arial"/>
+                <a:ea typeface="Arial"/>
+                <a:cs typeface="Arial"/>
               </a:defRPr>
             </a:pPr>
             <a:r>
-              <a:rPr sz="2550" b="0">
-                <a:solidFill>
-                  <a:srgbClr val="152B3A"/>
-                </a:solidFill>
+              <a:rPr sz="2550" b="1">
+                <a:solidFill>
+                  <a:srgbClr val="28685E"/>
+                </a:solidFill>
+                <a:latin typeface="Arial"/>
+                <a:ea typeface="Arial"/>
+                <a:cs typeface="Arial"/>
               </a:rPr>
               <a:t>Which one makes food using light?</a:t>
             </a:r>
           </a:p>
         </p:txBody>
       </p:sp>
+      <p:pic>
+        <p:nvPicPr>
+          <p:cNvPr id="26" name=""/>
+          <p:cNvPicPr>
+            <a:picLocks xmlns:a="http://schemas.openxmlformats.org/drawingml/2006/main" noChangeAspect="1"/>
+          </p:cNvPicPr>
+          <p:nvPr/>
+        </p:nvPicPr>
+        <p:blipFill>
+          <a:blip xmlns:r="http://schemas.openxmlformats.org/officeDocument/2006/relationships" xmlns:a="http://schemas.openxmlformats.org/drawingml/2006/main" r:embed="R938a87bf848c4209"/>
+          <a:stretch xmlns:a="http://schemas.openxmlformats.org/drawingml/2006/main"/>
+        </p:blipFill>
+        <p:spPr>
+          <a:xfrm xmlns:a="http://schemas.openxmlformats.org/drawingml/2006/main">
+            <a:off x="8546306" y="2686050"/>
+            <a:ext cx="2624138" cy="2714625"/>
+          </a:xfrm>
+          <a:prstGeom xmlns:a="http://schemas.openxmlformats.org/drawingml/2006/main" prst="rect">
+            <a:avLst/>
+          </a:prstGeom>
+        </p:spPr>
+      </p:pic>
     </p:spTree>
     <p:extLst>
       <p:ext uri="{BB962C8B-B14F-4D97-AF65-F5344CB8AC3E}">
@@ -7165,7 +8278,7 @@
     <p:bg>
       <p:bgPr>
         <a:solidFill xmlns:a="http://schemas.openxmlformats.org/drawingml/2006/main">
-          <a:srgbClr val="F5F1E8"/>
+          <a:srgbClr val="FBF9F3"/>
         </a:solidFill>
       </p:bgPr>
     </p:bg>
@@ -7194,8 +8307,8 @@
         </p:nvSpPr>
         <p:spPr>
           <a:xfrm xmlns:a="http://schemas.openxmlformats.org/drawingml/2006/main">
-            <a:off x="609600" y="552450"/>
-            <a:ext cx="781050" cy="57150"/>
+            <a:off x="609600" y="742950"/>
+            <a:ext cx="9906000" cy="38100"/>
           </a:xfrm>
           <a:prstGeom xmlns:a="http://schemas.openxmlformats.org/drawingml/2006/main" prst="rect">
             <a:avLst/>
@@ -7225,8 +8338,8 @@
         </p:nvSpPr>
         <p:spPr>
           <a:xfrm xmlns:a="http://schemas.openxmlformats.org/drawingml/2006/main">
-            <a:off x="609600" y="762000"/>
-            <a:ext cx="9334500" cy="285750"/>
+            <a:off x="609600" y="342900"/>
+            <a:ext cx="9334500" cy="266700"/>
           </a:xfrm>
           <a:prstGeom xmlns:a="http://schemas.openxmlformats.org/drawingml/2006/main" prst="rect">
             <a:avLst/>
@@ -7238,21 +8351,30 @@
           </a:ln>
         </p:spPr>
         <p:txBody>
-          <a:bodyPr xmlns:a="http://schemas.openxmlformats.org/drawingml/2006/main" lIns="0" tIns="0" rIns="0" bIns="0" anchor="ctr"/>
+          <a:bodyPr xmlns:a="http://schemas.openxmlformats.org/drawingml/2006/main" wrap="square" lIns="0" tIns="0" rIns="0" bIns="0" anchor="ctr">
+            <a:noAutofit/>
+          </a:bodyPr>
           <a:lstStyle xmlns:a="http://schemas.openxmlformats.org/drawingml/2006/main"/>
           <a:p xmlns:a="http://schemas.openxmlformats.org/drawingml/2006/main">
             <a:pPr>
-              <a:defRPr sz="1500" b="1">
+              <a:buNone/>
+              <a:defRPr sz="1425" b="1">
                 <a:solidFill>
                   <a:srgbClr val="28685E"/>
                 </a:solidFill>
+                <a:latin typeface="Arial"/>
+                <a:ea typeface="Arial"/>
+                <a:cs typeface="Arial"/>
               </a:defRPr>
             </a:pPr>
             <a:r>
-              <a:rPr sz="1500" b="1">
+              <a:rPr sz="1425" b="1">
                 <a:solidFill>
                   <a:srgbClr val="28685E"/>
                 </a:solidFill>
+                <a:latin typeface="Arial"/>
+                <a:ea typeface="Arial"/>
+                <a:cs typeface="Arial"/>
               </a:rPr>
               <a:t>MADE BY MATT  /  BUILD SCIENCE</a:t>
             </a:r>
@@ -7261,14 +8383,14 @@
       </p:sp>
       <p:pic>
         <p:nvPicPr>
-          <p:cNvPr id="13" name=""/>
+          <p:cNvPr id="16" name=""/>
           <p:cNvPicPr>
             <a:picLocks xmlns:a="http://schemas.openxmlformats.org/drawingml/2006/main" noChangeAspect="1"/>
           </p:cNvPicPr>
           <p:nvPr/>
         </p:nvPicPr>
         <p:blipFill>
-          <a:blip xmlns:r="http://schemas.openxmlformats.org/officeDocument/2006/relationships" xmlns:a="http://schemas.openxmlformats.org/drawingml/2006/main" r:embed="R8438b7df58134b96"/>
+          <a:blip xmlns:r="http://schemas.openxmlformats.org/officeDocument/2006/relationships" xmlns:a="http://schemas.openxmlformats.org/drawingml/2006/main" r:embed="Reda145ccb0784c52"/>
           <a:stretch xmlns:a="http://schemas.openxmlformats.org/drawingml/2006/main"/>
         </p:blipFill>
         <p:spPr>
@@ -7297,8 +8419,8 @@
         </p:nvSpPr>
         <p:spPr>
           <a:xfrm xmlns:a="http://schemas.openxmlformats.org/drawingml/2006/main">
-            <a:off x="609600" y="1352550"/>
-            <a:ext cx="10972800" cy="952500"/>
+            <a:off x="609600" y="1047750"/>
+            <a:ext cx="10972800" cy="895350"/>
           </a:xfrm>
           <a:prstGeom xmlns:a="http://schemas.openxmlformats.org/drawingml/2006/main" prst="rect">
             <a:avLst/>
@@ -7310,21 +8432,30 @@
           </a:ln>
         </p:spPr>
         <p:txBody>
-          <a:bodyPr xmlns:a="http://schemas.openxmlformats.org/drawingml/2006/main" lIns="0" tIns="0" rIns="0" bIns="0" anchor="ctr"/>
+          <a:bodyPr xmlns:a="http://schemas.openxmlformats.org/drawingml/2006/main" wrap="square" lIns="0" tIns="0" rIns="0" bIns="0" anchor="ctr">
+            <a:noAutofit/>
+          </a:bodyPr>
           <a:lstStyle xmlns:a="http://schemas.openxmlformats.org/drawingml/2006/main"/>
           <a:p xmlns:a="http://schemas.openxmlformats.org/drawingml/2006/main">
             <a:pPr>
-              <a:defRPr sz="3750" b="1">
+              <a:buNone/>
+              <a:defRPr sz="3600" b="1">
                 <a:solidFill>
                   <a:srgbClr val="152B3A"/>
                 </a:solidFill>
+                <a:latin typeface="Arial"/>
+                <a:ea typeface="Arial"/>
+                <a:cs typeface="Arial"/>
               </a:defRPr>
             </a:pPr>
             <a:r>
-              <a:rPr sz="3750" b="1">
+              <a:rPr sz="3600" b="1">
                 <a:solidFill>
                   <a:srgbClr val="152B3A"/>
                 </a:solidFill>
+                <a:latin typeface="Arial"/>
+                <a:ea typeface="Arial"/>
+                <a:cs typeface="Arial"/>
               </a:rPr>
               <a:t>Cover the plant: what might change?</a:t>
             </a:r>
@@ -7391,21 +8522,30 @@
           </a:ln>
         </p:spPr>
         <p:txBody>
-          <a:bodyPr xmlns:a="http://schemas.openxmlformats.org/drawingml/2006/main" lIns="0" tIns="0" rIns="0" bIns="0" anchor="ctr"/>
+          <a:bodyPr xmlns:a="http://schemas.openxmlformats.org/drawingml/2006/main" wrap="square" lIns="0" tIns="0" rIns="0" bIns="0" anchor="ctr">
+            <a:noAutofit/>
+          </a:bodyPr>
           <a:lstStyle xmlns:a="http://schemas.openxmlformats.org/drawingml/2006/main"/>
           <a:p xmlns:a="http://schemas.openxmlformats.org/drawingml/2006/main">
             <a:pPr>
-              <a:defRPr sz="1275" b="0">
+              <a:buNone/>
+              <a:defRPr sz="1200" b="0">
                 <a:solidFill>
                   <a:srgbClr val="50616B"/>
                 </a:solidFill>
+                <a:latin typeface="Arial"/>
+                <a:ea typeface="Arial"/>
+                <a:cs typeface="Arial"/>
               </a:defRPr>
             </a:pPr>
             <a:r>
-              <a:rPr sz="1275" b="0">
+              <a:rPr sz="1200" b="0">
                 <a:solidFill>
                   <a:srgbClr val="50616B"/>
                 </a:solidFill>
+                <a:latin typeface="Arial"/>
+                <a:ea typeface="Arial"/>
+                <a:cs typeface="Arial"/>
               </a:rPr>
               <a:t>AUTUMN 1  ·  WEEK 7  ·  LESSON A</a:t>
             </a:r>
@@ -7441,14 +8581,20 @@
           </a:ln>
         </p:spPr>
         <p:txBody>
-          <a:bodyPr xmlns:a="http://schemas.openxmlformats.org/drawingml/2006/main" lIns="0" tIns="0" rIns="0" bIns="0" anchor="ctr"/>
+          <a:bodyPr xmlns:a="http://schemas.openxmlformats.org/drawingml/2006/main" wrap="square" lIns="0" tIns="0" rIns="0" bIns="0" anchor="ctr">
+            <a:noAutofit/>
+          </a:bodyPr>
           <a:lstStyle xmlns:a="http://schemas.openxmlformats.org/drawingml/2006/main"/>
           <a:p xmlns:a="http://schemas.openxmlformats.org/drawingml/2006/main">
             <a:pPr>
+              <a:buNone/>
               <a:defRPr sz="1350" b="1">
                 <a:solidFill>
                   <a:srgbClr val="28685E"/>
                 </a:solidFill>
+                <a:latin typeface="Arial"/>
+                <a:ea typeface="Arial"/>
+                <a:cs typeface="Arial"/>
               </a:defRPr>
             </a:pPr>
             <a:r>
@@ -7456,6 +8602,9 @@
                 <a:solidFill>
                   <a:srgbClr val="28685E"/>
                 </a:solidFill>
+                <a:latin typeface="Arial"/>
+                <a:ea typeface="Arial"/>
+                <a:cs typeface="Arial"/>
               </a:rPr>
               <a:t>08</a:t>
             </a:r>
@@ -7478,8 +8627,8 @@
         </p:nvSpPr>
         <p:spPr>
           <a:xfrm xmlns:a="http://schemas.openxmlformats.org/drawingml/2006/main">
-            <a:off x="609600" y="2619375"/>
-            <a:ext cx="10972800" cy="781050"/>
+            <a:off x="609600" y="2305050"/>
+            <a:ext cx="7096125" cy="914400"/>
           </a:xfrm>
           <a:prstGeom xmlns:a="http://schemas.openxmlformats.org/drawingml/2006/main" prst="rect">
             <a:avLst/>
@@ -7491,14 +8640,20 @@
           </a:ln>
         </p:spPr>
         <p:txBody>
-          <a:bodyPr xmlns:a="http://schemas.openxmlformats.org/drawingml/2006/main" lIns="0" tIns="0" rIns="0" bIns="0" anchor="ctr"/>
+          <a:bodyPr xmlns:a="http://schemas.openxmlformats.org/drawingml/2006/main" wrap="square" lIns="0" tIns="0" rIns="0" bIns="0" anchor="ctr">
+            <a:noAutofit/>
+          </a:bodyPr>
           <a:lstStyle xmlns:a="http://schemas.openxmlformats.org/drawingml/2006/main"/>
           <a:p xmlns:a="http://schemas.openxmlformats.org/drawingml/2006/main">
             <a:pPr>
+              <a:buNone/>
               <a:defRPr sz="2550" b="0">
                 <a:solidFill>
                   <a:srgbClr val="152B3A"/>
                 </a:solidFill>
+                <a:latin typeface="Arial"/>
+                <a:ea typeface="Arial"/>
+                <a:cs typeface="Arial"/>
               </a:defRPr>
             </a:pPr>
             <a:r>
@@ -7506,6 +8661,9 @@
                 <a:solidFill>
                   <a:srgbClr val="152B3A"/>
                 </a:solidFill>
+                <a:latin typeface="Arial"/>
+                <a:ea typeface="Arial"/>
+                <a:cs typeface="Arial"/>
               </a:rPr>
               <a:t>Cover the grass in the model chain.</a:t>
             </a:r>
@@ -7528,8 +8686,8 @@
         </p:nvSpPr>
         <p:spPr>
           <a:xfrm xmlns:a="http://schemas.openxmlformats.org/drawingml/2006/main">
-            <a:off x="609600" y="3476625"/>
-            <a:ext cx="10972800" cy="781050"/>
+            <a:off x="609600" y="3352800"/>
+            <a:ext cx="7096125" cy="914400"/>
           </a:xfrm>
           <a:prstGeom xmlns:a="http://schemas.openxmlformats.org/drawingml/2006/main" prst="rect">
             <a:avLst/>
@@ -7541,14 +8699,20 @@
           </a:ln>
         </p:spPr>
         <p:txBody>
-          <a:bodyPr xmlns:a="http://schemas.openxmlformats.org/drawingml/2006/main" lIns="0" tIns="0" rIns="0" bIns="0" anchor="ctr"/>
+          <a:bodyPr xmlns:a="http://schemas.openxmlformats.org/drawingml/2006/main" wrap="square" lIns="0" tIns="0" rIns="0" bIns="0" anchor="ctr">
+            <a:noAutofit/>
+          </a:bodyPr>
           <a:lstStyle xmlns:a="http://schemas.openxmlformats.org/drawingml/2006/main"/>
           <a:p xmlns:a="http://schemas.openxmlformats.org/drawingml/2006/main">
             <a:pPr>
+              <a:buNone/>
               <a:defRPr sz="2550" b="0">
                 <a:solidFill>
                   <a:srgbClr val="152B3A"/>
                 </a:solidFill>
+                <a:latin typeface="Arial"/>
+                <a:ea typeface="Arial"/>
+                <a:cs typeface="Arial"/>
               </a:defRPr>
             </a:pPr>
             <a:r>
@@ -7556,6 +8720,9 @@
                 <a:solidFill>
                   <a:srgbClr val="152B3A"/>
                 </a:solidFill>
+                <a:latin typeface="Arial"/>
+                <a:ea typeface="Arial"/>
+                <a:cs typeface="Arial"/>
               </a:rPr>
               <a:t>What food source does the rabbit lose?</a:t>
             </a:r>
@@ -7578,8 +8745,8 @@
         </p:nvSpPr>
         <p:spPr>
           <a:xfrm xmlns:a="http://schemas.openxmlformats.org/drawingml/2006/main">
-            <a:off x="609600" y="4333875"/>
-            <a:ext cx="10972800" cy="781050"/>
+            <a:off x="609600" y="4400550"/>
+            <a:ext cx="7096125" cy="914400"/>
           </a:xfrm>
           <a:prstGeom xmlns:a="http://schemas.openxmlformats.org/drawingml/2006/main" prst="rect">
             <a:avLst/>
@@ -7591,27 +8758,58 @@
           </a:ln>
         </p:spPr>
         <p:txBody>
-          <a:bodyPr xmlns:a="http://schemas.openxmlformats.org/drawingml/2006/main" lIns="0" tIns="0" rIns="0" bIns="0" anchor="ctr"/>
+          <a:bodyPr xmlns:a="http://schemas.openxmlformats.org/drawingml/2006/main" wrap="square" lIns="0" tIns="0" rIns="0" bIns="0" anchor="ctr">
+            <a:noAutofit/>
+          </a:bodyPr>
           <a:lstStyle xmlns:a="http://schemas.openxmlformats.org/drawingml/2006/main"/>
           <a:p xmlns:a="http://schemas.openxmlformats.org/drawingml/2006/main">
             <a:pPr>
-              <a:defRPr sz="2550" b="0">
-                <a:solidFill>
-                  <a:srgbClr val="152B3A"/>
-                </a:solidFill>
+              <a:buNone/>
+              <a:defRPr sz="2550" b="1">
+                <a:solidFill>
+                  <a:srgbClr val="28685E"/>
+                </a:solidFill>
+                <a:latin typeface="Arial"/>
+                <a:ea typeface="Arial"/>
+                <a:cs typeface="Arial"/>
               </a:defRPr>
             </a:pPr>
             <a:r>
-              <a:rPr sz="2550" b="0">
-                <a:solidFill>
-                  <a:srgbClr val="152B3A"/>
-                </a:solidFill>
+              <a:rPr sz="2550" b="1">
+                <a:solidFill>
+                  <a:srgbClr val="28685E"/>
+                </a:solidFill>
+                <a:latin typeface="Arial"/>
+                <a:ea typeface="Arial"/>
+                <a:cs typeface="Arial"/>
               </a:rPr>
               <a:t>Could a fox be affected later?</a:t>
             </a:r>
           </a:p>
         </p:txBody>
       </p:sp>
+      <p:pic>
+        <p:nvPicPr>
+          <p:cNvPr id="24" name=""/>
+          <p:cNvPicPr>
+            <a:picLocks xmlns:a="http://schemas.openxmlformats.org/drawingml/2006/main" noChangeAspect="1"/>
+          </p:cNvPicPr>
+          <p:nvPr/>
+        </p:nvPicPr>
+        <p:blipFill>
+          <a:blip xmlns:r="http://schemas.openxmlformats.org/officeDocument/2006/relationships" xmlns:a="http://schemas.openxmlformats.org/drawingml/2006/main" r:embed="R06f7266a864d4685"/>
+          <a:stretch xmlns:a="http://schemas.openxmlformats.org/drawingml/2006/main"/>
+        </p:blipFill>
+        <p:spPr>
+          <a:xfrm xmlns:a="http://schemas.openxmlformats.org/drawingml/2006/main">
+            <a:off x="8786098" y="2686050"/>
+            <a:ext cx="2144554" cy="2714625"/>
+          </a:xfrm>
+          <a:prstGeom xmlns:a="http://schemas.openxmlformats.org/drawingml/2006/main" prst="rect">
+            <a:avLst/>
+          </a:prstGeom>
+        </p:spPr>
+      </p:pic>
     </p:spTree>
     <p:extLst>
       <p:ext uri="{BB962C8B-B14F-4D97-AF65-F5344CB8AC3E}">
@@ -7628,7 +8826,7 @@
     <p:bg>
       <p:bgPr>
         <a:solidFill xmlns:a="http://schemas.openxmlformats.org/drawingml/2006/main">
-          <a:srgbClr val="F5F1E8"/>
+          <a:srgbClr val="FBF9F3"/>
         </a:solidFill>
       </p:bgPr>
     </p:bg>
@@ -7657,8 +8855,8 @@
         </p:nvSpPr>
         <p:spPr>
           <a:xfrm xmlns:a="http://schemas.openxmlformats.org/drawingml/2006/main">
-            <a:off x="609600" y="552450"/>
-            <a:ext cx="781050" cy="57150"/>
+            <a:off x="609600" y="742950"/>
+            <a:ext cx="9906000" cy="38100"/>
           </a:xfrm>
           <a:prstGeom xmlns:a="http://schemas.openxmlformats.org/drawingml/2006/main" prst="rect">
             <a:avLst/>
@@ -7688,8 +8886,8 @@
         </p:nvSpPr>
         <p:spPr>
           <a:xfrm xmlns:a="http://schemas.openxmlformats.org/drawingml/2006/main">
-            <a:off x="609600" y="762000"/>
-            <a:ext cx="9334500" cy="285750"/>
+            <a:off x="609600" y="342900"/>
+            <a:ext cx="9334500" cy="266700"/>
           </a:xfrm>
           <a:prstGeom xmlns:a="http://schemas.openxmlformats.org/drawingml/2006/main" prst="rect">
             <a:avLst/>
@@ -7701,21 +8899,30 @@
           </a:ln>
         </p:spPr>
         <p:txBody>
-          <a:bodyPr xmlns:a="http://schemas.openxmlformats.org/drawingml/2006/main" lIns="0" tIns="0" rIns="0" bIns="0" anchor="ctr"/>
+          <a:bodyPr xmlns:a="http://schemas.openxmlformats.org/drawingml/2006/main" wrap="square" lIns="0" tIns="0" rIns="0" bIns="0" anchor="ctr">
+            <a:noAutofit/>
+          </a:bodyPr>
           <a:lstStyle xmlns:a="http://schemas.openxmlformats.org/drawingml/2006/main"/>
           <a:p xmlns:a="http://schemas.openxmlformats.org/drawingml/2006/main">
             <a:pPr>
-              <a:defRPr sz="1500" b="1">
+              <a:buNone/>
+              <a:defRPr sz="1425" b="1">
                 <a:solidFill>
                   <a:srgbClr val="28685E"/>
                 </a:solidFill>
+                <a:latin typeface="Arial"/>
+                <a:ea typeface="Arial"/>
+                <a:cs typeface="Arial"/>
               </a:defRPr>
             </a:pPr>
             <a:r>
-              <a:rPr sz="1500" b="1">
+              <a:rPr sz="1425" b="1">
                 <a:solidFill>
                   <a:srgbClr val="28685E"/>
                 </a:solidFill>
+                <a:latin typeface="Arial"/>
+                <a:ea typeface="Arial"/>
+                <a:cs typeface="Arial"/>
               </a:rPr>
               <a:t>MADE BY MATT  /  BUILD SCIENCE</a:t>
             </a:r>
@@ -7724,14 +8931,14 @@
       </p:sp>
       <p:pic>
         <p:nvPicPr>
-          <p:cNvPr id="12" name=""/>
+          <p:cNvPr id="15" name=""/>
           <p:cNvPicPr>
             <a:picLocks xmlns:a="http://schemas.openxmlformats.org/drawingml/2006/main" noChangeAspect="1"/>
           </p:cNvPicPr>
           <p:nvPr/>
         </p:nvPicPr>
         <p:blipFill>
-          <a:blip xmlns:r="http://schemas.openxmlformats.org/officeDocument/2006/relationships" xmlns:a="http://schemas.openxmlformats.org/drawingml/2006/main" r:embed="R98957ed8932d4535"/>
+          <a:blip xmlns:r="http://schemas.openxmlformats.org/officeDocument/2006/relationships" xmlns:a="http://schemas.openxmlformats.org/drawingml/2006/main" r:embed="R308cde2a05e34bf7"/>
           <a:stretch xmlns:a="http://schemas.openxmlformats.org/drawingml/2006/main"/>
         </p:blipFill>
         <p:spPr>
@@ -7760,8 +8967,8 @@
         </p:nvSpPr>
         <p:spPr>
           <a:xfrm xmlns:a="http://schemas.openxmlformats.org/drawingml/2006/main">
-            <a:off x="609600" y="1352550"/>
-            <a:ext cx="10972800" cy="952500"/>
+            <a:off x="609600" y="1047750"/>
+            <a:ext cx="10972800" cy="895350"/>
           </a:xfrm>
           <a:prstGeom xmlns:a="http://schemas.openxmlformats.org/drawingml/2006/main" prst="rect">
             <a:avLst/>
@@ -7773,21 +8980,30 @@
           </a:ln>
         </p:spPr>
         <p:txBody>
-          <a:bodyPr xmlns:a="http://schemas.openxmlformats.org/drawingml/2006/main" lIns="0" tIns="0" rIns="0" bIns="0" anchor="ctr"/>
+          <a:bodyPr xmlns:a="http://schemas.openxmlformats.org/drawingml/2006/main" wrap="square" lIns="0" tIns="0" rIns="0" bIns="0" anchor="ctr">
+            <a:noAutofit/>
+          </a:bodyPr>
           <a:lstStyle xmlns:a="http://schemas.openxmlformats.org/drawingml/2006/main"/>
           <a:p xmlns:a="http://schemas.openxmlformats.org/drawingml/2006/main">
             <a:pPr>
-              <a:defRPr sz="3750" b="1">
+              <a:buNone/>
+              <a:defRPr sz="3600" b="1">
                 <a:solidFill>
                   <a:srgbClr val="152B3A"/>
                 </a:solidFill>
+                <a:latin typeface="Arial"/>
+                <a:ea typeface="Arial"/>
+                <a:cs typeface="Arial"/>
               </a:defRPr>
             </a:pPr>
             <a:r>
-              <a:rPr sz="3750" b="1">
+              <a:rPr sz="3600" b="1">
                 <a:solidFill>
                   <a:srgbClr val="152B3A"/>
                 </a:solidFill>
+                <a:latin typeface="Arial"/>
+                <a:ea typeface="Arial"/>
+                <a:cs typeface="Arial"/>
               </a:rPr>
               <a:t>Explain a consumer using because</a:t>
             </a:r>
@@ -7854,21 +9070,30 @@
           </a:ln>
         </p:spPr>
         <p:txBody>
-          <a:bodyPr xmlns:a="http://schemas.openxmlformats.org/drawingml/2006/main" lIns="0" tIns="0" rIns="0" bIns="0" anchor="ctr"/>
+          <a:bodyPr xmlns:a="http://schemas.openxmlformats.org/drawingml/2006/main" wrap="square" lIns="0" tIns="0" rIns="0" bIns="0" anchor="ctr">
+            <a:noAutofit/>
+          </a:bodyPr>
           <a:lstStyle xmlns:a="http://schemas.openxmlformats.org/drawingml/2006/main"/>
           <a:p xmlns:a="http://schemas.openxmlformats.org/drawingml/2006/main">
             <a:pPr>
-              <a:defRPr sz="1275" b="0">
+              <a:buNone/>
+              <a:defRPr sz="1200" b="0">
                 <a:solidFill>
                   <a:srgbClr val="50616B"/>
                 </a:solidFill>
+                <a:latin typeface="Arial"/>
+                <a:ea typeface="Arial"/>
+                <a:cs typeface="Arial"/>
               </a:defRPr>
             </a:pPr>
             <a:r>
-              <a:rPr sz="1275" b="0">
+              <a:rPr sz="1200" b="0">
                 <a:solidFill>
                   <a:srgbClr val="50616B"/>
                 </a:solidFill>
+                <a:latin typeface="Arial"/>
+                <a:ea typeface="Arial"/>
+                <a:cs typeface="Arial"/>
               </a:rPr>
               <a:t>AUTUMN 1  ·  WEEK 7  ·  LESSON A</a:t>
             </a:r>
@@ -7904,14 +9129,20 @@
           </a:ln>
         </p:spPr>
         <p:txBody>
-          <a:bodyPr xmlns:a="http://schemas.openxmlformats.org/drawingml/2006/main" lIns="0" tIns="0" rIns="0" bIns="0" anchor="ctr"/>
+          <a:bodyPr xmlns:a="http://schemas.openxmlformats.org/drawingml/2006/main" wrap="square" lIns="0" tIns="0" rIns="0" bIns="0" anchor="ctr">
+            <a:noAutofit/>
+          </a:bodyPr>
           <a:lstStyle xmlns:a="http://schemas.openxmlformats.org/drawingml/2006/main"/>
           <a:p xmlns:a="http://schemas.openxmlformats.org/drawingml/2006/main">
             <a:pPr>
+              <a:buNone/>
               <a:defRPr sz="1350" b="1">
                 <a:solidFill>
                   <a:srgbClr val="28685E"/>
                 </a:solidFill>
+                <a:latin typeface="Arial"/>
+                <a:ea typeface="Arial"/>
+                <a:cs typeface="Arial"/>
               </a:defRPr>
             </a:pPr>
             <a:r>
@@ -7919,6 +9150,9 @@
                 <a:solidFill>
                   <a:srgbClr val="28685E"/>
                 </a:solidFill>
+                <a:latin typeface="Arial"/>
+                <a:ea typeface="Arial"/>
+                <a:cs typeface="Arial"/>
               </a:rPr>
               <a:t>09</a:t>
             </a:r>
@@ -7941,8 +9175,8 @@
         </p:nvSpPr>
         <p:spPr>
           <a:xfrm xmlns:a="http://schemas.openxmlformats.org/drawingml/2006/main">
-            <a:off x="609600" y="2686050"/>
-            <a:ext cx="10858500" cy="1524000"/>
+            <a:off x="609600" y="2428875"/>
+            <a:ext cx="6762750" cy="2190750"/>
           </a:xfrm>
           <a:prstGeom xmlns:a="http://schemas.openxmlformats.org/drawingml/2006/main" prst="rect">
             <a:avLst/>
@@ -7954,21 +9188,30 @@
           </a:ln>
         </p:spPr>
         <p:txBody>
-          <a:bodyPr xmlns:a="http://schemas.openxmlformats.org/drawingml/2006/main" lIns="0" tIns="0" rIns="0" bIns="0" anchor="ctr"/>
+          <a:bodyPr xmlns:a="http://schemas.openxmlformats.org/drawingml/2006/main" wrap="square" lIns="0" tIns="0" rIns="0" bIns="0" anchor="ctr">
+            <a:noAutofit/>
+          </a:bodyPr>
           <a:lstStyle xmlns:a="http://schemas.openxmlformats.org/drawingml/2006/main"/>
           <a:p xmlns:a="http://schemas.openxmlformats.org/drawingml/2006/main">
             <a:pPr>
-              <a:defRPr sz="2925" b="1">
+              <a:buNone/>
+              <a:defRPr sz="2850" b="1">
                 <a:solidFill>
                   <a:srgbClr val="28685E"/>
                 </a:solidFill>
+                <a:latin typeface="Arial"/>
+                <a:ea typeface="Arial"/>
+                <a:cs typeface="Arial"/>
               </a:defRPr>
             </a:pPr>
             <a:r>
-              <a:rPr sz="2925" b="1">
+              <a:rPr sz="2850" b="1">
                 <a:solidFill>
                   <a:srgbClr val="28685E"/>
                 </a:solidFill>
+                <a:latin typeface="Arial"/>
+                <a:ea typeface="Arial"/>
+                <a:cs typeface="Arial"/>
               </a:rPr>
               <a:t>The fox is a consumer because it obtains food by eating other living things.</a:t>
             </a:r>
@@ -7991,8 +9234,8 @@
         </p:nvSpPr>
         <p:spPr>
           <a:xfrm xmlns:a="http://schemas.openxmlformats.org/drawingml/2006/main">
-            <a:off x="609600" y="4552950"/>
-            <a:ext cx="10858500" cy="1285875"/>
+            <a:off x="609600" y="4972050"/>
+            <a:ext cx="7191375" cy="981075"/>
           </a:xfrm>
           <a:prstGeom xmlns:a="http://schemas.openxmlformats.org/drawingml/2006/main" prst="rect">
             <a:avLst/>
@@ -8004,27 +9247,58 @@
           </a:ln>
         </p:spPr>
         <p:txBody>
-          <a:bodyPr xmlns:a="http://schemas.openxmlformats.org/drawingml/2006/main" lIns="0" tIns="0" rIns="0" bIns="0" anchor="ctr"/>
+          <a:bodyPr xmlns:a="http://schemas.openxmlformats.org/drawingml/2006/main" wrap="square" lIns="0" tIns="0" rIns="0" bIns="0" anchor="ctr">
+            <a:noAutofit/>
+          </a:bodyPr>
           <a:lstStyle xmlns:a="http://schemas.openxmlformats.org/drawingml/2006/main"/>
           <a:p xmlns:a="http://schemas.openxmlformats.org/drawingml/2006/main">
             <a:pPr>
-              <a:defRPr sz="2700" b="0">
+              <a:buNone/>
+              <a:defRPr sz="2325" b="0">
                 <a:solidFill>
                   <a:srgbClr val="152B3A"/>
                 </a:solidFill>
+                <a:latin typeface="Arial"/>
+                <a:ea typeface="Arial"/>
+                <a:cs typeface="Arial"/>
               </a:defRPr>
             </a:pPr>
             <a:r>
-              <a:rPr sz="2700" b="0">
+              <a:rPr sz="2325" b="0">
                 <a:solidFill>
                   <a:srgbClr val="152B3A"/>
                 </a:solidFill>
+                <a:latin typeface="Arial"/>
+                <a:ea typeface="Arial"/>
+                <a:cs typeface="Arial"/>
               </a:rPr>
               <a:t>Food-chain arrows show food and energy passing to the eater.</a:t>
             </a:r>
           </a:p>
         </p:txBody>
       </p:sp>
+      <p:pic>
+        <p:nvPicPr>
+          <p:cNvPr id="22" name=""/>
+          <p:cNvPicPr>
+            <a:picLocks xmlns:a="http://schemas.openxmlformats.org/drawingml/2006/main" noChangeAspect="1"/>
+          </p:cNvPicPr>
+          <p:nvPr/>
+        </p:nvPicPr>
+        <p:blipFill>
+          <a:blip xmlns:r="http://schemas.openxmlformats.org/officeDocument/2006/relationships" xmlns:a="http://schemas.openxmlformats.org/drawingml/2006/main" r:embed="R1f02dc033140478e"/>
+          <a:stretch xmlns:a="http://schemas.openxmlformats.org/drawingml/2006/main"/>
+        </p:blipFill>
+        <p:spPr>
+          <a:xfrm xmlns:a="http://schemas.openxmlformats.org/drawingml/2006/main">
+            <a:off x="8286750" y="3018473"/>
+            <a:ext cx="3048000" cy="1744980"/>
+          </a:xfrm>
+          <a:prstGeom xmlns:a="http://schemas.openxmlformats.org/drawingml/2006/main" prst="rect">
+            <a:avLst/>
+          </a:prstGeom>
+        </p:spPr>
+      </p:pic>
     </p:spTree>
     <p:extLst>
       <p:ext uri="{BB962C8B-B14F-4D97-AF65-F5344CB8AC3E}">
